--- a/Tender_Intelligence_CGI.pptx
+++ b/Tender_Intelligence_CGI.pptx
@@ -20,6 +20,8 @@
     <p:sldId id="262" r:id="rId20"/>
     <p:sldId id="263" r:id="rId21"/>
     <p:sldId id="264" r:id="rId22"/>
+    <p:sldId id="265" r:id="rId23"/>
+    <p:sldId id="266" r:id="rId24"/>
   </p:sldIdLst>
   <p:sldSz cx="12192000" cy="6858000"/>
   <p:notesSz cx="7315200" cy="9601200"/>
@@ -50798,6 +50800,1511 @@
 </p:sld>
 </file>
 
+<file path=ppt/slides/slide10.xml><?xml version="1.0" encoding="utf-8"?>
+<p:sld xmlns:a="http://schemas.openxmlformats.org/drawingml/2006/main" xmlns:p="http://schemas.openxmlformats.org/presentationml/2006/main" xmlns:r="http://schemas.openxmlformats.org/officeDocument/2006/relationships">
+  <p:cSld>
+    <p:spTree>
+      <p:nvGrpSpPr>
+        <p:cNvPr id="1" name=""/>
+        <p:cNvGrpSpPr/>
+        <p:nvPr/>
+      </p:nvGrpSpPr>
+      <p:grpSpPr/>
+      <p:sp>
+        <p:nvSpPr>
+          <p:cNvPr id="2" name="Title 1"/>
+          <p:cNvSpPr>
+            <a:spLocks noGrp="1"/>
+          </p:cNvSpPr>
+          <p:nvPr>
+            <p:ph type="title"/>
+          </p:nvPr>
+        </p:nvSpPr>
+        <p:spPr>
+          <a:xfrm>
+            <a:off x="320040" y="384048"/>
+            <a:ext cx="10607040" cy="502920"/>
+          </a:xfrm>
+        </p:spPr>
+        <p:txBody>
+          <a:bodyPr/>
+          <a:lstStyle/>
+          <a:p>
+            <a:r>
+              <a:t>AI Costs: Right Model for Each Task</a:t>
+            </a:r>
+          </a:p>
+        </p:txBody>
+      </p:sp>
+      <p:sp>
+        <p:nvSpPr>
+          <p:cNvPr id="3" name="TextBox 2"/>
+          <p:cNvSpPr txBox="1"/>
+          <p:nvPr/>
+        </p:nvSpPr>
+        <p:spPr>
+          <a:xfrm>
+            <a:off x="274320" y="1005840"/>
+            <a:ext cx="10972800" cy="365760"/>
+          </a:xfrm>
+          <a:prstGeom prst="rect">
+            <a:avLst/>
+          </a:prstGeom>
+          <a:noFill/>
+        </p:spPr>
+        <p:txBody>
+          <a:bodyPr wrap="square">
+            <a:spAutoFit/>
+          </a:bodyPr>
+          <a:lstStyle/>
+          <a:p>
+            <a:pPr algn="l">
+              <a:defRPr sz="1600" b="0">
+                <a:solidFill>
+                  <a:srgbClr val="333333"/>
+                </a:solidFill>
+              </a:defRPr>
+            </a:pPr>
+            <a:r>
+              <a:t>Different tasks need different models. Cheap models handle most work. Total monthly cost is negligible.</a:t>
+            </a:r>
+          </a:p>
+        </p:txBody>
+      </p:sp>
+      <p:sp>
+        <p:nvSpPr>
+          <p:cNvPr id="4" name="TextBox 3"/>
+          <p:cNvSpPr txBox="1"/>
+          <p:nvPr/>
+        </p:nvSpPr>
+        <p:spPr>
+          <a:xfrm>
+            <a:off x="274320" y="1463040"/>
+            <a:ext cx="3200400" cy="274320"/>
+          </a:xfrm>
+          <a:prstGeom prst="rect">
+            <a:avLst/>
+          </a:prstGeom>
+          <a:noFill/>
+        </p:spPr>
+        <p:txBody>
+          <a:bodyPr wrap="square">
+            <a:spAutoFit/>
+          </a:bodyPr>
+          <a:lstStyle/>
+          <a:p>
+            <a:pPr algn="l">
+              <a:defRPr sz="1400" b="1">
+                <a:solidFill>
+                  <a:srgbClr val="0079C1"/>
+                </a:solidFill>
+              </a:defRPr>
+            </a:pPr>
+            <a:r>
+              <a:t>Task</a:t>
+            </a:r>
+          </a:p>
+        </p:txBody>
+      </p:sp>
+      <p:sp>
+        <p:nvSpPr>
+          <p:cNvPr id="5" name="TextBox 4"/>
+          <p:cNvSpPr txBox="1"/>
+          <p:nvPr/>
+        </p:nvSpPr>
+        <p:spPr>
+          <a:xfrm>
+            <a:off x="3474720" y="1463040"/>
+            <a:ext cx="2286000" cy="274320"/>
+          </a:xfrm>
+          <a:prstGeom prst="rect">
+            <a:avLst/>
+          </a:prstGeom>
+          <a:noFill/>
+        </p:spPr>
+        <p:txBody>
+          <a:bodyPr wrap="square">
+            <a:spAutoFit/>
+          </a:bodyPr>
+          <a:lstStyle/>
+          <a:p>
+            <a:pPr algn="l">
+              <a:defRPr sz="1400" b="1">
+                <a:solidFill>
+                  <a:srgbClr val="0079C1"/>
+                </a:solidFill>
+              </a:defRPr>
+            </a:pPr>
+            <a:r>
+              <a:t>Model</a:t>
+            </a:r>
+          </a:p>
+        </p:txBody>
+      </p:sp>
+      <p:sp>
+        <p:nvSpPr>
+          <p:cNvPr id="6" name="TextBox 5"/>
+          <p:cNvSpPr txBox="1"/>
+          <p:nvPr/>
+        </p:nvSpPr>
+        <p:spPr>
+          <a:xfrm>
+            <a:off x="5760720" y="1463040"/>
+            <a:ext cx="2286000" cy="274320"/>
+          </a:xfrm>
+          <a:prstGeom prst="rect">
+            <a:avLst/>
+          </a:prstGeom>
+          <a:noFill/>
+        </p:spPr>
+        <p:txBody>
+          <a:bodyPr wrap="square">
+            <a:spAutoFit/>
+          </a:bodyPr>
+          <a:lstStyle/>
+          <a:p>
+            <a:pPr algn="l">
+              <a:defRPr sz="1400" b="1">
+                <a:solidFill>
+                  <a:srgbClr val="0079C1"/>
+                </a:solidFill>
+              </a:defRPr>
+            </a:pPr>
+            <a:r>
+              <a:t>Data used</a:t>
+            </a:r>
+          </a:p>
+        </p:txBody>
+      </p:sp>
+      <p:sp>
+        <p:nvSpPr>
+          <p:cNvPr id="7" name="TextBox 6"/>
+          <p:cNvSpPr txBox="1"/>
+          <p:nvPr/>
+        </p:nvSpPr>
+        <p:spPr>
+          <a:xfrm>
+            <a:off x="8046720" y="1463040"/>
+            <a:ext cx="1645920" cy="274320"/>
+          </a:xfrm>
+          <a:prstGeom prst="rect">
+            <a:avLst/>
+          </a:prstGeom>
+          <a:noFill/>
+        </p:spPr>
+        <p:txBody>
+          <a:bodyPr wrap="square">
+            <a:spAutoFit/>
+          </a:bodyPr>
+          <a:lstStyle/>
+          <a:p>
+            <a:pPr algn="l">
+              <a:defRPr sz="1400" b="1">
+                <a:solidFill>
+                  <a:srgbClr val="0079C1"/>
+                </a:solidFill>
+              </a:defRPr>
+            </a:pPr>
+            <a:r>
+              <a:t>Per tender</a:t>
+            </a:r>
+          </a:p>
+        </p:txBody>
+      </p:sp>
+      <p:sp>
+        <p:nvSpPr>
+          <p:cNvPr id="8" name="TextBox 7"/>
+          <p:cNvSpPr txBox="1"/>
+          <p:nvPr/>
+        </p:nvSpPr>
+        <p:spPr>
+          <a:xfrm>
+            <a:off x="9692640" y="1463040"/>
+            <a:ext cx="2286000" cy="274320"/>
+          </a:xfrm>
+          <a:prstGeom prst="rect">
+            <a:avLst/>
+          </a:prstGeom>
+          <a:noFill/>
+        </p:spPr>
+        <p:txBody>
+          <a:bodyPr wrap="square">
+            <a:spAutoFit/>
+          </a:bodyPr>
+          <a:lstStyle/>
+          <a:p>
+            <a:pPr algn="l">
+              <a:defRPr sz="1400" b="1">
+                <a:solidFill>
+                  <a:srgbClr val="0079C1"/>
+                </a:solidFill>
+              </a:defRPr>
+            </a:pPr>
+            <a:r>
+              <a:t>300/month</a:t>
+            </a:r>
+          </a:p>
+        </p:txBody>
+      </p:sp>
+      <p:sp>
+        <p:nvSpPr>
+          <p:cNvPr id="9" name="Rounded Rectangle 8"/>
+          <p:cNvSpPr/>
+          <p:nvPr/>
+        </p:nvSpPr>
+        <p:spPr>
+          <a:xfrm>
+            <a:off x="274320" y="1828800"/>
+            <a:ext cx="3108960" cy="685800"/>
+          </a:xfrm>
+          <a:prstGeom prst="roundRect">
+            <a:avLst/>
+          </a:prstGeom>
+          <a:solidFill>
+            <a:srgbClr val="D4EFDF"/>
+          </a:solidFill>
+          <a:ln>
+            <a:noFill/>
+          </a:ln>
+        </p:spPr>
+        <p:style>
+          <a:lnRef idx="1">
+            <a:schemeClr val="accent1"/>
+          </a:lnRef>
+          <a:fillRef idx="3">
+            <a:schemeClr val="accent1"/>
+          </a:fillRef>
+          <a:effectRef idx="2">
+            <a:schemeClr val="accent1"/>
+          </a:effectRef>
+          <a:fontRef idx="minor">
+            <a:schemeClr val="lt1"/>
+          </a:fontRef>
+        </p:style>
+        <p:txBody>
+          <a:bodyPr rtlCol="0" anchor="ctr" wrap="square"/>
+          <a:lstStyle/>
+          <a:p>
+            <a:pPr algn="ctr">
+              <a:defRPr sz="1100" b="0">
+                <a:solidFill>
+                  <a:srgbClr val="333333"/>
+                </a:solidFill>
+              </a:defRPr>
+            </a:pPr>
+            <a:r>
+              <a:t>Summarization</a:t>
+            </a:r>
+            <a:br/>
+            <a:r>
+              <a:t>(Finnish → English)</a:t>
+            </a:r>
+          </a:p>
+        </p:txBody>
+      </p:sp>
+      <p:sp>
+        <p:nvSpPr>
+          <p:cNvPr id="10" name="TextBox 9"/>
+          <p:cNvSpPr txBox="1"/>
+          <p:nvPr/>
+        </p:nvSpPr>
+        <p:spPr>
+          <a:xfrm>
+            <a:off x="3474720" y="1965960"/>
+            <a:ext cx="2286000" cy="457200"/>
+          </a:xfrm>
+          <a:prstGeom prst="rect">
+            <a:avLst/>
+          </a:prstGeom>
+          <a:noFill/>
+        </p:spPr>
+        <p:txBody>
+          <a:bodyPr wrap="square">
+            <a:spAutoFit/>
+          </a:bodyPr>
+          <a:lstStyle/>
+          <a:p>
+            <a:pPr algn="l">
+              <a:defRPr sz="1300" b="1">
+                <a:solidFill>
+                  <a:srgbClr val="333333"/>
+                </a:solidFill>
+              </a:defRPr>
+            </a:pPr>
+            <a:r>
+              <a:t>Basic AI</a:t>
+            </a:r>
+            <a:br/>
+            <a:r>
+              <a:t>(GPT-4.1-nano)</a:t>
+            </a:r>
+          </a:p>
+        </p:txBody>
+      </p:sp>
+      <p:sp>
+        <p:nvSpPr>
+          <p:cNvPr id="11" name="TextBox 10"/>
+          <p:cNvSpPr txBox="1"/>
+          <p:nvPr/>
+        </p:nvSpPr>
+        <p:spPr>
+          <a:xfrm>
+            <a:off x="5760720" y="1920240"/>
+            <a:ext cx="2286000" cy="457200"/>
+          </a:xfrm>
+          <a:prstGeom prst="rect">
+            <a:avLst/>
+          </a:prstGeom>
+          <a:noFill/>
+        </p:spPr>
+        <p:txBody>
+          <a:bodyPr wrap="square">
+            <a:spAutoFit/>
+          </a:bodyPr>
+          <a:lstStyle/>
+          <a:p>
+            <a:pPr algn="l">
+              <a:defRPr sz="1100" b="0">
+                <a:solidFill>
+                  <a:srgbClr val="787878"/>
+                </a:solidFill>
+              </a:defRPr>
+            </a:pPr>
+            <a:r>
+              <a:t>Detail tabs</a:t>
+            </a:r>
+            <a:br/>
+            <a:r>
+              <a:t>(all tab text)</a:t>
+            </a:r>
+          </a:p>
+        </p:txBody>
+      </p:sp>
+      <p:sp>
+        <p:nvSpPr>
+          <p:cNvPr id="12" name="TextBox 11"/>
+          <p:cNvSpPr txBox="1"/>
+          <p:nvPr/>
+        </p:nvSpPr>
+        <p:spPr>
+          <a:xfrm>
+            <a:off x="8046720" y="1965960"/>
+            <a:ext cx="1645920" cy="457200"/>
+          </a:xfrm>
+          <a:prstGeom prst="rect">
+            <a:avLst/>
+          </a:prstGeom>
+          <a:noFill/>
+        </p:spPr>
+        <p:txBody>
+          <a:bodyPr wrap="square">
+            <a:spAutoFit/>
+          </a:bodyPr>
+          <a:lstStyle/>
+          <a:p>
+            <a:pPr algn="l">
+              <a:defRPr sz="1400" b="0">
+                <a:solidFill>
+                  <a:srgbClr val="333333"/>
+                </a:solidFill>
+              </a:defRPr>
+            </a:pPr>
+            <a:r>
+              <a:t>$0.002</a:t>
+            </a:r>
+          </a:p>
+        </p:txBody>
+      </p:sp>
+      <p:sp>
+        <p:nvSpPr>
+          <p:cNvPr id="13" name="TextBox 12"/>
+          <p:cNvSpPr txBox="1"/>
+          <p:nvPr/>
+        </p:nvSpPr>
+        <p:spPr>
+          <a:xfrm>
+            <a:off x="9692640" y="1965960"/>
+            <a:ext cx="2286000" cy="457200"/>
+          </a:xfrm>
+          <a:prstGeom prst="rect">
+            <a:avLst/>
+          </a:prstGeom>
+          <a:noFill/>
+        </p:spPr>
+        <p:txBody>
+          <a:bodyPr wrap="square">
+            <a:spAutoFit/>
+          </a:bodyPr>
+          <a:lstStyle/>
+          <a:p>
+            <a:pPr algn="l">
+              <a:defRPr sz="1400" b="0">
+                <a:solidFill>
+                  <a:srgbClr val="333333"/>
+                </a:solidFill>
+              </a:defRPr>
+            </a:pPr>
+            <a:r>
+              <a:t>$18</a:t>
+            </a:r>
+          </a:p>
+        </p:txBody>
+      </p:sp>
+      <p:sp>
+        <p:nvSpPr>
+          <p:cNvPr id="14" name="Rounded Rectangle 13"/>
+          <p:cNvSpPr/>
+          <p:nvPr/>
+        </p:nvSpPr>
+        <p:spPr>
+          <a:xfrm>
+            <a:off x="274320" y="2606040"/>
+            <a:ext cx="3108960" cy="685800"/>
+          </a:xfrm>
+          <a:prstGeom prst="roundRect">
+            <a:avLst/>
+          </a:prstGeom>
+          <a:solidFill>
+            <a:srgbClr val="D4EFDF"/>
+          </a:solidFill>
+          <a:ln>
+            <a:noFill/>
+          </a:ln>
+        </p:spPr>
+        <p:style>
+          <a:lnRef idx="1">
+            <a:schemeClr val="accent1"/>
+          </a:lnRef>
+          <a:fillRef idx="3">
+            <a:schemeClr val="accent1"/>
+          </a:fillRef>
+          <a:effectRef idx="2">
+            <a:schemeClr val="accent1"/>
+          </a:effectRef>
+          <a:fontRef idx="minor">
+            <a:schemeClr val="lt1"/>
+          </a:fontRef>
+        </p:style>
+        <p:txBody>
+          <a:bodyPr rtlCol="0" anchor="ctr" wrap="square"/>
+          <a:lstStyle/>
+          <a:p>
+            <a:pPr algn="ctr">
+              <a:defRPr sz="1100" b="0">
+                <a:solidFill>
+                  <a:srgbClr val="333333"/>
+                </a:solidFill>
+              </a:defRPr>
+            </a:pPr>
+            <a:r>
+              <a:t>Classification</a:t>
+            </a:r>
+            <a:br/>
+            <a:r>
+              <a:t>(categorize tender)</a:t>
+            </a:r>
+          </a:p>
+        </p:txBody>
+      </p:sp>
+      <p:sp>
+        <p:nvSpPr>
+          <p:cNvPr id="15" name="TextBox 14"/>
+          <p:cNvSpPr txBox="1"/>
+          <p:nvPr/>
+        </p:nvSpPr>
+        <p:spPr>
+          <a:xfrm>
+            <a:off x="3474720" y="2743200"/>
+            <a:ext cx="2286000" cy="457200"/>
+          </a:xfrm>
+          <a:prstGeom prst="rect">
+            <a:avLst/>
+          </a:prstGeom>
+          <a:noFill/>
+        </p:spPr>
+        <p:txBody>
+          <a:bodyPr wrap="square">
+            <a:spAutoFit/>
+          </a:bodyPr>
+          <a:lstStyle/>
+          <a:p>
+            <a:pPr algn="l">
+              <a:defRPr sz="1300" b="1">
+                <a:solidFill>
+                  <a:srgbClr val="333333"/>
+                </a:solidFill>
+              </a:defRPr>
+            </a:pPr>
+            <a:r>
+              <a:t>Basic AI</a:t>
+            </a:r>
+            <a:br/>
+            <a:r>
+              <a:t>(GPT-4.1-nano)</a:t>
+            </a:r>
+          </a:p>
+        </p:txBody>
+      </p:sp>
+      <p:sp>
+        <p:nvSpPr>
+          <p:cNvPr id="16" name="TextBox 15"/>
+          <p:cNvSpPr txBox="1"/>
+          <p:nvPr/>
+        </p:nvSpPr>
+        <p:spPr>
+          <a:xfrm>
+            <a:off x="5760720" y="2697480"/>
+            <a:ext cx="2286000" cy="457200"/>
+          </a:xfrm>
+          <a:prstGeom prst="rect">
+            <a:avLst/>
+          </a:prstGeom>
+          <a:noFill/>
+        </p:spPr>
+        <p:txBody>
+          <a:bodyPr wrap="square">
+            <a:spAutoFit/>
+          </a:bodyPr>
+          <a:lstStyle/>
+          <a:p>
+            <a:pPr algn="l">
+              <a:defRPr sz="1100" b="0">
+                <a:solidFill>
+                  <a:srgbClr val="787878"/>
+                </a:solidFill>
+              </a:defRPr>
+            </a:pPr>
+            <a:r>
+              <a:t>Listing</a:t>
+            </a:r>
+            <a:br/>
+            <a:r>
+              <a:t>(description)</a:t>
+            </a:r>
+          </a:p>
+        </p:txBody>
+      </p:sp>
+      <p:sp>
+        <p:nvSpPr>
+          <p:cNvPr id="17" name="TextBox 16"/>
+          <p:cNvSpPr txBox="1"/>
+          <p:nvPr/>
+        </p:nvSpPr>
+        <p:spPr>
+          <a:xfrm>
+            <a:off x="8046720" y="2743200"/>
+            <a:ext cx="1645920" cy="457200"/>
+          </a:xfrm>
+          <a:prstGeom prst="rect">
+            <a:avLst/>
+          </a:prstGeom>
+          <a:noFill/>
+        </p:spPr>
+        <p:txBody>
+          <a:bodyPr wrap="square">
+            <a:spAutoFit/>
+          </a:bodyPr>
+          <a:lstStyle/>
+          <a:p>
+            <a:pPr algn="l">
+              <a:defRPr sz="1400" b="0">
+                <a:solidFill>
+                  <a:srgbClr val="333333"/>
+                </a:solidFill>
+              </a:defRPr>
+            </a:pPr>
+            <a:r>
+              <a:t>$0.0002</a:t>
+            </a:r>
+          </a:p>
+        </p:txBody>
+      </p:sp>
+      <p:sp>
+        <p:nvSpPr>
+          <p:cNvPr id="18" name="TextBox 17"/>
+          <p:cNvSpPr txBox="1"/>
+          <p:nvPr/>
+        </p:nvSpPr>
+        <p:spPr>
+          <a:xfrm>
+            <a:off x="9692640" y="2743200"/>
+            <a:ext cx="2286000" cy="457200"/>
+          </a:xfrm>
+          <a:prstGeom prst="rect">
+            <a:avLst/>
+          </a:prstGeom>
+          <a:noFill/>
+        </p:spPr>
+        <p:txBody>
+          <a:bodyPr wrap="square">
+            <a:spAutoFit/>
+          </a:bodyPr>
+          <a:lstStyle/>
+          <a:p>
+            <a:pPr algn="l">
+              <a:defRPr sz="1400" b="0">
+                <a:solidFill>
+                  <a:srgbClr val="333333"/>
+                </a:solidFill>
+              </a:defRPr>
+            </a:pPr>
+            <a:r>
+              <a:t>$1.60</a:t>
+            </a:r>
+          </a:p>
+        </p:txBody>
+      </p:sp>
+      <p:sp>
+        <p:nvSpPr>
+          <p:cNvPr id="19" name="Rounded Rectangle 18"/>
+          <p:cNvSpPr/>
+          <p:nvPr/>
+        </p:nvSpPr>
+        <p:spPr>
+          <a:xfrm>
+            <a:off x="274320" y="3383280"/>
+            <a:ext cx="3108960" cy="685800"/>
+          </a:xfrm>
+          <a:prstGeom prst="roundRect">
+            <a:avLst/>
+          </a:prstGeom>
+          <a:solidFill>
+            <a:srgbClr val="DCEBFA"/>
+          </a:solidFill>
+          <a:ln>
+            <a:noFill/>
+          </a:ln>
+        </p:spPr>
+        <p:style>
+          <a:lnRef idx="1">
+            <a:schemeClr val="accent1"/>
+          </a:lnRef>
+          <a:fillRef idx="3">
+            <a:schemeClr val="accent1"/>
+          </a:fillRef>
+          <a:effectRef idx="2">
+            <a:schemeClr val="accent1"/>
+          </a:effectRef>
+          <a:fontRef idx="minor">
+            <a:schemeClr val="lt1"/>
+          </a:fontRef>
+        </p:style>
+        <p:txBody>
+          <a:bodyPr rtlCol="0" anchor="ctr" wrap="square"/>
+          <a:lstStyle/>
+          <a:p>
+            <a:pPr algn="ctr">
+              <a:defRPr sz="1100" b="0">
+                <a:solidFill>
+                  <a:srgbClr val="333333"/>
+                </a:solidFill>
+              </a:defRPr>
+            </a:pPr>
+            <a:r>
+              <a:t>Award Analysis</a:t>
+            </a:r>
+            <a:br/>
+            <a:r>
+              <a:t>(extract winner + price)</a:t>
+            </a:r>
+          </a:p>
+        </p:txBody>
+      </p:sp>
+      <p:sp>
+        <p:nvSpPr>
+          <p:cNvPr id="20" name="TextBox 19"/>
+          <p:cNvSpPr txBox="1"/>
+          <p:nvPr/>
+        </p:nvSpPr>
+        <p:spPr>
+          <a:xfrm>
+            <a:off x="3474720" y="3520440"/>
+            <a:ext cx="2286000" cy="457200"/>
+          </a:xfrm>
+          <a:prstGeom prst="rect">
+            <a:avLst/>
+          </a:prstGeom>
+          <a:noFill/>
+        </p:spPr>
+        <p:txBody>
+          <a:bodyPr wrap="square">
+            <a:spAutoFit/>
+          </a:bodyPr>
+          <a:lstStyle/>
+          <a:p>
+            <a:pPr algn="l">
+              <a:defRPr sz="1300" b="1">
+                <a:solidFill>
+                  <a:srgbClr val="333333"/>
+                </a:solidFill>
+              </a:defRPr>
+            </a:pPr>
+            <a:r>
+              <a:t>Standard AI</a:t>
+            </a:r>
+            <a:br/>
+            <a:r>
+              <a:t>(GPT-4.1-mini)</a:t>
+            </a:r>
+          </a:p>
+        </p:txBody>
+      </p:sp>
+      <p:sp>
+        <p:nvSpPr>
+          <p:cNvPr id="21" name="TextBox 20"/>
+          <p:cNvSpPr txBox="1"/>
+          <p:nvPr/>
+        </p:nvSpPr>
+        <p:spPr>
+          <a:xfrm>
+            <a:off x="5760720" y="3474720"/>
+            <a:ext cx="2286000" cy="457200"/>
+          </a:xfrm>
+          <a:prstGeom prst="rect">
+            <a:avLst/>
+          </a:prstGeom>
+          <a:noFill/>
+        </p:spPr>
+        <p:txBody>
+          <a:bodyPr wrap="square">
+            <a:spAutoFit/>
+          </a:bodyPr>
+          <a:lstStyle/>
+          <a:p>
+            <a:pPr algn="l">
+              <a:defRPr sz="1100" b="0">
+                <a:solidFill>
+                  <a:srgbClr val="787878"/>
+                </a:solidFill>
+              </a:defRPr>
+            </a:pPr>
+            <a:r>
+              <a:t>Detail tabs</a:t>
+            </a:r>
+            <a:br/>
+            <a:r>
+              <a:t>(award text)</a:t>
+            </a:r>
+          </a:p>
+        </p:txBody>
+      </p:sp>
+      <p:sp>
+        <p:nvSpPr>
+          <p:cNvPr id="22" name="TextBox 21"/>
+          <p:cNvSpPr txBox="1"/>
+          <p:nvPr/>
+        </p:nvSpPr>
+        <p:spPr>
+          <a:xfrm>
+            <a:off x="8046720" y="3520440"/>
+            <a:ext cx="1645920" cy="457200"/>
+          </a:xfrm>
+          <a:prstGeom prst="rect">
+            <a:avLst/>
+          </a:prstGeom>
+          <a:noFill/>
+        </p:spPr>
+        <p:txBody>
+          <a:bodyPr wrap="square">
+            <a:spAutoFit/>
+          </a:bodyPr>
+          <a:lstStyle/>
+          <a:p>
+            <a:pPr algn="l">
+              <a:defRPr sz="1400" b="0">
+                <a:solidFill>
+                  <a:srgbClr val="333333"/>
+                </a:solidFill>
+              </a:defRPr>
+            </a:pPr>
+            <a:r>
+              <a:t>$0.003</a:t>
+            </a:r>
+          </a:p>
+        </p:txBody>
+      </p:sp>
+      <p:sp>
+        <p:nvSpPr>
+          <p:cNvPr id="23" name="TextBox 22"/>
+          <p:cNvSpPr txBox="1"/>
+          <p:nvPr/>
+        </p:nvSpPr>
+        <p:spPr>
+          <a:xfrm>
+            <a:off x="9692640" y="3520440"/>
+            <a:ext cx="2286000" cy="457200"/>
+          </a:xfrm>
+          <a:prstGeom prst="rect">
+            <a:avLst/>
+          </a:prstGeom>
+          <a:noFill/>
+        </p:spPr>
+        <p:txBody>
+          <a:bodyPr wrap="square">
+            <a:spAutoFit/>
+          </a:bodyPr>
+          <a:lstStyle/>
+          <a:p>
+            <a:pPr algn="l">
+              <a:defRPr sz="1400" b="0">
+                <a:solidFill>
+                  <a:srgbClr val="333333"/>
+                </a:solidFill>
+              </a:defRPr>
+            </a:pPr>
+            <a:r>
+              <a:t>$9</a:t>
+            </a:r>
+          </a:p>
+        </p:txBody>
+      </p:sp>
+      <p:sp>
+        <p:nvSpPr>
+          <p:cNvPr id="24" name="Rounded Rectangle 23"/>
+          <p:cNvSpPr/>
+          <p:nvPr/>
+        </p:nvSpPr>
+        <p:spPr>
+          <a:xfrm>
+            <a:off x="274320" y="4160520"/>
+            <a:ext cx="3108960" cy="685800"/>
+          </a:xfrm>
+          <a:prstGeom prst="roundRect">
+            <a:avLst/>
+          </a:prstGeom>
+          <a:solidFill>
+            <a:srgbClr val="DCEBFA"/>
+          </a:solidFill>
+          <a:ln>
+            <a:noFill/>
+          </a:ln>
+        </p:spPr>
+        <p:style>
+          <a:lnRef idx="1">
+            <a:schemeClr val="accent1"/>
+          </a:lnRef>
+          <a:fillRef idx="3">
+            <a:schemeClr val="accent1"/>
+          </a:fillRef>
+          <a:effectRef idx="2">
+            <a:schemeClr val="accent1"/>
+          </a:effectRef>
+          <a:fontRef idx="minor">
+            <a:schemeClr val="lt1"/>
+          </a:fontRef>
+        </p:style>
+        <p:txBody>
+          <a:bodyPr rtlCol="0" anchor="ctr" wrap="square"/>
+          <a:lstStyle/>
+          <a:p>
+            <a:pPr algn="ctr">
+              <a:defRPr sz="1100" b="0">
+                <a:solidFill>
+                  <a:srgbClr val="333333"/>
+                </a:solidFill>
+              </a:defRPr>
+            </a:pPr>
+            <a:r>
+              <a:t>Relevance Scoring</a:t>
+            </a:r>
+            <a:br/>
+            <a:r>
+              <a:t>(relevant to CGI?)</a:t>
+            </a:r>
+          </a:p>
+        </p:txBody>
+      </p:sp>
+      <p:sp>
+        <p:nvSpPr>
+          <p:cNvPr id="25" name="TextBox 24"/>
+          <p:cNvSpPr txBox="1"/>
+          <p:nvPr/>
+        </p:nvSpPr>
+        <p:spPr>
+          <a:xfrm>
+            <a:off x="3474720" y="4297680"/>
+            <a:ext cx="2286000" cy="457200"/>
+          </a:xfrm>
+          <a:prstGeom prst="rect">
+            <a:avLst/>
+          </a:prstGeom>
+          <a:noFill/>
+        </p:spPr>
+        <p:txBody>
+          <a:bodyPr wrap="square">
+            <a:spAutoFit/>
+          </a:bodyPr>
+          <a:lstStyle/>
+          <a:p>
+            <a:pPr algn="l">
+              <a:defRPr sz="1300" b="1">
+                <a:solidFill>
+                  <a:srgbClr val="333333"/>
+                </a:solidFill>
+              </a:defRPr>
+            </a:pPr>
+            <a:r>
+              <a:t>Standard AI</a:t>
+            </a:r>
+            <a:br/>
+            <a:r>
+              <a:t>(GPT-4.1-mini)</a:t>
+            </a:r>
+          </a:p>
+        </p:txBody>
+      </p:sp>
+      <p:sp>
+        <p:nvSpPr>
+          <p:cNvPr id="26" name="TextBox 25"/>
+          <p:cNvSpPr txBox="1"/>
+          <p:nvPr/>
+        </p:nvSpPr>
+        <p:spPr>
+          <a:xfrm>
+            <a:off x="5760720" y="4251959"/>
+            <a:ext cx="2286000" cy="457200"/>
+          </a:xfrm>
+          <a:prstGeom prst="rect">
+            <a:avLst/>
+          </a:prstGeom>
+          <a:noFill/>
+        </p:spPr>
+        <p:txBody>
+          <a:bodyPr wrap="square">
+            <a:spAutoFit/>
+          </a:bodyPr>
+          <a:lstStyle/>
+          <a:p>
+            <a:pPr algn="l">
+              <a:defRPr sz="1100" b="0">
+                <a:solidFill>
+                  <a:srgbClr val="787878"/>
+                </a:solidFill>
+              </a:defRPr>
+            </a:pPr>
+            <a:r>
+              <a:t>Detail tabs</a:t>
+            </a:r>
+            <a:br/>
+            <a:r>
+              <a:t>(all tab text)</a:t>
+            </a:r>
+          </a:p>
+        </p:txBody>
+      </p:sp>
+      <p:sp>
+        <p:nvSpPr>
+          <p:cNvPr id="27" name="TextBox 26"/>
+          <p:cNvSpPr txBox="1"/>
+          <p:nvPr/>
+        </p:nvSpPr>
+        <p:spPr>
+          <a:xfrm>
+            <a:off x="8046720" y="4297680"/>
+            <a:ext cx="1645920" cy="457200"/>
+          </a:xfrm>
+          <a:prstGeom prst="rect">
+            <a:avLst/>
+          </a:prstGeom>
+          <a:noFill/>
+        </p:spPr>
+        <p:txBody>
+          <a:bodyPr wrap="square">
+            <a:spAutoFit/>
+          </a:bodyPr>
+          <a:lstStyle/>
+          <a:p>
+            <a:pPr algn="l">
+              <a:defRPr sz="1400" b="0">
+                <a:solidFill>
+                  <a:srgbClr val="333333"/>
+                </a:solidFill>
+              </a:defRPr>
+            </a:pPr>
+            <a:r>
+              <a:t>$0.003</a:t>
+            </a:r>
+          </a:p>
+        </p:txBody>
+      </p:sp>
+      <p:sp>
+        <p:nvSpPr>
+          <p:cNvPr id="28" name="TextBox 27"/>
+          <p:cNvSpPr txBox="1"/>
+          <p:nvPr/>
+        </p:nvSpPr>
+        <p:spPr>
+          <a:xfrm>
+            <a:off x="9692640" y="4297680"/>
+            <a:ext cx="2286000" cy="457200"/>
+          </a:xfrm>
+          <a:prstGeom prst="rect">
+            <a:avLst/>
+          </a:prstGeom>
+          <a:noFill/>
+        </p:spPr>
+        <p:txBody>
+          <a:bodyPr wrap="square">
+            <a:spAutoFit/>
+          </a:bodyPr>
+          <a:lstStyle/>
+          <a:p>
+            <a:pPr algn="l">
+              <a:defRPr sz="1400" b="0">
+                <a:solidFill>
+                  <a:srgbClr val="333333"/>
+                </a:solidFill>
+              </a:defRPr>
+            </a:pPr>
+            <a:r>
+              <a:t>$9</a:t>
+            </a:r>
+          </a:p>
+        </p:txBody>
+      </p:sp>
+      <p:sp>
+        <p:nvSpPr>
+          <p:cNvPr id="29" name="Rounded Rectangle 28"/>
+          <p:cNvSpPr/>
+          <p:nvPr/>
+        </p:nvSpPr>
+        <p:spPr>
+          <a:xfrm>
+            <a:off x="274320" y="4937760"/>
+            <a:ext cx="3108960" cy="685800"/>
+          </a:xfrm>
+          <a:prstGeom prst="roundRect">
+            <a:avLst/>
+          </a:prstGeom>
+          <a:solidFill>
+            <a:srgbClr val="FCF3CF"/>
+          </a:solidFill>
+          <a:ln>
+            <a:noFill/>
+          </a:ln>
+        </p:spPr>
+        <p:style>
+          <a:lnRef idx="1">
+            <a:schemeClr val="accent1"/>
+          </a:lnRef>
+          <a:fillRef idx="3">
+            <a:schemeClr val="accent1"/>
+          </a:fillRef>
+          <a:effectRef idx="2">
+            <a:schemeClr val="accent1"/>
+          </a:effectRef>
+          <a:fontRef idx="minor">
+            <a:schemeClr val="lt1"/>
+          </a:fontRef>
+        </p:style>
+        <p:txBody>
+          <a:bodyPr rtlCol="0" anchor="ctr" wrap="square"/>
+          <a:lstStyle/>
+          <a:p>
+            <a:pPr algn="ctr">
+              <a:defRPr sz="1100" b="0">
+                <a:solidFill>
+                  <a:srgbClr val="333333"/>
+                </a:solidFill>
+              </a:defRPr>
+            </a:pPr>
+            <a:r>
+              <a:t>Bid Recommendation</a:t>
+            </a:r>
+            <a:br/>
+            <a:r>
+              <a:t>(should CGI bid?)</a:t>
+            </a:r>
+          </a:p>
+        </p:txBody>
+      </p:sp>
+      <p:sp>
+        <p:nvSpPr>
+          <p:cNvPr id="30" name="TextBox 29"/>
+          <p:cNvSpPr txBox="1"/>
+          <p:nvPr/>
+        </p:nvSpPr>
+        <p:spPr>
+          <a:xfrm>
+            <a:off x="3474720" y="5074920"/>
+            <a:ext cx="2286000" cy="457200"/>
+          </a:xfrm>
+          <a:prstGeom prst="rect">
+            <a:avLst/>
+          </a:prstGeom>
+          <a:noFill/>
+        </p:spPr>
+        <p:txBody>
+          <a:bodyPr wrap="square">
+            <a:spAutoFit/>
+          </a:bodyPr>
+          <a:lstStyle/>
+          <a:p>
+            <a:pPr algn="l">
+              <a:defRPr sz="1300" b="1">
+                <a:solidFill>
+                  <a:srgbClr val="333333"/>
+                </a:solidFill>
+              </a:defRPr>
+            </a:pPr>
+            <a:r>
+              <a:t>Advanced AI</a:t>
+            </a:r>
+            <a:br/>
+            <a:r>
+              <a:t>(GPT-4.1 / 4o)</a:t>
+            </a:r>
+          </a:p>
+        </p:txBody>
+      </p:sp>
+      <p:sp>
+        <p:nvSpPr>
+          <p:cNvPr id="31" name="TextBox 30"/>
+          <p:cNvSpPr txBox="1"/>
+          <p:nvPr/>
+        </p:nvSpPr>
+        <p:spPr>
+          <a:xfrm>
+            <a:off x="5760720" y="5029200"/>
+            <a:ext cx="2286000" cy="457200"/>
+          </a:xfrm>
+          <a:prstGeom prst="rect">
+            <a:avLst/>
+          </a:prstGeom>
+          <a:noFill/>
+        </p:spPr>
+        <p:txBody>
+          <a:bodyPr wrap="square">
+            <a:spAutoFit/>
+          </a:bodyPr>
+          <a:lstStyle/>
+          <a:p>
+            <a:pPr algn="l">
+              <a:defRPr sz="1100" b="0">
+                <a:solidFill>
+                  <a:srgbClr val="787878"/>
+                </a:solidFill>
+              </a:defRPr>
+            </a:pPr>
+            <a:r>
+              <a:t>Tabs + files</a:t>
+            </a:r>
+            <a:br/>
+            <a:r>
+              <a:t>(Level 3)</a:t>
+            </a:r>
+          </a:p>
+        </p:txBody>
+      </p:sp>
+      <p:sp>
+        <p:nvSpPr>
+          <p:cNvPr id="32" name="TextBox 31"/>
+          <p:cNvSpPr txBox="1"/>
+          <p:nvPr/>
+        </p:nvSpPr>
+        <p:spPr>
+          <a:xfrm>
+            <a:off x="8046720" y="5074920"/>
+            <a:ext cx="1645920" cy="457200"/>
+          </a:xfrm>
+          <a:prstGeom prst="rect">
+            <a:avLst/>
+          </a:prstGeom>
+          <a:noFill/>
+        </p:spPr>
+        <p:txBody>
+          <a:bodyPr wrap="square">
+            <a:spAutoFit/>
+          </a:bodyPr>
+          <a:lstStyle/>
+          <a:p>
+            <a:pPr algn="l">
+              <a:defRPr sz="1400" b="0">
+                <a:solidFill>
+                  <a:srgbClr val="333333"/>
+                </a:solidFill>
+              </a:defRPr>
+            </a:pPr>
+            <a:r>
+              <a:t>$0.01</a:t>
+            </a:r>
+          </a:p>
+        </p:txBody>
+      </p:sp>
+      <p:sp>
+        <p:nvSpPr>
+          <p:cNvPr id="33" name="TextBox 32"/>
+          <p:cNvSpPr txBox="1"/>
+          <p:nvPr/>
+        </p:nvSpPr>
+        <p:spPr>
+          <a:xfrm>
+            <a:off x="9692640" y="5074920"/>
+            <a:ext cx="2286000" cy="457200"/>
+          </a:xfrm>
+          <a:prstGeom prst="rect">
+            <a:avLst/>
+          </a:prstGeom>
+          <a:noFill/>
+        </p:spPr>
+        <p:txBody>
+          <a:bodyPr wrap="square">
+            <a:spAutoFit/>
+          </a:bodyPr>
+          <a:lstStyle/>
+          <a:p>
+            <a:pPr algn="l">
+              <a:defRPr sz="1400" b="0">
+                <a:solidFill>
+                  <a:srgbClr val="333333"/>
+                </a:solidFill>
+              </a:defRPr>
+            </a:pPr>
+            <a:r>
+              <a:t>$30+</a:t>
+            </a:r>
+          </a:p>
+        </p:txBody>
+      </p:sp>
+      <p:sp>
+        <p:nvSpPr>
+          <p:cNvPr id="34" name="TextBox 33"/>
+          <p:cNvSpPr txBox="1"/>
+          <p:nvPr/>
+        </p:nvSpPr>
+        <p:spPr>
+          <a:xfrm>
+            <a:off x="274320" y="5669280"/>
+            <a:ext cx="11430000" cy="731520"/>
+          </a:xfrm>
+          <a:prstGeom prst="rect">
+            <a:avLst/>
+          </a:prstGeom>
+          <a:noFill/>
+        </p:spPr>
+        <p:txBody>
+          <a:bodyPr wrap="square">
+            <a:spAutoFit/>
+          </a:bodyPr>
+          <a:lstStyle/>
+          <a:p>
+            <a:pPr algn="l">
+              <a:defRPr sz="1300" b="0">
+                <a:solidFill>
+                  <a:srgbClr val="787878"/>
+                </a:solidFill>
+              </a:defRPr>
+            </a:pPr>
+            <a:r>
+              <a:t>Daily pipeline (summarize + classify + score): ~$40-70/month.  Runs as a nightly scheduled job.</a:t>
+            </a:r>
+            <a:br/>
+            <a:r>
+              <a:t>Bid recommendation (future) is the only premium task — runs only on tenders CGI decides to pursue.</a:t>
+            </a:r>
+          </a:p>
+        </p:txBody>
+      </p:sp>
+    </p:spTree>
+  </p:cSld>
+  <p:clrMapOvr>
+    <a:masterClrMapping/>
+  </p:clrMapOvr>
+</p:sld>
+</file>
+
+<file path=ppt/slides/slide11.xml><?xml version="1.0" encoding="utf-8"?>
+<p:sld xmlns:a="http://schemas.openxmlformats.org/drawingml/2006/main" xmlns:p="http://schemas.openxmlformats.org/presentationml/2006/main" xmlns:r="http://schemas.openxmlformats.org/officeDocument/2006/relationships">
+  <p:cSld>
+    <p:spTree>
+      <p:nvGrpSpPr>
+        <p:cNvPr id="1" name=""/>
+        <p:cNvGrpSpPr/>
+        <p:nvPr/>
+      </p:nvGrpSpPr>
+      <p:grpSpPr/>
+      <p:sp>
+        <p:nvSpPr>
+          <p:cNvPr id="2" name="Title 1"/>
+          <p:cNvSpPr>
+            <a:spLocks noGrp="1"/>
+          </p:cNvSpPr>
+          <p:nvPr>
+            <p:ph type="title"/>
+          </p:nvPr>
+        </p:nvSpPr>
+        <p:spPr>
+          <a:xfrm>
+            <a:off x="320040" y="384048"/>
+            <a:ext cx="10607040" cy="502920"/>
+          </a:xfrm>
+        </p:spPr>
+        <p:txBody>
+          <a:bodyPr/>
+          <a:lstStyle/>
+          <a:p>
+            <a:r>
+              <a:t>Automated Pipeline Run</a:t>
+            </a:r>
+          </a:p>
+        </p:txBody>
+      </p:sp>
+      <p:pic>
+        <p:nvPicPr>
+          <p:cNvPr id="3" name="Picture 2" descr="screenshot_console_output.png"/>
+          <p:cNvPicPr>
+            <a:picLocks noChangeAspect="1"/>
+          </p:cNvPicPr>
+          <p:nvPr/>
+        </p:nvPicPr>
+        <p:blipFill>
+          <a:blip r:embed="rId2"/>
+          <a:stretch>
+            <a:fillRect/>
+          </a:stretch>
+        </p:blipFill>
+        <p:spPr>
+          <a:xfrm>
+            <a:off x="768096" y="1216152"/>
+            <a:ext cx="6135624" cy="5541264"/>
+          </a:xfrm>
+          <a:prstGeom prst="rect">
+            <a:avLst/>
+          </a:prstGeom>
+        </p:spPr>
+      </p:pic>
+      <p:sp>
+        <p:nvSpPr>
+          <p:cNvPr id="4" name="TextBox 3"/>
+          <p:cNvSpPr txBox="1"/>
+          <p:nvPr/>
+        </p:nvSpPr>
+        <p:spPr>
+          <a:xfrm>
+            <a:off x="7863840" y="1216152"/>
+            <a:ext cx="4114800" cy="365760"/>
+          </a:xfrm>
+          <a:prstGeom prst="rect">
+            <a:avLst/>
+          </a:prstGeom>
+          <a:noFill/>
+        </p:spPr>
+        <p:txBody>
+          <a:bodyPr wrap="square">
+            <a:spAutoFit/>
+          </a:bodyPr>
+          <a:lstStyle/>
+          <a:p>
+            <a:pPr algn="l">
+              <a:defRPr sz="1600" b="1">
+                <a:solidFill>
+                  <a:srgbClr val="0079C1"/>
+                </a:solidFill>
+              </a:defRPr>
+            </a:pPr>
+            <a:r>
+              <a:t>What happens in one run:</a:t>
+            </a:r>
+          </a:p>
+        </p:txBody>
+      </p:sp>
+      <p:sp>
+        <p:nvSpPr>
+          <p:cNvPr id="5" name="TextBox 4"/>
+          <p:cNvSpPr txBox="1"/>
+          <p:nvPr/>
+        </p:nvSpPr>
+        <p:spPr>
+          <a:xfrm>
+            <a:off x="7863840" y="1792224"/>
+            <a:ext cx="4114800" cy="4572000"/>
+          </a:xfrm>
+          <a:prstGeom prst="rect">
+            <a:avLst/>
+          </a:prstGeom>
+          <a:noFill/>
+        </p:spPr>
+        <p:txBody>
+          <a:bodyPr wrap="square">
+            <a:spAutoFit/>
+          </a:bodyPr>
+          <a:lstStyle/>
+          <a:p>
+            <a:pPr algn="l">
+              <a:defRPr sz="1300" b="0">
+                <a:solidFill>
+                  <a:srgbClr val="333333"/>
+                </a:solidFill>
+              </a:defRPr>
+            </a:pPr>
+            <a:r>
+              <a:t>1. Browser launches and logs in</a:t>
+            </a:r>
+            <a:br/>
+            <a:r>
+              <a:t>   automatically to tarjouspalvelu.fi</a:t>
+            </a:r>
+            <a:br/>
+            <a:br/>
+            <a:r>
+              <a:t>2. Scrapes all open tenders</a:t>
+            </a:r>
+            <a:br/>
+            <a:r>
+              <a:t>   across Finland (100+ per run)</a:t>
+            </a:r>
+            <a:br/>
+            <a:br/>
+            <a:r>
+              <a:t>3. Classifies each tender:</a:t>
+            </a:r>
+            <a:br/>
+            <a:r>
+              <a:t>   open / signal / closed</a:t>
+            </a:r>
+            <a:br/>
+            <a:br/>
+            <a:r>
+              <a:t>4. AI summarizes in English</a:t>
+            </a:r>
+            <a:br/>
+            <a:br/>
+            <a:r>
+              <a:t>5. Three-tier routing:</a:t>
+            </a:r>
+            <a:br/>
+            <a:r>
+              <a:t>   product alerts, department</a:t>
+            </a:r>
+            <a:br/>
+            <a:r>
+              <a:t>   match, or dashboard only</a:t>
+            </a:r>
+            <a:br/>
+            <a:br/>
+            <a:r>
+              <a:t>6. Sends emails per department</a:t>
+            </a:r>
+            <a:br/>
+            <a:br/>
+            <a:r>
+              <a:t>Runs nightly as scheduled job.</a:t>
+            </a:r>
+            <a:br/>
+            <a:r>
+              <a:t>Total time: ~2 minutes.</a:t>
+            </a:r>
+          </a:p>
+        </p:txBody>
+      </p:sp>
+    </p:spTree>
+  </p:cSld>
+  <p:clrMapOvr>
+    <a:masterClrMapping/>
+  </p:clrMapOvr>
+</p:sld>
+</file>
+
 <file path=ppt/slides/slide2.xml><?xml version="1.0" encoding="utf-8"?>
 <p:sld xmlns:a="http://schemas.openxmlformats.org/drawingml/2006/main" xmlns:p="http://schemas.openxmlformats.org/presentationml/2006/main" xmlns:r="http://schemas.openxmlformats.org/officeDocument/2006/relationships">
   <p:cSld>
@@ -50818,7 +52325,12 @@
             <p:ph type="title"/>
           </p:nvPr>
         </p:nvSpPr>
-        <p:spPr/>
+        <p:spPr>
+          <a:xfrm>
+            <a:off x="320040" y="384048"/>
+            <a:ext cx="10607040" cy="502920"/>
+          </a:xfrm>
+        </p:spPr>
         <p:txBody>
           <a:bodyPr/>
           <a:lstStyle/>
@@ -51014,7 +52526,12 @@
             <p:ph type="title"/>
           </p:nvPr>
         </p:nvSpPr>
-        <p:spPr/>
+        <p:spPr>
+          <a:xfrm>
+            <a:off x="320040" y="384048"/>
+            <a:ext cx="10607040" cy="502920"/>
+          </a:xfrm>
+        </p:spPr>
         <p:txBody>
           <a:bodyPr/>
           <a:lstStyle/>
@@ -51042,7 +52559,7 @@
         <p:spPr>
           <a:xfrm>
             <a:off x="274320" y="1005840"/>
-            <a:ext cx="11430000" cy="5838825"/>
+            <a:ext cx="11430000" cy="5911453"/>
           </a:xfrm>
           <a:prstGeom prst="rect">
             <a:avLst/>
@@ -51120,13 +52637,18 @@
             <p:ph type="title"/>
           </p:nvPr>
         </p:nvSpPr>
-        <p:spPr/>
+        <p:spPr>
+          <a:xfrm>
+            <a:off x="320040" y="384048"/>
+            <a:ext cx="10607040" cy="502920"/>
+          </a:xfrm>
+        </p:spPr>
         <p:txBody>
           <a:bodyPr/>
           <a:lstStyle/>
           <a:p>
             <a:r>
-              <a:t>How It Works</a:t>
+              <a:t>How It Works: Tender Scraping</a:t>
             </a:r>
           </a:p>
         </p:txBody>
@@ -51477,10 +52999,6 @@
             <a:r>
               <a:t>AI Summary</a:t>
             </a:r>
-            <a:br/>
-            <a:r>
-              <a:t>(GPT-4.1)</a:t>
-            </a:r>
           </a:p>
         </p:txBody>
       </p:sp>
@@ -51912,10 +53430,6 @@
               <a:t>No specific match</a:t>
             </a:r>
             <a:br/>
-            <a:br/>
-            <a:r>
-              <a:t>→ Dashboard only</a:t>
-            </a:r>
             <a:br/>
             <a:r>
               <a:t>→ No email</a:t>
@@ -52103,7 +53617,12 @@
             <p:ph type="title"/>
           </p:nvPr>
         </p:nvSpPr>
-        <p:spPr/>
+        <p:spPr>
+          <a:xfrm>
+            <a:off x="320040" y="384048"/>
+            <a:ext cx="10607040" cy="502920"/>
+          </a:xfrm>
+        </p:spPr>
         <p:txBody>
           <a:bodyPr/>
           <a:lstStyle/>
@@ -52123,7 +53642,7 @@
         <p:spPr>
           <a:xfrm>
             <a:off x="274320" y="1097280"/>
-            <a:ext cx="10972800" cy="274320"/>
+            <a:ext cx="10972800" cy="338328"/>
           </a:xfrm>
           <a:prstGeom prst="rect">
             <a:avLst/>
@@ -52144,7 +53663,7 @@
               </a:defRPr>
             </a:pPr>
             <a:r>
-              <a:t>Working pipeline (fully automated, including login):</a:t>
+              <a:t>Pipeline:</a:t>
             </a:r>
           </a:p>
         </p:txBody>
@@ -52756,28 +54275,28 @@
               </a:defRPr>
             </a:pPr>
             <a:r>
-              <a:t>From detail page (one by one, login required)</a:t>
+              <a:t>From detail page tabs (login required, per tender)</a:t>
             </a:r>
             <a:br/>
             <a:br/>
             <a:r>
-              <a:t>• Publication documents (specs, pricing sheets)</a:t>
+              <a:t>• Summary with full description and dates</a:t>
             </a:r>
             <a:br/>
             <a:r>
-              <a:t>• Evaluation criteria (price vs quality weighting)</a:t>
+              <a:t>• Questions &amp; Answers thread</a:t>
             </a:r>
             <a:br/>
             <a:r>
-              <a:t>• Qualification requirements</a:t>
+              <a:t>• Terms and conditions / qualification reqs</a:t>
             </a:r>
             <a:br/>
             <a:r>
-              <a:t>• Questions &amp; Answers thread</a:t>
+              <a:t>• Procurement object details</a:t>
             </a:r>
             <a:br/>
             <a:r>
-              <a:t>• Buyer contact information</a:t>
+              <a:t>• Persons in charge / buyer contacts</a:t>
             </a:r>
           </a:p>
         </p:txBody>
@@ -53040,13 +54559,18 @@
             <p:ph type="title"/>
           </p:nvPr>
         </p:nvSpPr>
-        <p:spPr/>
+        <p:spPr>
+          <a:xfrm>
+            <a:off x="320040" y="384048"/>
+            <a:ext cx="10607040" cy="502920"/>
+          </a:xfrm>
+        </p:spPr>
         <p:txBody>
           <a:bodyPr/>
           <a:lstStyle/>
           <a:p>
             <a:r>
-              <a:t>Narrowing Down: From 5,000 to Relevant</a:t>
+              <a:t>Technical Implementation (demo)</a:t>
             </a:r>
           </a:p>
         </p:txBody>
@@ -53059,8 +54583,8 @@
         </p:nvSpPr>
         <p:spPr>
           <a:xfrm>
-            <a:off x="457200" y="1005840"/>
-            <a:ext cx="10972800" cy="457200"/>
+            <a:off x="274320" y="1005840"/>
+            <a:ext cx="10972800" cy="274320"/>
           </a:xfrm>
           <a:prstGeom prst="rect">
             <a:avLst/>
@@ -53074,14 +54598,14 @@
           <a:lstStyle/>
           <a:p>
             <a:pPr algn="l">
-              <a:defRPr sz="1600" b="0">
-                <a:solidFill>
-                  <a:srgbClr val="333333"/>
+              <a:defRPr sz="1600" b="1">
+                <a:solidFill>
+                  <a:srgbClr val="0079C1"/>
                 </a:solidFill>
               </a:defRPr>
             </a:pPr>
             <a:r>
-              <a:t>We filter in layers — cheapest and fastest first, AI only on what survives. Each layer is configurable.</a:t>
+              <a:t>Data Extraction</a:t>
             </a:r>
           </a:p>
         </p:txBody>
@@ -53094,8 +54618,8 @@
         </p:nvSpPr>
         <p:spPr>
           <a:xfrm>
-            <a:off x="457200" y="1645920"/>
-            <a:ext cx="6400800" cy="685800"/>
+            <a:off x="274320" y="1371600"/>
+            <a:ext cx="2377440" cy="822960"/>
           </a:xfrm>
           <a:prstGeom prst="roundRect">
             <a:avLst/>
@@ -53126,73 +54650,42 @@
           <a:lstStyle/>
           <a:p>
             <a:pPr algn="ctr">
-              <a:defRPr sz="1200" b="0">
+              <a:defRPr sz="1100" b="1">
                 <a:solidFill>
                   <a:srgbClr val="333333"/>
                 </a:solidFill>
               </a:defRPr>
             </a:pPr>
             <a:r>
-              <a:t>Layer 1: Notice Type (built-in search filter)</a:t>
+              <a:t>Python</a:t>
             </a:r>
             <a:br/>
             <a:r>
-              <a:t>Keep only open competitions, planning notices, DPS. Remove awards, cancellations, direct awards.</a:t>
-            </a:r>
-          </a:p>
-        </p:txBody>
-      </p:sp>
-      <p:sp>
-        <p:nvSpPr>
-          <p:cNvPr id="5" name="TextBox 4"/>
-          <p:cNvSpPr txBox="1"/>
-          <p:nvPr/>
-        </p:nvSpPr>
-        <p:spPr>
-          <a:xfrm>
-            <a:off x="7040880" y="1737360"/>
-            <a:ext cx="2286000" cy="457200"/>
-          </a:xfrm>
-          <a:prstGeom prst="rect">
-            <a:avLst/>
-          </a:prstGeom>
-          <a:noFill/>
-        </p:spPr>
-        <p:txBody>
-          <a:bodyPr wrap="square">
-            <a:spAutoFit/>
-          </a:bodyPr>
-          <a:lstStyle/>
-          <a:p>
-            <a:pPr algn="l">
-              <a:defRPr sz="1600" b="1">
-                <a:solidFill>
-                  <a:srgbClr val="2EA44F"/>
-                </a:solidFill>
-              </a:defRPr>
-            </a:pPr>
-            <a:r>
-              <a:t>5,000 → ~2,000</a:t>
-            </a:r>
-          </a:p>
-        </p:txBody>
-      </p:sp>
-      <p:sp>
-        <p:nvSpPr>
-          <p:cNvPr id="6" name="Rounded Rectangle 5"/>
+              <a:t>Selenium + undetected-</a:t>
+            </a:r>
+            <a:br/>
+            <a:r>
+              <a:t>chromedriver</a:t>
+            </a:r>
+          </a:p>
+        </p:txBody>
+      </p:sp>
+      <p:sp>
+        <p:nvSpPr>
+          <p:cNvPr id="5" name="Right Arrow 4"/>
           <p:cNvSpPr/>
           <p:nvPr/>
         </p:nvSpPr>
         <p:spPr>
           <a:xfrm>
-            <a:off x="9418320" y="1783080"/>
-            <a:ext cx="2560320" cy="411480"/>
-          </a:xfrm>
-          <a:prstGeom prst="roundRect">
+            <a:off x="2743200" y="1554480"/>
+            <a:ext cx="365760" cy="274320"/>
+          </a:xfrm>
+          <a:prstGeom prst="rightArrow">
             <a:avLst/>
           </a:prstGeom>
           <a:solidFill>
-            <a:srgbClr val="D4EFDF"/>
+            <a:srgbClr val="0079C1"/>
           </a:solidFill>
           <a:ln>
             <a:noFill/>
@@ -53213,32 +54706,23 @@
           </a:fontRef>
         </p:style>
         <p:txBody>
-          <a:bodyPr rtlCol="0" anchor="ctr" wrap="square"/>
+          <a:bodyPr rtlCol="0" anchor="ctr"/>
           <a:lstStyle/>
           <a:p>
-            <a:pPr algn="ctr">
-              <a:defRPr sz="1200" b="1">
-                <a:solidFill>
-                  <a:srgbClr val="333333"/>
-                </a:solidFill>
-              </a:defRPr>
-            </a:pPr>
-            <a:r>
-              <a:t>Automatic</a:t>
-            </a:r>
-          </a:p>
-        </p:txBody>
-      </p:sp>
-      <p:sp>
-        <p:nvSpPr>
-          <p:cNvPr id="7" name="Rounded Rectangle 6"/>
+            <a:pPr algn="ctr"/>
+          </a:p>
+        </p:txBody>
+      </p:sp>
+      <p:sp>
+        <p:nvSpPr>
+          <p:cNvPr id="6" name="Rounded Rectangle 5"/>
           <p:cNvSpPr/>
           <p:nvPr/>
         </p:nvSpPr>
         <p:spPr>
           <a:xfrm>
-            <a:off x="457200" y="2514600"/>
-            <a:ext cx="6400800" cy="685800"/>
+            <a:off x="3200400" y="1371600"/>
+            <a:ext cx="2194560" cy="822960"/>
           </a:xfrm>
           <a:prstGeom prst="roundRect">
             <a:avLst/>
@@ -53269,73 +54753,42 @@
           <a:lstStyle/>
           <a:p>
             <a:pPr algn="ctr">
-              <a:defRPr sz="1200" b="0">
+              <a:defRPr sz="1000" b="0">
                 <a:solidFill>
                   <a:srgbClr val="333333"/>
                 </a:solidFill>
               </a:defRPr>
             </a:pPr>
             <a:r>
-              <a:t>Layer 2: Procurement Category (built-in search filter)</a:t>
+              <a:t>Browser Automation</a:t>
             </a:r>
             <a:br/>
             <a:r>
-              <a:t>Keep only categories CGI operates in: Service, Health &amp; Social, IT, etc.</a:t>
-            </a:r>
-          </a:p>
-        </p:txBody>
-      </p:sp>
-      <p:sp>
-        <p:nvSpPr>
-          <p:cNvPr id="8" name="TextBox 7"/>
-          <p:cNvSpPr txBox="1"/>
-          <p:nvPr/>
-        </p:nvSpPr>
-        <p:spPr>
-          <a:xfrm>
-            <a:off x="7040880" y="2606040"/>
-            <a:ext cx="2286000" cy="457200"/>
-          </a:xfrm>
-          <a:prstGeom prst="rect">
-            <a:avLst/>
-          </a:prstGeom>
-          <a:noFill/>
-        </p:spPr>
-        <p:txBody>
-          <a:bodyPr wrap="square">
-            <a:spAutoFit/>
-          </a:bodyPr>
-          <a:lstStyle/>
-          <a:p>
-            <a:pPr algn="l">
-              <a:defRPr sz="1600" b="1">
-                <a:solidFill>
-                  <a:srgbClr val="2EA44F"/>
-                </a:solidFill>
-              </a:defRPr>
-            </a:pPr>
-            <a:r>
-              <a:t>2,000 → ~800</a:t>
-            </a:r>
-          </a:p>
-        </p:txBody>
-      </p:sp>
-      <p:sp>
-        <p:nvSpPr>
-          <p:cNvPr id="9" name="Rounded Rectangle 8"/>
+              <a:t>Cloudflare bypass,</a:t>
+            </a:r>
+            <a:br/>
+            <a:r>
+              <a:t>SSO login, pagination</a:t>
+            </a:r>
+          </a:p>
+        </p:txBody>
+      </p:sp>
+      <p:sp>
+        <p:nvSpPr>
+          <p:cNvPr id="7" name="Right Arrow 6"/>
           <p:cNvSpPr/>
           <p:nvPr/>
         </p:nvSpPr>
         <p:spPr>
           <a:xfrm>
-            <a:off x="9418320" y="2651760"/>
-            <a:ext cx="2560320" cy="411480"/>
-          </a:xfrm>
-          <a:prstGeom prst="roundRect">
+            <a:off x="5486400" y="1554480"/>
+            <a:ext cx="365760" cy="274320"/>
+          </a:xfrm>
+          <a:prstGeom prst="rightArrow">
             <a:avLst/>
           </a:prstGeom>
           <a:solidFill>
-            <a:srgbClr val="FFF3E0"/>
+            <a:srgbClr val="0079C1"/>
           </a:solidFill>
           <a:ln>
             <a:noFill/>
@@ -53356,32 +54809,23 @@
           </a:fontRef>
         </p:style>
         <p:txBody>
-          <a:bodyPr rtlCol="0" anchor="ctr" wrap="square"/>
+          <a:bodyPr rtlCol="0" anchor="ctr"/>
           <a:lstStyle/>
           <a:p>
-            <a:pPr algn="ctr">
-              <a:defRPr sz="1200" b="1">
-                <a:solidFill>
-                  <a:srgbClr val="C0392B"/>
-                </a:solidFill>
-              </a:defRPr>
-            </a:pPr>
-            <a:r>
-              <a:t>Need your input</a:t>
-            </a:r>
-          </a:p>
-        </p:txBody>
-      </p:sp>
-      <p:sp>
-        <p:nvSpPr>
-          <p:cNvPr id="10" name="Rounded Rectangle 9"/>
+            <a:pPr algn="ctr"/>
+          </a:p>
+        </p:txBody>
+      </p:sp>
+      <p:sp>
+        <p:nvSpPr>
+          <p:cNvPr id="8" name="Rounded Rectangle 7"/>
           <p:cNvSpPr/>
           <p:nvPr/>
         </p:nvSpPr>
         <p:spPr>
           <a:xfrm>
-            <a:off x="457200" y="3383280"/>
-            <a:ext cx="6400800" cy="685800"/>
+            <a:off x="5943600" y="1371600"/>
+            <a:ext cx="2377440" cy="822960"/>
           </a:xfrm>
           <a:prstGeom prst="roundRect">
             <a:avLst/>
@@ -53412,73 +54856,42 @@
           <a:lstStyle/>
           <a:p>
             <a:pPr algn="ctr">
-              <a:defRPr sz="1200" b="0">
+              <a:defRPr sz="1000" b="0">
                 <a:solidFill>
                   <a:srgbClr val="333333"/>
                 </a:solidFill>
               </a:defRPr>
             </a:pPr>
             <a:r>
-              <a:t>Layer 3: CPV Codes — standardized EU procurement categories</a:t>
+              <a:t>HTML Parsing</a:t>
             </a:r>
             <a:br/>
             <a:r>
-              <a:t>Filter to IT (72xxx), consulting (79xxx), and other relevant codes.</a:t>
-            </a:r>
-          </a:p>
-        </p:txBody>
-      </p:sp>
-      <p:sp>
-        <p:nvSpPr>
-          <p:cNvPr id="11" name="TextBox 10"/>
-          <p:cNvSpPr txBox="1"/>
-          <p:nvPr/>
-        </p:nvSpPr>
-        <p:spPr>
-          <a:xfrm>
-            <a:off x="7040880" y="3474720"/>
-            <a:ext cx="2286000" cy="457200"/>
-          </a:xfrm>
-          <a:prstGeom prst="rect">
-            <a:avLst/>
-          </a:prstGeom>
-          <a:noFill/>
-        </p:spPr>
-        <p:txBody>
-          <a:bodyPr wrap="square">
-            <a:spAutoFit/>
-          </a:bodyPr>
-          <a:lstStyle/>
-          <a:p>
-            <a:pPr algn="l">
-              <a:defRPr sz="1600" b="1">
-                <a:solidFill>
-                  <a:srgbClr val="2EA44F"/>
-                </a:solidFill>
-              </a:defRPr>
-            </a:pPr>
-            <a:r>
-              <a:t>800 → ~300</a:t>
-            </a:r>
-          </a:p>
-        </p:txBody>
-      </p:sp>
-      <p:sp>
-        <p:nvSpPr>
-          <p:cNvPr id="12" name="Rounded Rectangle 11"/>
+              <a:t>JavaScript extraction</a:t>
+            </a:r>
+            <a:br/>
+            <a:r>
+              <a:t>from listings + detail tabs</a:t>
+            </a:r>
+          </a:p>
+        </p:txBody>
+      </p:sp>
+      <p:sp>
+        <p:nvSpPr>
+          <p:cNvPr id="9" name="Right Arrow 8"/>
           <p:cNvSpPr/>
           <p:nvPr/>
         </p:nvSpPr>
         <p:spPr>
           <a:xfrm>
-            <a:off x="9418320" y="3520440"/>
-            <a:ext cx="2560320" cy="411480"/>
-          </a:xfrm>
-          <a:prstGeom prst="roundRect">
+            <a:off x="8412480" y="1554480"/>
+            <a:ext cx="365760" cy="274320"/>
+          </a:xfrm>
+          <a:prstGeom prst="rightArrow">
             <a:avLst/>
           </a:prstGeom>
           <a:solidFill>
-            <a:srgbClr val="FFF3E0"/>
+            <a:srgbClr val="0079C1"/>
           </a:solidFill>
           <a:ln>
             <a:noFill/>
@@ -53499,38 +54912,29 @@
           </a:fontRef>
         </p:style>
         <p:txBody>
-          <a:bodyPr rtlCol="0" anchor="ctr" wrap="square"/>
+          <a:bodyPr rtlCol="0" anchor="ctr"/>
           <a:lstStyle/>
           <a:p>
-            <a:pPr algn="ctr">
-              <a:defRPr sz="1200" b="1">
-                <a:solidFill>
-                  <a:srgbClr val="C0392B"/>
-                </a:solidFill>
-              </a:defRPr>
-            </a:pPr>
-            <a:r>
-              <a:t>Need your input</a:t>
-            </a:r>
-          </a:p>
-        </p:txBody>
-      </p:sp>
-      <p:sp>
-        <p:nvSpPr>
-          <p:cNvPr id="13" name="Rounded Rectangle 12"/>
+            <a:pPr algn="ctr"/>
+          </a:p>
+        </p:txBody>
+      </p:sp>
+      <p:sp>
+        <p:nvSpPr>
+          <p:cNvPr id="10" name="Rounded Rectangle 9"/>
           <p:cNvSpPr/>
           <p:nvPr/>
         </p:nvSpPr>
         <p:spPr>
           <a:xfrm>
-            <a:off x="457200" y="4251960"/>
-            <a:ext cx="6400800" cy="685800"/>
+            <a:off x="8869680" y="1371600"/>
+            <a:ext cx="3108960" cy="822960"/>
           </a:xfrm>
           <a:prstGeom prst="roundRect">
             <a:avLst/>
           </a:prstGeom>
           <a:solidFill>
-            <a:srgbClr val="FCF3CF"/>
+            <a:srgbClr val="D4EFDF"/>
           </a:solidFill>
           <a:ln>
             <a:noFill/>
@@ -53555,32 +54959,36 @@
           <a:lstStyle/>
           <a:p>
             <a:pPr algn="ctr">
-              <a:defRPr sz="1200" b="0">
+              <a:defRPr sz="1000" b="0">
                 <a:solidFill>
                   <a:srgbClr val="333333"/>
                 </a:solidFill>
               </a:defRPr>
             </a:pPr>
             <a:r>
-              <a:t>Layer 4: Keyword + Product Name Matching</a:t>
+              <a:t>SQLite Database</a:t>
             </a:r>
             <a:br/>
             <a:r>
-              <a:t>Tier 1: CGI product names (Aromi, etc.)  |  Tier 2: department keywords  |  Tier 3: everything else</a:t>
-            </a:r>
-          </a:p>
-        </p:txBody>
-      </p:sp>
-      <p:sp>
-        <p:nvSpPr>
-          <p:cNvPr id="14" name="TextBox 13"/>
+              <a:t>Deduplicated storage,</a:t>
+            </a:r>
+            <a:br/>
+            <a:r>
+              <a:t>change tracking across runs</a:t>
+            </a:r>
+          </a:p>
+        </p:txBody>
+      </p:sp>
+      <p:sp>
+        <p:nvSpPr>
+          <p:cNvPr id="11" name="TextBox 10"/>
           <p:cNvSpPr txBox="1"/>
           <p:nvPr/>
         </p:nvSpPr>
         <p:spPr>
           <a:xfrm>
-            <a:off x="7040880" y="4343400"/>
-            <a:ext cx="2286000" cy="457200"/>
+            <a:off x="274320" y="2468880"/>
+            <a:ext cx="10972800" cy="274320"/>
           </a:xfrm>
           <a:prstGeom prst="rect">
             <a:avLst/>
@@ -53596,32 +55004,32 @@
             <a:pPr algn="l">
               <a:defRPr sz="1600" b="1">
                 <a:solidFill>
-                  <a:srgbClr val="2EA44F"/>
+                  <a:srgbClr val="0079C1"/>
                 </a:solidFill>
               </a:defRPr>
             </a:pPr>
             <a:r>
-              <a:t>300 → routed</a:t>
-            </a:r>
-          </a:p>
-        </p:txBody>
-      </p:sp>
-      <p:sp>
-        <p:nvSpPr>
-          <p:cNvPr id="15" name="Rounded Rectangle 14"/>
+              <a:t>Processing &amp; Intelligence</a:t>
+            </a:r>
+          </a:p>
+        </p:txBody>
+      </p:sp>
+      <p:sp>
+        <p:nvSpPr>
+          <p:cNvPr id="12" name="Rounded Rectangle 11"/>
           <p:cNvSpPr/>
           <p:nvPr/>
         </p:nvSpPr>
         <p:spPr>
           <a:xfrm>
-            <a:off x="9418320" y="4389120"/>
-            <a:ext cx="2560320" cy="411480"/>
+            <a:off x="274320" y="2834640"/>
+            <a:ext cx="2377440" cy="822960"/>
           </a:xfrm>
           <a:prstGeom prst="roundRect">
             <a:avLst/>
           </a:prstGeom>
           <a:solidFill>
-            <a:srgbClr val="FFF3E0"/>
+            <a:srgbClr val="F5E6E6"/>
           </a:solidFill>
           <a:ln>
             <a:noFill/>
@@ -53646,34 +55054,42 @@
           <a:lstStyle/>
           <a:p>
             <a:pPr algn="ctr">
-              <a:defRPr sz="1200" b="1">
-                <a:solidFill>
-                  <a:srgbClr val="C0392B"/>
+              <a:defRPr sz="1000" b="1">
+                <a:solidFill>
+                  <a:srgbClr val="333333"/>
                 </a:solidFill>
               </a:defRPr>
             </a:pPr>
             <a:r>
-              <a:t>Need your input</a:t>
-            </a:r>
-          </a:p>
-        </p:txBody>
-      </p:sp>
-      <p:sp>
-        <p:nvSpPr>
-          <p:cNvPr id="16" name="Rounded Rectangle 15"/>
+              <a:t>Rule-based Classification</a:t>
+            </a:r>
+            <a:br/>
+            <a:r>
+              <a:t>Python regex</a:t>
+            </a:r>
+            <a:br/>
+            <a:r>
+              <a:t>(no AI needed)</a:t>
+            </a:r>
+          </a:p>
+        </p:txBody>
+      </p:sp>
+      <p:sp>
+        <p:nvSpPr>
+          <p:cNvPr id="13" name="Right Arrow 12"/>
           <p:cNvSpPr/>
           <p:nvPr/>
         </p:nvSpPr>
         <p:spPr>
           <a:xfrm>
-            <a:off x="457200" y="5120640"/>
-            <a:ext cx="6400800" cy="594360"/>
-          </a:xfrm>
-          <a:prstGeom prst="roundRect">
+            <a:off x="2743200" y="3017520"/>
+            <a:ext cx="365760" cy="274320"/>
+          </a:xfrm>
+          <a:prstGeom prst="rightArrow">
             <a:avLst/>
           </a:prstGeom>
           <a:solidFill>
-            <a:srgbClr val="FCF3CF"/>
+            <a:srgbClr val="0079C1"/>
           </a:solidFill>
           <a:ln>
             <a:noFill/>
@@ -53694,36 +55110,83 @@
           </a:fontRef>
         </p:style>
         <p:txBody>
+          <a:bodyPr rtlCol="0" anchor="ctr"/>
+          <a:lstStyle/>
+          <a:p>
+            <a:pPr algn="ctr"/>
+          </a:p>
+        </p:txBody>
+      </p:sp>
+      <p:sp>
+        <p:nvSpPr>
+          <p:cNvPr id="14" name="Rounded Rectangle 13"/>
+          <p:cNvSpPr/>
+          <p:nvPr/>
+        </p:nvSpPr>
+        <p:spPr>
+          <a:xfrm>
+            <a:off x="3200400" y="2834640"/>
+            <a:ext cx="2194560" cy="822960"/>
+          </a:xfrm>
+          <a:prstGeom prst="roundRect">
+            <a:avLst/>
+          </a:prstGeom>
+          <a:solidFill>
+            <a:srgbClr val="FFEBC8"/>
+          </a:solidFill>
+          <a:ln>
+            <a:noFill/>
+          </a:ln>
+        </p:spPr>
+        <p:style>
+          <a:lnRef idx="1">
+            <a:schemeClr val="accent1"/>
+          </a:lnRef>
+          <a:fillRef idx="3">
+            <a:schemeClr val="accent1"/>
+          </a:fillRef>
+          <a:effectRef idx="2">
+            <a:schemeClr val="accent1"/>
+          </a:effectRef>
+          <a:fontRef idx="minor">
+            <a:schemeClr val="lt1"/>
+          </a:fontRef>
+        </p:style>
+        <p:txBody>
           <a:bodyPr rtlCol="0" anchor="ctr" wrap="square"/>
           <a:lstStyle/>
           <a:p>
             <a:pPr algn="ctr">
-              <a:defRPr sz="1200" b="0">
+              <a:defRPr sz="1000" b="1">
                 <a:solidFill>
                   <a:srgbClr val="333333"/>
                 </a:solidFill>
               </a:defRPr>
             </a:pPr>
             <a:r>
-              <a:t>Layer 5: AI Summary + Relevance Scoring</a:t>
+              <a:t>AI Summarization</a:t>
             </a:r>
             <a:br/>
             <a:r>
-              <a:t>Only for tenders that passed all filters. Costs ~$0.002 per tender.</a:t>
-            </a:r>
-          </a:p>
-        </p:txBody>
-      </p:sp>
-      <p:sp>
-        <p:nvSpPr>
-          <p:cNvPr id="17" name="TextBox 16"/>
+              <a:t>OpenAI API</a:t>
+            </a:r>
+            <a:br/>
+            <a:r>
+              <a:t>(GPT-4.1-nano)</a:t>
+            </a:r>
+          </a:p>
+        </p:txBody>
+      </p:sp>
+      <p:sp>
+        <p:nvSpPr>
+          <p:cNvPr id="15" name="TextBox 14"/>
           <p:cNvSpPr txBox="1"/>
           <p:nvPr/>
         </p:nvSpPr>
         <p:spPr>
           <a:xfrm>
-            <a:off x="7040880" y="5166360"/>
-            <a:ext cx="4572000" cy="365760"/>
+            <a:off x="3657600" y="3749039"/>
+            <a:ext cx="1828800" cy="274320"/>
           </a:xfrm>
           <a:prstGeom prst="rect">
             <a:avLst/>
@@ -53737,28 +55200,234 @@
           <a:lstStyle/>
           <a:p>
             <a:pPr algn="l">
-              <a:defRPr sz="1400" b="0">
-                <a:solidFill>
-                  <a:srgbClr val="787878"/>
+              <a:defRPr sz="900" b="1">
+                <a:solidFill>
+                  <a:srgbClr val="E67E22"/>
                 </a:solidFill>
               </a:defRPr>
             </a:pPr>
             <a:r>
-              <a:t>~$40-70/month total AI cost</a:t>
-            </a:r>
-          </a:p>
-        </p:txBody>
-      </p:sp>
-      <p:sp>
-        <p:nvSpPr>
-          <p:cNvPr id="18" name="TextBox 17"/>
+              <a:t>⚡ OpenAI API call</a:t>
+            </a:r>
+          </a:p>
+        </p:txBody>
+      </p:sp>
+      <p:sp>
+        <p:nvSpPr>
+          <p:cNvPr id="16" name="Right Arrow 15"/>
+          <p:cNvSpPr/>
+          <p:nvPr/>
+        </p:nvSpPr>
+        <p:spPr>
+          <a:xfrm>
+            <a:off x="5486400" y="3017520"/>
+            <a:ext cx="365760" cy="274320"/>
+          </a:xfrm>
+          <a:prstGeom prst="rightArrow">
+            <a:avLst/>
+          </a:prstGeom>
+          <a:solidFill>
+            <a:srgbClr val="0079C1"/>
+          </a:solidFill>
+          <a:ln>
+            <a:noFill/>
+          </a:ln>
+        </p:spPr>
+        <p:style>
+          <a:lnRef idx="1">
+            <a:schemeClr val="accent1"/>
+          </a:lnRef>
+          <a:fillRef idx="3">
+            <a:schemeClr val="accent1"/>
+          </a:fillRef>
+          <a:effectRef idx="2">
+            <a:schemeClr val="accent1"/>
+          </a:effectRef>
+          <a:fontRef idx="minor">
+            <a:schemeClr val="lt1"/>
+          </a:fontRef>
+        </p:style>
+        <p:txBody>
+          <a:bodyPr rtlCol="0" anchor="ctr"/>
+          <a:lstStyle/>
+          <a:p>
+            <a:pPr algn="ctr"/>
+          </a:p>
+        </p:txBody>
+      </p:sp>
+      <p:sp>
+        <p:nvSpPr>
+          <p:cNvPr id="17" name="Rounded Rectangle 16"/>
+          <p:cNvSpPr/>
+          <p:nvPr/>
+        </p:nvSpPr>
+        <p:spPr>
+          <a:xfrm>
+            <a:off x="5943600" y="2834640"/>
+            <a:ext cx="2377440" cy="822960"/>
+          </a:xfrm>
+          <a:prstGeom prst="roundRect">
+            <a:avLst/>
+          </a:prstGeom>
+          <a:solidFill>
+            <a:srgbClr val="E0F7E0"/>
+          </a:solidFill>
+          <a:ln>
+            <a:noFill/>
+          </a:ln>
+        </p:spPr>
+        <p:style>
+          <a:lnRef idx="1">
+            <a:schemeClr val="accent1"/>
+          </a:lnRef>
+          <a:fillRef idx="3">
+            <a:schemeClr val="accent1"/>
+          </a:fillRef>
+          <a:effectRef idx="2">
+            <a:schemeClr val="accent1"/>
+          </a:effectRef>
+          <a:fontRef idx="minor">
+            <a:schemeClr val="lt1"/>
+          </a:fontRef>
+        </p:style>
+        <p:txBody>
+          <a:bodyPr rtlCol="0" anchor="ctr" wrap="square"/>
+          <a:lstStyle/>
+          <a:p>
+            <a:pPr algn="ctr">
+              <a:defRPr sz="1000" b="1">
+                <a:solidFill>
+                  <a:srgbClr val="333333"/>
+                </a:solidFill>
+              </a:defRPr>
+            </a:pPr>
+            <a:r>
+              <a:t>Three-Tier Routing</a:t>
+            </a:r>
+            <a:br/>
+            <a:r>
+              <a:t>Product matching +</a:t>
+            </a:r>
+            <a:br/>
+            <a:r>
+              <a:t>keyword rules (Excel)</a:t>
+            </a:r>
+          </a:p>
+        </p:txBody>
+      </p:sp>
+      <p:sp>
+        <p:nvSpPr>
+          <p:cNvPr id="18" name="Right Arrow 17"/>
+          <p:cNvSpPr/>
+          <p:nvPr/>
+        </p:nvSpPr>
+        <p:spPr>
+          <a:xfrm>
+            <a:off x="8412480" y="3017520"/>
+            <a:ext cx="365760" cy="274320"/>
+          </a:xfrm>
+          <a:prstGeom prst="rightArrow">
+            <a:avLst/>
+          </a:prstGeom>
+          <a:solidFill>
+            <a:srgbClr val="0079C1"/>
+          </a:solidFill>
+          <a:ln>
+            <a:noFill/>
+          </a:ln>
+        </p:spPr>
+        <p:style>
+          <a:lnRef idx="1">
+            <a:schemeClr val="accent1"/>
+          </a:lnRef>
+          <a:fillRef idx="3">
+            <a:schemeClr val="accent1"/>
+          </a:fillRef>
+          <a:effectRef idx="2">
+            <a:schemeClr val="accent1"/>
+          </a:effectRef>
+          <a:fontRef idx="minor">
+            <a:schemeClr val="lt1"/>
+          </a:fontRef>
+        </p:style>
+        <p:txBody>
+          <a:bodyPr rtlCol="0" anchor="ctr"/>
+          <a:lstStyle/>
+          <a:p>
+            <a:pPr algn="ctr"/>
+          </a:p>
+        </p:txBody>
+      </p:sp>
+      <p:sp>
+        <p:nvSpPr>
+          <p:cNvPr id="19" name="Rounded Rectangle 18"/>
+          <p:cNvSpPr/>
+          <p:nvPr/>
+        </p:nvSpPr>
+        <p:spPr>
+          <a:xfrm>
+            <a:off x="8869680" y="2834640"/>
+            <a:ext cx="3108960" cy="822960"/>
+          </a:xfrm>
+          <a:prstGeom prst="roundRect">
+            <a:avLst/>
+          </a:prstGeom>
+          <a:solidFill>
+            <a:srgbClr val="FFEBC8"/>
+          </a:solidFill>
+          <a:ln>
+            <a:noFill/>
+          </a:ln>
+        </p:spPr>
+        <p:style>
+          <a:lnRef idx="1">
+            <a:schemeClr val="accent1"/>
+          </a:lnRef>
+          <a:fillRef idx="3">
+            <a:schemeClr val="accent1"/>
+          </a:fillRef>
+          <a:effectRef idx="2">
+            <a:schemeClr val="accent1"/>
+          </a:effectRef>
+          <a:fontRef idx="minor">
+            <a:schemeClr val="lt1"/>
+          </a:fontRef>
+        </p:style>
+        <p:txBody>
+          <a:bodyPr rtlCol="0" anchor="ctr" wrap="square"/>
+          <a:lstStyle/>
+          <a:p>
+            <a:pPr algn="ctr">
+              <a:defRPr sz="1000" b="1">
+                <a:solidFill>
+                  <a:srgbClr val="333333"/>
+                </a:solidFill>
+              </a:defRPr>
+            </a:pPr>
+            <a:r>
+              <a:t>Award Analysis</a:t>
+            </a:r>
+            <a:br/>
+            <a:r>
+              <a:t>OpenAI API — extract</a:t>
+            </a:r>
+            <a:br/>
+            <a:r>
+              <a:t>winner, price, bidders</a:t>
+            </a:r>
+          </a:p>
+        </p:txBody>
+      </p:sp>
+      <p:sp>
+        <p:nvSpPr>
+          <p:cNvPr id="20" name="TextBox 19"/>
           <p:cNvSpPr txBox="1"/>
           <p:nvPr/>
         </p:nvSpPr>
         <p:spPr>
           <a:xfrm>
-            <a:off x="457200" y="5943600"/>
-            <a:ext cx="11430000" cy="365760"/>
+            <a:off x="9875520" y="3749039"/>
+            <a:ext cx="1828800" cy="274320"/>
           </a:xfrm>
           <a:prstGeom prst="rect">
             <a:avLst/>
@@ -53772,14 +55441,320 @@
           <a:lstStyle/>
           <a:p>
             <a:pPr algn="l">
-              <a:defRPr sz="1200" b="0">
+              <a:defRPr sz="900" b="1">
+                <a:solidFill>
+                  <a:srgbClr val="E67E22"/>
+                </a:solidFill>
+              </a:defRPr>
+            </a:pPr>
+            <a:r>
+              <a:t>⚡ OpenAI API call</a:t>
+            </a:r>
+          </a:p>
+        </p:txBody>
+      </p:sp>
+      <p:sp>
+        <p:nvSpPr>
+          <p:cNvPr id="21" name="TextBox 20"/>
+          <p:cNvSpPr txBox="1"/>
+          <p:nvPr/>
+        </p:nvSpPr>
+        <p:spPr>
+          <a:xfrm>
+            <a:off x="274320" y="4114800"/>
+            <a:ext cx="10972800" cy="274320"/>
+          </a:xfrm>
+          <a:prstGeom prst="rect">
+            <a:avLst/>
+          </a:prstGeom>
+          <a:noFill/>
+        </p:spPr>
+        <p:txBody>
+          <a:bodyPr wrap="square">
+            <a:spAutoFit/>
+          </a:bodyPr>
+          <a:lstStyle/>
+          <a:p>
+            <a:pPr algn="l">
+              <a:defRPr sz="1600" b="1">
+                <a:solidFill>
+                  <a:srgbClr val="0079C1"/>
+                </a:solidFill>
+              </a:defRPr>
+            </a:pPr>
+            <a:r>
+              <a:t>Delivery</a:t>
+            </a:r>
+          </a:p>
+        </p:txBody>
+      </p:sp>
+      <p:sp>
+        <p:nvSpPr>
+          <p:cNvPr id="22" name="Rounded Rectangle 21"/>
+          <p:cNvSpPr/>
+          <p:nvPr/>
+        </p:nvSpPr>
+        <p:spPr>
+          <a:xfrm>
+            <a:off x="274320" y="4480560"/>
+            <a:ext cx="2743200" cy="822960"/>
+          </a:xfrm>
+          <a:prstGeom prst="roundRect">
+            <a:avLst/>
+          </a:prstGeom>
+          <a:solidFill>
+            <a:srgbClr val="D4EFDF"/>
+          </a:solidFill>
+          <a:ln>
+            <a:noFill/>
+          </a:ln>
+        </p:spPr>
+        <p:style>
+          <a:lnRef idx="1">
+            <a:schemeClr val="accent1"/>
+          </a:lnRef>
+          <a:fillRef idx="3">
+            <a:schemeClr val="accent1"/>
+          </a:fillRef>
+          <a:effectRef idx="2">
+            <a:schemeClr val="accent1"/>
+          </a:effectRef>
+          <a:fontRef idx="minor">
+            <a:schemeClr val="lt1"/>
+          </a:fontRef>
+        </p:style>
+        <p:txBody>
+          <a:bodyPr rtlCol="0" anchor="ctr" wrap="square"/>
+          <a:lstStyle/>
+          <a:p>
+            <a:pPr algn="ctr">
+              <a:defRPr sz="1000" b="1">
+                <a:solidFill>
+                  <a:srgbClr val="333333"/>
+                </a:solidFill>
+              </a:defRPr>
+            </a:pPr>
+            <a:r>
+              <a:t>Email Digests</a:t>
+            </a:r>
+            <a:br/>
+            <a:r>
+              <a:t>SMTP — one HTML email</a:t>
+            </a:r>
+            <a:br/>
+            <a:r>
+              <a:t>per department per day</a:t>
+            </a:r>
+          </a:p>
+        </p:txBody>
+      </p:sp>
+      <p:sp>
+        <p:nvSpPr>
+          <p:cNvPr id="23" name="Rounded Rectangle 22"/>
+          <p:cNvSpPr/>
+          <p:nvPr/>
+        </p:nvSpPr>
+        <p:spPr>
+          <a:xfrm>
+            <a:off x="3200400" y="4480560"/>
+            <a:ext cx="2743200" cy="822960"/>
+          </a:xfrm>
+          <a:prstGeom prst="roundRect">
+            <a:avLst/>
+          </a:prstGeom>
+          <a:solidFill>
+            <a:srgbClr val="D4EFDF"/>
+          </a:solidFill>
+          <a:ln>
+            <a:noFill/>
+          </a:ln>
+        </p:spPr>
+        <p:style>
+          <a:lnRef idx="1">
+            <a:schemeClr val="accent1"/>
+          </a:lnRef>
+          <a:fillRef idx="3">
+            <a:schemeClr val="accent1"/>
+          </a:fillRef>
+          <a:effectRef idx="2">
+            <a:schemeClr val="accent1"/>
+          </a:effectRef>
+          <a:fontRef idx="minor">
+            <a:schemeClr val="lt1"/>
+          </a:fontRef>
+        </p:style>
+        <p:txBody>
+          <a:bodyPr rtlCol="0" anchor="ctr" wrap="square"/>
+          <a:lstStyle/>
+          <a:p>
+            <a:pPr algn="ctr">
+              <a:defRPr sz="1000" b="1">
+                <a:solidFill>
+                  <a:srgbClr val="333333"/>
+                </a:solidFill>
+              </a:defRPr>
+            </a:pPr>
+            <a:r>
+              <a:t>Tier 1 Alerts</a:t>
+            </a:r>
+            <a:br/>
+            <a:r>
+              <a:t>Critical notifications for</a:t>
+            </a:r>
+            <a:br/>
+            <a:r>
+              <a:t>CGI product mentions</a:t>
+            </a:r>
+          </a:p>
+        </p:txBody>
+      </p:sp>
+      <p:sp>
+        <p:nvSpPr>
+          <p:cNvPr id="24" name="Rounded Rectangle 23"/>
+          <p:cNvSpPr/>
+          <p:nvPr/>
+        </p:nvSpPr>
+        <p:spPr>
+          <a:xfrm>
+            <a:off x="6126480" y="4480560"/>
+            <a:ext cx="2743200" cy="822960"/>
+          </a:xfrm>
+          <a:prstGeom prst="roundRect">
+            <a:avLst/>
+          </a:prstGeom>
+          <a:solidFill>
+            <a:srgbClr val="F0F0F0"/>
+          </a:solidFill>
+          <a:ln>
+            <a:noFill/>
+          </a:ln>
+        </p:spPr>
+        <p:style>
+          <a:lnRef idx="1">
+            <a:schemeClr val="accent1"/>
+          </a:lnRef>
+          <a:fillRef idx="3">
+            <a:schemeClr val="accent1"/>
+          </a:fillRef>
+          <a:effectRef idx="2">
+            <a:schemeClr val="accent1"/>
+          </a:effectRef>
+          <a:fontRef idx="minor">
+            <a:schemeClr val="lt1"/>
+          </a:fontRef>
+        </p:style>
+        <p:txBody>
+          <a:bodyPr rtlCol="0" anchor="ctr" wrap="square"/>
+          <a:lstStyle/>
+          <a:p>
+            <a:pPr algn="ctr">
+              <a:defRPr sz="1000" b="0">
                 <a:solidFill>
                   <a:srgbClr val="787878"/>
                 </a:solidFill>
               </a:defRPr>
             </a:pPr>
             <a:r>
-              <a:t>Numbers are estimates — actual reduction depends on which categories and codes CGI selects.</a:t>
+              <a:t>Web Dashboard</a:t>
+            </a:r>
+            <a:br/>
+            <a:r>
+              <a:t>?</a:t>
+            </a:r>
+          </a:p>
+        </p:txBody>
+      </p:sp>
+      <p:sp>
+        <p:nvSpPr>
+          <p:cNvPr id="25" name="Rounded Rectangle 24"/>
+          <p:cNvSpPr/>
+          <p:nvPr/>
+        </p:nvSpPr>
+        <p:spPr>
+          <a:xfrm>
+            <a:off x="9052560" y="4480560"/>
+            <a:ext cx="2926080" cy="822960"/>
+          </a:xfrm>
+          <a:prstGeom prst="roundRect">
+            <a:avLst/>
+          </a:prstGeom>
+          <a:solidFill>
+            <a:srgbClr val="F0F0F0"/>
+          </a:solidFill>
+          <a:ln>
+            <a:noFill/>
+          </a:ln>
+        </p:spPr>
+        <p:style>
+          <a:lnRef idx="1">
+            <a:schemeClr val="accent1"/>
+          </a:lnRef>
+          <a:fillRef idx="3">
+            <a:schemeClr val="accent1"/>
+          </a:fillRef>
+          <a:effectRef idx="2">
+            <a:schemeClr val="accent1"/>
+          </a:effectRef>
+          <a:fontRef idx="minor">
+            <a:schemeClr val="lt1"/>
+          </a:fontRef>
+        </p:style>
+        <p:txBody>
+          <a:bodyPr rtlCol="0" anchor="ctr" wrap="square"/>
+          <a:lstStyle/>
+          <a:p>
+            <a:pPr algn="ctr">
+              <a:defRPr sz="1000" b="0">
+                <a:solidFill>
+                  <a:srgbClr val="787878"/>
+                </a:solidFill>
+              </a:defRPr>
+            </a:pPr>
+            <a:r>
+              <a:t>Competitor &amp; Price</a:t>
+            </a:r>
+            <a:br/>
+            <a:r>
+              <a:t>Intelligence Reports</a:t>
+            </a:r>
+          </a:p>
+        </p:txBody>
+      </p:sp>
+      <p:sp>
+        <p:nvSpPr>
+          <p:cNvPr id="26" name="TextBox 25"/>
+          <p:cNvSpPr txBox="1"/>
+          <p:nvPr/>
+        </p:nvSpPr>
+        <p:spPr>
+          <a:xfrm>
+            <a:off x="274320" y="5577840"/>
+            <a:ext cx="11430000" cy="640080"/>
+          </a:xfrm>
+          <a:prstGeom prst="rect">
+            <a:avLst/>
+          </a:prstGeom>
+          <a:noFill/>
+        </p:spPr>
+        <p:txBody>
+          <a:bodyPr wrap="square">
+            <a:spAutoFit/>
+          </a:bodyPr>
+          <a:lstStyle/>
+          <a:p>
+            <a:pPr algn="ctr">
+              <a:defRPr sz="1100" b="0">
+                <a:solidFill>
+                  <a:srgbClr val="787878"/>
+                </a:solidFill>
+              </a:defRPr>
+            </a:pPr>
+            <a:r>
+              <a:t>Stack: Python 3.12  |  Selenium + undetected-chromedriver  |  SQLite  |  OpenAI API  |  openpyxl  |  SMTP</a:t>
+            </a:r>
+            <a:br/>
+            <a:r>
+              <a:t>Deployment: Linux VM + Xvfb (virtual display)  |  Cron scheduling  |  No cloud dependencies beyond OpenAI</a:t>
             </a:r>
           </a:p>
         </p:txBody>
@@ -53812,13 +55787,18 @@
             <p:ph type="title"/>
           </p:nvPr>
         </p:nvSpPr>
-        <p:spPr/>
+        <p:spPr>
+          <a:xfrm>
+            <a:off x="320040" y="384048"/>
+            <a:ext cx="10607040" cy="502920"/>
+          </a:xfrm>
+        </p:spPr>
         <p:txBody>
           <a:bodyPr/>
           <a:lstStyle/>
           <a:p>
             <a:r>
-              <a:t>AI Costs: Right Model for Each Task</a:t>
+              <a:t>Deep Intelligence</a:t>
             </a:r>
           </a:p>
         </p:txBody>
@@ -53846,14 +55826,14 @@
           <a:lstStyle/>
           <a:p>
             <a:pPr algn="l">
-              <a:defRPr sz="1600" b="0">
+              <a:defRPr sz="1500" b="0">
                 <a:solidFill>
                   <a:srgbClr val="333333"/>
                 </a:solidFill>
               </a:defRPr>
             </a:pPr>
             <a:r>
-              <a:t>Different tasks need different models. Cheap models handle most work. Total monthly cost is negligible.</a:t>
+              <a:t>Separate analytics mode scrapes award results, builds competitive and pricing intelligence over time.</a:t>
             </a:r>
           </a:p>
         </p:txBody>
@@ -53867,7 +55847,7 @@
         <p:spPr>
           <a:xfrm>
             <a:off x="274320" y="1463040"/>
-            <a:ext cx="3200400" cy="274320"/>
+            <a:ext cx="5486400" cy="320040"/>
           </a:xfrm>
           <a:prstGeom prst="rect">
             <a:avLst/>
@@ -53881,174 +55861,34 @@
           <a:lstStyle/>
           <a:p>
             <a:pPr algn="l">
-              <a:defRPr sz="1400" b="1">
+              <a:defRPr sz="1500" b="1">
                 <a:solidFill>
                   <a:srgbClr val="0079C1"/>
                 </a:solidFill>
               </a:defRPr>
             </a:pPr>
             <a:r>
-              <a:t>Task</a:t>
-            </a:r>
-          </a:p>
-        </p:txBody>
-      </p:sp>
-      <p:sp>
-        <p:nvSpPr>
-          <p:cNvPr id="5" name="TextBox 4"/>
-          <p:cNvSpPr txBox="1"/>
-          <p:nvPr/>
-        </p:nvSpPr>
-        <p:spPr>
-          <a:xfrm>
-            <a:off x="3474720" y="1463040"/>
-            <a:ext cx="2286000" cy="274320"/>
-          </a:xfrm>
-          <a:prstGeom prst="rect">
-            <a:avLst/>
-          </a:prstGeom>
-          <a:noFill/>
-        </p:spPr>
-        <p:txBody>
-          <a:bodyPr wrap="square">
-            <a:spAutoFit/>
-          </a:bodyPr>
-          <a:lstStyle/>
-          <a:p>
-            <a:pPr algn="l">
-              <a:defRPr sz="1400" b="1">
-                <a:solidFill>
-                  <a:srgbClr val="0079C1"/>
-                </a:solidFill>
-              </a:defRPr>
-            </a:pPr>
-            <a:r>
-              <a:t>Model</a:t>
-            </a:r>
-          </a:p>
-        </p:txBody>
-      </p:sp>
-      <p:sp>
-        <p:nvSpPr>
-          <p:cNvPr id="6" name="TextBox 5"/>
-          <p:cNvSpPr txBox="1"/>
-          <p:nvPr/>
-        </p:nvSpPr>
-        <p:spPr>
-          <a:xfrm>
-            <a:off x="5760720" y="1463040"/>
-            <a:ext cx="2286000" cy="274320"/>
-          </a:xfrm>
-          <a:prstGeom prst="rect">
-            <a:avLst/>
-          </a:prstGeom>
-          <a:noFill/>
-        </p:spPr>
-        <p:txBody>
-          <a:bodyPr wrap="square">
-            <a:spAutoFit/>
-          </a:bodyPr>
-          <a:lstStyle/>
-          <a:p>
-            <a:pPr algn="l">
-              <a:defRPr sz="1400" b="1">
-                <a:solidFill>
-                  <a:srgbClr val="0079C1"/>
-                </a:solidFill>
-              </a:defRPr>
-            </a:pPr>
-            <a:r>
-              <a:t>Data used</a:t>
-            </a:r>
-          </a:p>
-        </p:txBody>
-      </p:sp>
-      <p:sp>
-        <p:nvSpPr>
-          <p:cNvPr id="7" name="TextBox 6"/>
-          <p:cNvSpPr txBox="1"/>
-          <p:nvPr/>
-        </p:nvSpPr>
-        <p:spPr>
-          <a:xfrm>
-            <a:off x="8046720" y="1463040"/>
-            <a:ext cx="1645920" cy="274320"/>
-          </a:xfrm>
-          <a:prstGeom prst="rect">
-            <a:avLst/>
-          </a:prstGeom>
-          <a:noFill/>
-        </p:spPr>
-        <p:txBody>
-          <a:bodyPr wrap="square">
-            <a:spAutoFit/>
-          </a:bodyPr>
-          <a:lstStyle/>
-          <a:p>
-            <a:pPr algn="l">
-              <a:defRPr sz="1400" b="1">
-                <a:solidFill>
-                  <a:srgbClr val="0079C1"/>
-                </a:solidFill>
-              </a:defRPr>
-            </a:pPr>
-            <a:r>
-              <a:t>Per tender</a:t>
-            </a:r>
-          </a:p>
-        </p:txBody>
-      </p:sp>
-      <p:sp>
-        <p:nvSpPr>
-          <p:cNvPr id="8" name="TextBox 7"/>
-          <p:cNvSpPr txBox="1"/>
-          <p:nvPr/>
-        </p:nvSpPr>
-        <p:spPr>
-          <a:xfrm>
-            <a:off x="9692640" y="1463040"/>
-            <a:ext cx="2286000" cy="274320"/>
-          </a:xfrm>
-          <a:prstGeom prst="rect">
-            <a:avLst/>
-          </a:prstGeom>
-          <a:noFill/>
-        </p:spPr>
-        <p:txBody>
-          <a:bodyPr wrap="square">
-            <a:spAutoFit/>
-          </a:bodyPr>
-          <a:lstStyle/>
-          <a:p>
-            <a:pPr algn="l">
-              <a:defRPr sz="1400" b="1">
-                <a:solidFill>
-                  <a:srgbClr val="0079C1"/>
-                </a:solidFill>
-              </a:defRPr>
-            </a:pPr>
-            <a:r>
-              <a:t>300/month</a:t>
-            </a:r>
-          </a:p>
-        </p:txBody>
-      </p:sp>
-      <p:sp>
-        <p:nvSpPr>
-          <p:cNvPr id="9" name="Rounded Rectangle 8"/>
+              <a:t>Analytics Pipeline</a:t>
+            </a:r>
+          </a:p>
+        </p:txBody>
+      </p:sp>
+      <p:sp>
+        <p:nvSpPr>
+          <p:cNvPr id="5" name="Rounded Rectangle 4"/>
           <p:cNvSpPr/>
           <p:nvPr/>
         </p:nvSpPr>
         <p:spPr>
           <a:xfrm>
             <a:off x="274320" y="1828800"/>
-            <a:ext cx="3108960" cy="685800"/>
+            <a:ext cx="2560320" cy="731520"/>
           </a:xfrm>
           <a:prstGeom prst="roundRect">
             <a:avLst/>
           </a:prstGeom>
           <a:solidFill>
-            <a:srgbClr val="D4EFDF"/>
+            <a:srgbClr val="DCEBFA"/>
           </a:solidFill>
           <a:ln>
             <a:noFill/>
@@ -54073,186 +55913,42 @@
           <a:lstStyle/>
           <a:p>
             <a:pPr algn="ctr">
-              <a:defRPr sz="1100" b="0">
+              <a:defRPr sz="1000" b="1">
                 <a:solidFill>
                   <a:srgbClr val="333333"/>
                 </a:solidFill>
               </a:defRPr>
             </a:pPr>
             <a:r>
-              <a:t>Summarization</a:t>
+              <a:t>Scrape Award Results</a:t>
             </a:r>
             <a:br/>
             <a:r>
-              <a:t>(Finnish → English)</a:t>
-            </a:r>
-          </a:p>
-        </p:txBody>
-      </p:sp>
-      <p:sp>
-        <p:nvSpPr>
-          <p:cNvPr id="10" name="TextBox 9"/>
-          <p:cNvSpPr txBox="1"/>
-          <p:nvPr/>
-        </p:nvSpPr>
-        <p:spPr>
-          <a:xfrm>
-            <a:off x="3474720" y="1965960"/>
-            <a:ext cx="2286000" cy="457200"/>
-          </a:xfrm>
-          <a:prstGeom prst="rect">
-            <a:avLst/>
-          </a:prstGeom>
-          <a:noFill/>
-        </p:spPr>
-        <p:txBody>
-          <a:bodyPr wrap="square">
-            <a:spAutoFit/>
-          </a:bodyPr>
-          <a:lstStyle/>
-          <a:p>
-            <a:pPr algn="l">
-              <a:defRPr sz="1300" b="1">
-                <a:solidFill>
-                  <a:srgbClr val="333333"/>
-                </a:solidFill>
-              </a:defRPr>
-            </a:pPr>
-            <a:r>
-              <a:t>Basic AI</a:t>
+              <a:t>Filter to decided tenders</a:t>
             </a:r>
             <a:br/>
             <a:r>
-              <a:t>(GPT-4.1-nano)</a:t>
-            </a:r>
-          </a:p>
-        </p:txBody>
-      </p:sp>
-      <p:sp>
-        <p:nvSpPr>
-          <p:cNvPr id="11" name="TextBox 10"/>
-          <p:cNvSpPr txBox="1"/>
-          <p:nvPr/>
-        </p:nvSpPr>
-        <p:spPr>
-          <a:xfrm>
-            <a:off x="5760720" y="1920240"/>
-            <a:ext cx="2286000" cy="457200"/>
-          </a:xfrm>
-          <a:prstGeom prst="rect">
-            <a:avLst/>
-          </a:prstGeom>
-          <a:noFill/>
-        </p:spPr>
-        <p:txBody>
-          <a:bodyPr wrap="square">
-            <a:spAutoFit/>
-          </a:bodyPr>
-          <a:lstStyle/>
-          <a:p>
-            <a:pPr algn="l">
-              <a:defRPr sz="1100" b="0">
-                <a:solidFill>
-                  <a:srgbClr val="787878"/>
-                </a:solidFill>
-              </a:defRPr>
-            </a:pPr>
-            <a:r>
-              <a:t>Detail page</a:t>
-            </a:r>
-            <a:br/>
-            <a:r>
-              <a:t>(full docs)</a:t>
-            </a:r>
-          </a:p>
-        </p:txBody>
-      </p:sp>
-      <p:sp>
-        <p:nvSpPr>
-          <p:cNvPr id="12" name="TextBox 11"/>
-          <p:cNvSpPr txBox="1"/>
-          <p:nvPr/>
-        </p:nvSpPr>
-        <p:spPr>
-          <a:xfrm>
-            <a:off x="8046720" y="1965960"/>
-            <a:ext cx="1645920" cy="457200"/>
-          </a:xfrm>
-          <a:prstGeom prst="rect">
-            <a:avLst/>
-          </a:prstGeom>
-          <a:noFill/>
-        </p:spPr>
-        <p:txBody>
-          <a:bodyPr wrap="square">
-            <a:spAutoFit/>
-          </a:bodyPr>
-          <a:lstStyle/>
-          <a:p>
-            <a:pPr algn="l">
-              <a:defRPr sz="1400" b="0">
-                <a:solidFill>
-                  <a:srgbClr val="333333"/>
-                </a:solidFill>
-              </a:defRPr>
-            </a:pPr>
-            <a:r>
-              <a:t>$0.002</a:t>
-            </a:r>
-          </a:p>
-        </p:txBody>
-      </p:sp>
-      <p:sp>
-        <p:nvSpPr>
-          <p:cNvPr id="13" name="TextBox 12"/>
-          <p:cNvSpPr txBox="1"/>
-          <p:nvPr/>
-        </p:nvSpPr>
-        <p:spPr>
-          <a:xfrm>
-            <a:off x="9692640" y="1965960"/>
-            <a:ext cx="2286000" cy="457200"/>
-          </a:xfrm>
-          <a:prstGeom prst="rect">
-            <a:avLst/>
-          </a:prstGeom>
-          <a:noFill/>
-        </p:spPr>
-        <p:txBody>
-          <a:bodyPr wrap="square">
-            <a:spAutoFit/>
-          </a:bodyPr>
-          <a:lstStyle/>
-          <a:p>
-            <a:pPr algn="l">
-              <a:defRPr sz="1400" b="0">
-                <a:solidFill>
-                  <a:srgbClr val="333333"/>
-                </a:solidFill>
-              </a:defRPr>
-            </a:pPr>
-            <a:r>
-              <a:t>$18</a:t>
-            </a:r>
-          </a:p>
-        </p:txBody>
-      </p:sp>
-      <p:sp>
-        <p:nvSpPr>
-          <p:cNvPr id="14" name="Rounded Rectangle 13"/>
+              <a:t>(Results, Contract Awards)</a:t>
+            </a:r>
+          </a:p>
+        </p:txBody>
+      </p:sp>
+      <p:sp>
+        <p:nvSpPr>
+          <p:cNvPr id="6" name="Right Arrow 5"/>
           <p:cNvSpPr/>
           <p:nvPr/>
         </p:nvSpPr>
         <p:spPr>
           <a:xfrm>
-            <a:off x="274320" y="2606040"/>
-            <a:ext cx="3108960" cy="685800"/>
-          </a:xfrm>
-          <a:prstGeom prst="roundRect">
+            <a:off x="2926080" y="2011680"/>
+            <a:ext cx="365760" cy="274320"/>
+          </a:xfrm>
+          <a:prstGeom prst="rightArrow">
             <a:avLst/>
           </a:prstGeom>
           <a:solidFill>
-            <a:srgbClr val="D4EFDF"/>
+            <a:srgbClr val="0079C1"/>
           </a:solidFill>
           <a:ln>
             <a:noFill/>
@@ -54273,190 +55969,29 @@
           </a:fontRef>
         </p:style>
         <p:txBody>
-          <a:bodyPr rtlCol="0" anchor="ctr" wrap="square"/>
+          <a:bodyPr rtlCol="0" anchor="ctr"/>
           <a:lstStyle/>
           <a:p>
-            <a:pPr algn="ctr">
-              <a:defRPr sz="1100" b="0">
-                <a:solidFill>
-                  <a:srgbClr val="333333"/>
-                </a:solidFill>
-              </a:defRPr>
-            </a:pPr>
-            <a:r>
-              <a:t>Classification</a:t>
-            </a:r>
-            <a:br/>
-            <a:r>
-              <a:t>(categorize tender)</a:t>
-            </a:r>
-          </a:p>
-        </p:txBody>
-      </p:sp>
-      <p:sp>
-        <p:nvSpPr>
-          <p:cNvPr id="15" name="TextBox 14"/>
-          <p:cNvSpPr txBox="1"/>
-          <p:nvPr/>
-        </p:nvSpPr>
-        <p:spPr>
-          <a:xfrm>
-            <a:off x="3474720" y="2743200"/>
-            <a:ext cx="2286000" cy="457200"/>
-          </a:xfrm>
-          <a:prstGeom prst="rect">
-            <a:avLst/>
-          </a:prstGeom>
-          <a:noFill/>
-        </p:spPr>
-        <p:txBody>
-          <a:bodyPr wrap="square">
-            <a:spAutoFit/>
-          </a:bodyPr>
-          <a:lstStyle/>
-          <a:p>
-            <a:pPr algn="l">
-              <a:defRPr sz="1300" b="1">
-                <a:solidFill>
-                  <a:srgbClr val="333333"/>
-                </a:solidFill>
-              </a:defRPr>
-            </a:pPr>
-            <a:r>
-              <a:t>Basic AI</a:t>
-            </a:r>
-            <a:br/>
-            <a:r>
-              <a:t>(GPT-4.1-nano)</a:t>
-            </a:r>
-          </a:p>
-        </p:txBody>
-      </p:sp>
-      <p:sp>
-        <p:nvSpPr>
-          <p:cNvPr id="16" name="TextBox 15"/>
-          <p:cNvSpPr txBox="1"/>
-          <p:nvPr/>
-        </p:nvSpPr>
-        <p:spPr>
-          <a:xfrm>
-            <a:off x="5760720" y="2697480"/>
-            <a:ext cx="2286000" cy="457200"/>
-          </a:xfrm>
-          <a:prstGeom prst="rect">
-            <a:avLst/>
-          </a:prstGeom>
-          <a:noFill/>
-        </p:spPr>
-        <p:txBody>
-          <a:bodyPr wrap="square">
-            <a:spAutoFit/>
-          </a:bodyPr>
-          <a:lstStyle/>
-          <a:p>
-            <a:pPr algn="l">
-              <a:defRPr sz="1100" b="0">
-                <a:solidFill>
-                  <a:srgbClr val="787878"/>
-                </a:solidFill>
-              </a:defRPr>
-            </a:pPr>
-            <a:r>
-              <a:t>Listing</a:t>
-            </a:r>
-            <a:br/>
-            <a:r>
-              <a:t>(description)</a:t>
-            </a:r>
-          </a:p>
-        </p:txBody>
-      </p:sp>
-      <p:sp>
-        <p:nvSpPr>
-          <p:cNvPr id="17" name="TextBox 16"/>
-          <p:cNvSpPr txBox="1"/>
-          <p:nvPr/>
-        </p:nvSpPr>
-        <p:spPr>
-          <a:xfrm>
-            <a:off x="8046720" y="2743200"/>
-            <a:ext cx="1645920" cy="457200"/>
-          </a:xfrm>
-          <a:prstGeom prst="rect">
-            <a:avLst/>
-          </a:prstGeom>
-          <a:noFill/>
-        </p:spPr>
-        <p:txBody>
-          <a:bodyPr wrap="square">
-            <a:spAutoFit/>
-          </a:bodyPr>
-          <a:lstStyle/>
-          <a:p>
-            <a:pPr algn="l">
-              <a:defRPr sz="1400" b="0">
-                <a:solidFill>
-                  <a:srgbClr val="333333"/>
-                </a:solidFill>
-              </a:defRPr>
-            </a:pPr>
-            <a:r>
-              <a:t>$0.0002</a:t>
-            </a:r>
-          </a:p>
-        </p:txBody>
-      </p:sp>
-      <p:sp>
-        <p:nvSpPr>
-          <p:cNvPr id="18" name="TextBox 17"/>
-          <p:cNvSpPr txBox="1"/>
-          <p:nvPr/>
-        </p:nvSpPr>
-        <p:spPr>
-          <a:xfrm>
-            <a:off x="9692640" y="2743200"/>
-            <a:ext cx="2286000" cy="457200"/>
-          </a:xfrm>
-          <a:prstGeom prst="rect">
-            <a:avLst/>
-          </a:prstGeom>
-          <a:noFill/>
-        </p:spPr>
-        <p:txBody>
-          <a:bodyPr wrap="square">
-            <a:spAutoFit/>
-          </a:bodyPr>
-          <a:lstStyle/>
-          <a:p>
-            <a:pPr algn="l">
-              <a:defRPr sz="1400" b="0">
-                <a:solidFill>
-                  <a:srgbClr val="333333"/>
-                </a:solidFill>
-              </a:defRPr>
-            </a:pPr>
-            <a:r>
-              <a:t>$1.60</a:t>
-            </a:r>
-          </a:p>
-        </p:txBody>
-      </p:sp>
-      <p:sp>
-        <p:nvSpPr>
-          <p:cNvPr id="19" name="Rounded Rectangle 18"/>
+            <a:pPr algn="ctr"/>
+          </a:p>
+        </p:txBody>
+      </p:sp>
+      <p:sp>
+        <p:nvSpPr>
+          <p:cNvPr id="7" name="Rounded Rectangle 6"/>
           <p:cNvSpPr/>
           <p:nvPr/>
         </p:nvSpPr>
         <p:spPr>
           <a:xfrm>
-            <a:off x="274320" y="3383280"/>
-            <a:ext cx="3108960" cy="685800"/>
+            <a:off x="3383280" y="1828800"/>
+            <a:ext cx="2560320" cy="731520"/>
           </a:xfrm>
           <a:prstGeom prst="roundRect">
             <a:avLst/>
           </a:prstGeom>
           <a:solidFill>
-            <a:srgbClr val="DCEBFA"/>
+            <a:srgbClr val="FFEBC8"/>
           </a:solidFill>
           <a:ln>
             <a:noFill/>
@@ -54481,32 +56016,36 @@
           <a:lstStyle/>
           <a:p>
             <a:pPr algn="ctr">
-              <a:defRPr sz="1100" b="0">
+              <a:defRPr sz="1000" b="1">
                 <a:solidFill>
                   <a:srgbClr val="333333"/>
                 </a:solidFill>
               </a:defRPr>
             </a:pPr>
             <a:r>
-              <a:t>Award Analysis</a:t>
+              <a:t>AI Extraction</a:t>
             </a:r>
             <a:br/>
             <a:r>
-              <a:t>(extract winner + price)</a:t>
-            </a:r>
-          </a:p>
-        </p:txBody>
-      </p:sp>
-      <p:sp>
-        <p:nvSpPr>
-          <p:cNvPr id="20" name="TextBox 19"/>
+              <a:t>OpenAI parses Finnish text →</a:t>
+            </a:r>
+            <a:br/>
+            <a:r>
+              <a:t>winner, price, bidders, sector</a:t>
+            </a:r>
+          </a:p>
+        </p:txBody>
+      </p:sp>
+      <p:sp>
+        <p:nvSpPr>
+          <p:cNvPr id="8" name="TextBox 7"/>
           <p:cNvSpPr txBox="1"/>
           <p:nvPr/>
         </p:nvSpPr>
         <p:spPr>
           <a:xfrm>
-            <a:off x="3474720" y="3520440"/>
-            <a:ext cx="2286000" cy="457200"/>
+            <a:off x="3566160" y="2514600"/>
+            <a:ext cx="1828800" cy="274320"/>
           </a:xfrm>
           <a:prstGeom prst="rect">
             <a:avLst/>
@@ -54520,32 +56059,28 @@
           <a:lstStyle/>
           <a:p>
             <a:pPr algn="l">
-              <a:defRPr sz="1300" b="1">
-                <a:solidFill>
-                  <a:srgbClr val="333333"/>
+              <a:defRPr sz="900" b="1">
+                <a:solidFill>
+                  <a:srgbClr val="E67E22"/>
                 </a:solidFill>
               </a:defRPr>
             </a:pPr>
             <a:r>
-              <a:t>Standard AI</a:t>
-            </a:r>
-            <a:br/>
-            <a:r>
-              <a:t>(GPT-4.1-mini)</a:t>
-            </a:r>
-          </a:p>
-        </p:txBody>
-      </p:sp>
-      <p:sp>
-        <p:nvSpPr>
-          <p:cNvPr id="21" name="TextBox 20"/>
+              <a:t>⚡ OpenAI API call</a:t>
+            </a:r>
+          </a:p>
+        </p:txBody>
+      </p:sp>
+      <p:sp>
+        <p:nvSpPr>
+          <p:cNvPr id="9" name="TextBox 8"/>
           <p:cNvSpPr txBox="1"/>
           <p:nvPr/>
         </p:nvSpPr>
         <p:spPr>
           <a:xfrm>
-            <a:off x="5760720" y="3474720"/>
-            <a:ext cx="2286000" cy="457200"/>
+            <a:off x="274320" y="2926080"/>
+            <a:ext cx="5486400" cy="274320"/>
           </a:xfrm>
           <a:prstGeom prst="rect">
             <a:avLst/>
@@ -54559,108 +56094,34 @@
           <a:lstStyle/>
           <a:p>
             <a:pPr algn="l">
-              <a:defRPr sz="1100" b="0">
-                <a:solidFill>
-                  <a:srgbClr val="787878"/>
+              <a:defRPr sz="1300" b="1">
+                <a:solidFill>
+                  <a:srgbClr val="333333"/>
                 </a:solidFill>
               </a:defRPr>
             </a:pPr>
             <a:r>
-              <a:t>Detail page</a:t>
-            </a:r>
-            <a:br/>
-            <a:r>
-              <a:t>(award text)</a:t>
-            </a:r>
-          </a:p>
-        </p:txBody>
-      </p:sp>
-      <p:sp>
-        <p:nvSpPr>
-          <p:cNvPr id="22" name="TextBox 21"/>
-          <p:cNvSpPr txBox="1"/>
-          <p:nvPr/>
-        </p:nvSpPr>
-        <p:spPr>
-          <a:xfrm>
-            <a:off x="8046720" y="3520440"/>
-            <a:ext cx="1645920" cy="457200"/>
-          </a:xfrm>
-          <a:prstGeom prst="rect">
-            <a:avLst/>
-          </a:prstGeom>
-          <a:noFill/>
-        </p:spPr>
-        <p:txBody>
-          <a:bodyPr wrap="square">
-            <a:spAutoFit/>
-          </a:bodyPr>
-          <a:lstStyle/>
-          <a:p>
-            <a:pPr algn="l">
-              <a:defRPr sz="1400" b="0">
-                <a:solidFill>
-                  <a:srgbClr val="333333"/>
-                </a:solidFill>
-              </a:defRPr>
-            </a:pPr>
-            <a:r>
-              <a:t>$0.003</a:t>
-            </a:r>
-          </a:p>
-        </p:txBody>
-      </p:sp>
-      <p:sp>
-        <p:nvSpPr>
-          <p:cNvPr id="23" name="TextBox 22"/>
-          <p:cNvSpPr txBox="1"/>
-          <p:nvPr/>
-        </p:nvSpPr>
-        <p:spPr>
-          <a:xfrm>
-            <a:off x="9692640" y="3520440"/>
-            <a:ext cx="2286000" cy="457200"/>
-          </a:xfrm>
-          <a:prstGeom prst="rect">
-            <a:avLst/>
-          </a:prstGeom>
-          <a:noFill/>
-        </p:spPr>
-        <p:txBody>
-          <a:bodyPr wrap="square">
-            <a:spAutoFit/>
-          </a:bodyPr>
-          <a:lstStyle/>
-          <a:p>
-            <a:pPr algn="l">
-              <a:defRPr sz="1400" b="0">
-                <a:solidFill>
-                  <a:srgbClr val="333333"/>
-                </a:solidFill>
-              </a:defRPr>
-            </a:pPr>
-            <a:r>
-              <a:t>$9</a:t>
-            </a:r>
-          </a:p>
-        </p:txBody>
-      </p:sp>
-      <p:sp>
-        <p:nvSpPr>
-          <p:cNvPr id="24" name="Rounded Rectangle 23"/>
+              <a:t>Structured data extracted per award:</a:t>
+            </a:r>
+          </a:p>
+        </p:txBody>
+      </p:sp>
+      <p:sp>
+        <p:nvSpPr>
+          <p:cNvPr id="10" name="Rounded Rectangle 9"/>
           <p:cNvSpPr/>
           <p:nvPr/>
         </p:nvSpPr>
         <p:spPr>
           <a:xfrm>
-            <a:off x="274320" y="4160520"/>
-            <a:ext cx="3108960" cy="685800"/>
+            <a:off x="274320" y="3246120"/>
+            <a:ext cx="5669280" cy="1188720"/>
           </a:xfrm>
           <a:prstGeom prst="roundRect">
             <a:avLst/>
           </a:prstGeom>
           <a:solidFill>
-            <a:srgbClr val="DCEBFA"/>
+            <a:srgbClr val="F8F8F8"/>
           </a:solidFill>
           <a:ln>
             <a:noFill/>
@@ -54692,25 +56153,45 @@
               </a:defRPr>
             </a:pPr>
             <a:r>
-              <a:t>Relevance Scoring</a:t>
+              <a:t>• Winner company name (preserved in Finnish)</a:t>
             </a:r>
             <a:br/>
             <a:r>
-              <a:t>(relevant to CGI?)</a:t>
-            </a:r>
-          </a:p>
-        </p:txBody>
-      </p:sp>
-      <p:sp>
-        <p:nvSpPr>
-          <p:cNvPr id="25" name="TextBox 24"/>
+              <a:t>• Winning price (EUR, ex. VAT)</a:t>
+            </a:r>
+            <a:br/>
+            <a:r>
+              <a:t>• Estimated contract value</a:t>
+            </a:r>
+            <a:br/>
+            <a:r>
+              <a:t>• Number of bidders</a:t>
+            </a:r>
+            <a:br/>
+            <a:r>
+              <a:t>• Contract duration (e.g. '2 years + 2 option years')</a:t>
+            </a:r>
+            <a:br/>
+            <a:r>
+              <a:t>• Sector (IT, Construction, Healthcare, etc.)</a:t>
+            </a:r>
+            <a:br/>
+            <a:r>
+              <a:t>• Confidence level (high / medium / low)</a:t>
+            </a:r>
+          </a:p>
+        </p:txBody>
+      </p:sp>
+      <p:sp>
+        <p:nvSpPr>
+          <p:cNvPr id="11" name="TextBox 10"/>
           <p:cNvSpPr txBox="1"/>
           <p:nvPr/>
         </p:nvSpPr>
         <p:spPr>
           <a:xfrm>
-            <a:off x="3474720" y="4297680"/>
-            <a:ext cx="2286000" cy="457200"/>
+            <a:off x="6217920" y="1463040"/>
+            <a:ext cx="5486400" cy="274320"/>
           </a:xfrm>
           <a:prstGeom prst="rect">
             <a:avLst/>
@@ -54724,147 +56205,34 @@
           <a:lstStyle/>
           <a:p>
             <a:pPr algn="l">
-              <a:defRPr sz="1300" b="1">
-                <a:solidFill>
-                  <a:srgbClr val="333333"/>
+              <a:defRPr sz="1500" b="1">
+                <a:solidFill>
+                  <a:srgbClr val="0079C1"/>
                 </a:solidFill>
               </a:defRPr>
             </a:pPr>
             <a:r>
-              <a:t>Standard AI</a:t>
-            </a:r>
-            <a:br/>
-            <a:r>
-              <a:t>(GPT-4.1-mini)</a:t>
-            </a:r>
-          </a:p>
-        </p:txBody>
-      </p:sp>
-      <p:sp>
-        <p:nvSpPr>
-          <p:cNvPr id="26" name="TextBox 25"/>
-          <p:cNvSpPr txBox="1"/>
-          <p:nvPr/>
-        </p:nvSpPr>
-        <p:spPr>
-          <a:xfrm>
-            <a:off x="5760720" y="4251959"/>
-            <a:ext cx="2286000" cy="457200"/>
-          </a:xfrm>
-          <a:prstGeom prst="rect">
-            <a:avLst/>
-          </a:prstGeom>
-          <a:noFill/>
-        </p:spPr>
-        <p:txBody>
-          <a:bodyPr wrap="square">
-            <a:spAutoFit/>
-          </a:bodyPr>
-          <a:lstStyle/>
-          <a:p>
-            <a:pPr algn="l">
-              <a:defRPr sz="1100" b="0">
-                <a:solidFill>
-                  <a:srgbClr val="787878"/>
-                </a:solidFill>
-              </a:defRPr>
-            </a:pPr>
-            <a:r>
-              <a:t>Detail page</a:t>
-            </a:r>
-            <a:br/>
-            <a:r>
-              <a:t>(full docs)</a:t>
-            </a:r>
-          </a:p>
-        </p:txBody>
-      </p:sp>
-      <p:sp>
-        <p:nvSpPr>
-          <p:cNvPr id="27" name="TextBox 26"/>
-          <p:cNvSpPr txBox="1"/>
-          <p:nvPr/>
-        </p:nvSpPr>
-        <p:spPr>
-          <a:xfrm>
-            <a:off x="8046720" y="4297680"/>
-            <a:ext cx="1645920" cy="457200"/>
-          </a:xfrm>
-          <a:prstGeom prst="rect">
-            <a:avLst/>
-          </a:prstGeom>
-          <a:noFill/>
-        </p:spPr>
-        <p:txBody>
-          <a:bodyPr wrap="square">
-            <a:spAutoFit/>
-          </a:bodyPr>
-          <a:lstStyle/>
-          <a:p>
-            <a:pPr algn="l">
-              <a:defRPr sz="1400" b="0">
-                <a:solidFill>
-                  <a:srgbClr val="333333"/>
-                </a:solidFill>
-              </a:defRPr>
-            </a:pPr>
-            <a:r>
-              <a:t>$0.003</a:t>
-            </a:r>
-          </a:p>
-        </p:txBody>
-      </p:sp>
-      <p:sp>
-        <p:nvSpPr>
-          <p:cNvPr id="28" name="TextBox 27"/>
-          <p:cNvSpPr txBox="1"/>
-          <p:nvPr/>
-        </p:nvSpPr>
-        <p:spPr>
-          <a:xfrm>
-            <a:off x="9692640" y="4297680"/>
-            <a:ext cx="2286000" cy="457200"/>
-          </a:xfrm>
-          <a:prstGeom prst="rect">
-            <a:avLst/>
-          </a:prstGeom>
-          <a:noFill/>
-        </p:spPr>
-        <p:txBody>
-          <a:bodyPr wrap="square">
-            <a:spAutoFit/>
-          </a:bodyPr>
-          <a:lstStyle/>
-          <a:p>
-            <a:pPr algn="l">
-              <a:defRPr sz="1400" b="0">
-                <a:solidFill>
-                  <a:srgbClr val="333333"/>
-                </a:solidFill>
-              </a:defRPr>
-            </a:pPr>
-            <a:r>
-              <a:t>$9</a:t>
-            </a:r>
-          </a:p>
-        </p:txBody>
-      </p:sp>
-      <p:sp>
-        <p:nvSpPr>
-          <p:cNvPr id="29" name="Rounded Rectangle 28"/>
+              <a:t>Intelligence That Grows Over Time</a:t>
+            </a:r>
+          </a:p>
+        </p:txBody>
+      </p:sp>
+      <p:sp>
+        <p:nvSpPr>
+          <p:cNvPr id="12" name="Rounded Rectangle 11"/>
           <p:cNvSpPr/>
           <p:nvPr/>
         </p:nvSpPr>
         <p:spPr>
           <a:xfrm>
-            <a:off x="274320" y="4937760"/>
-            <a:ext cx="3108960" cy="685800"/>
+            <a:off x="6217920" y="1828800"/>
+            <a:ext cx="5669280" cy="1280160"/>
           </a:xfrm>
           <a:prstGeom prst="roundRect">
             <a:avLst/>
           </a:prstGeom>
           <a:solidFill>
-            <a:srgbClr val="FCF3CF"/>
+            <a:srgbClr val="E0F7E0"/>
           </a:solidFill>
           <a:ln>
             <a:noFill/>
@@ -54896,25 +56264,111 @@
               </a:defRPr>
             </a:pPr>
             <a:r>
-              <a:t>Bid Recommendation</a:t>
+              <a:t>COMPETITOR PROFILES</a:t>
             </a:r>
             <a:br/>
-            <a:r>
-              <a:t>(should CGI bid?)</a:t>
-            </a:r>
-          </a:p>
-        </p:txBody>
-      </p:sp>
-      <p:sp>
-        <p:nvSpPr>
-          <p:cNvPr id="30" name="TextBox 29"/>
+            <a:br/>
+            <a:r>
+              <a:t>Each award result updates a rolling database:</a:t>
+            </a:r>
+            <a:br/>
+            <a:r>
+              <a:t>• Win count per company</a:t>
+            </a:r>
+            <a:br/>
+            <a:r>
+              <a:t>• Total and average contract value</a:t>
+            </a:r>
+            <a:br/>
+            <a:r>
+              <a:t>• Sectors they operate in</a:t>
+            </a:r>
+            <a:br/>
+            <a:r>
+              <a:t>• Most recent win date</a:t>
+            </a:r>
+          </a:p>
+        </p:txBody>
+      </p:sp>
+      <p:sp>
+        <p:nvSpPr>
+          <p:cNvPr id="13" name="Rounded Rectangle 12"/>
+          <p:cNvSpPr/>
+          <p:nvPr/>
+        </p:nvSpPr>
+        <p:spPr>
+          <a:xfrm>
+            <a:off x="6217920" y="3246120"/>
+            <a:ext cx="5669280" cy="1188720"/>
+          </a:xfrm>
+          <a:prstGeom prst="roundRect">
+            <a:avLst/>
+          </a:prstGeom>
+          <a:solidFill>
+            <a:srgbClr val="DCEBFA"/>
+          </a:solidFill>
+          <a:ln>
+            <a:noFill/>
+          </a:ln>
+        </p:spPr>
+        <p:style>
+          <a:lnRef idx="1">
+            <a:schemeClr val="accent1"/>
+          </a:lnRef>
+          <a:fillRef idx="3">
+            <a:schemeClr val="accent1"/>
+          </a:fillRef>
+          <a:effectRef idx="2">
+            <a:schemeClr val="accent1"/>
+          </a:effectRef>
+          <a:fontRef idx="minor">
+            <a:schemeClr val="lt1"/>
+          </a:fontRef>
+        </p:style>
+        <p:txBody>
+          <a:bodyPr rtlCol="0" anchor="ctr" wrap="square"/>
+          <a:lstStyle/>
+          <a:p>
+            <a:pPr algn="ctr">
+              <a:defRPr sz="1100" b="0">
+                <a:solidFill>
+                  <a:srgbClr val="333333"/>
+                </a:solidFill>
+              </a:defRPr>
+            </a:pPr>
+            <a:r>
+              <a:t>PRICE INTELLIGENCE</a:t>
+            </a:r>
+            <a:br/>
+            <a:br/>
+            <a:r>
+              <a:t>Contract values grouped by sector:</a:t>
+            </a:r>
+            <a:br/>
+            <a:r>
+              <a:t>• Average, min, max per sector</a:t>
+            </a:r>
+            <a:br/>
+            <a:r>
+              <a:t>• Helps size CGI bids competitively</a:t>
+            </a:r>
+            <a:br/>
+            <a:r>
+              <a:t>• Identifies high-value sectors</a:t>
+            </a:r>
+          </a:p>
+        </p:txBody>
+      </p:sp>
+      <p:sp>
+        <p:nvSpPr>
+          <p:cNvPr id="14" name="TextBox 13"/>
           <p:cNvSpPr txBox="1"/>
           <p:nvPr/>
         </p:nvSpPr>
         <p:spPr>
           <a:xfrm>
-            <a:off x="3474720" y="5074920"/>
-            <a:ext cx="2286000" cy="457200"/>
+            <a:off x="274320" y="4754880"/>
+            <a:ext cx="11430000" cy="274320"/>
           </a:xfrm>
           <a:prstGeom prst="rect">
             <a:avLst/>
@@ -54928,32 +56382,294 @@
           <a:lstStyle/>
           <a:p>
             <a:pPr algn="l">
-              <a:defRPr sz="1300" b="1">
+              <a:defRPr sz="1400" b="1">
                 <a:solidFill>
                   <a:srgbClr val="333333"/>
                 </a:solidFill>
               </a:defRPr>
             </a:pPr>
             <a:r>
-              <a:t>Advanced AI</a:t>
+              <a:t>How it works in practice:</a:t>
+            </a:r>
+          </a:p>
+        </p:txBody>
+      </p:sp>
+      <p:sp>
+        <p:nvSpPr>
+          <p:cNvPr id="15" name="Rounded Rectangle 14"/>
+          <p:cNvSpPr/>
+          <p:nvPr/>
+        </p:nvSpPr>
+        <p:spPr>
+          <a:xfrm>
+            <a:off x="274320" y="5120640"/>
+            <a:ext cx="3657600" cy="731520"/>
+          </a:xfrm>
+          <a:prstGeom prst="roundRect">
+            <a:avLst/>
+          </a:prstGeom>
+          <a:solidFill>
+            <a:srgbClr val="FCF3CF"/>
+          </a:solidFill>
+          <a:ln>
+            <a:noFill/>
+          </a:ln>
+        </p:spPr>
+        <p:style>
+          <a:lnRef idx="1">
+            <a:schemeClr val="accent1"/>
+          </a:lnRef>
+          <a:fillRef idx="3">
+            <a:schemeClr val="accent1"/>
+          </a:fillRef>
+          <a:effectRef idx="2">
+            <a:schemeClr val="accent1"/>
+          </a:effectRef>
+          <a:fontRef idx="minor">
+            <a:schemeClr val="lt1"/>
+          </a:fontRef>
+        </p:style>
+        <p:txBody>
+          <a:bodyPr rtlCol="0" anchor="ctr" wrap="square"/>
+          <a:lstStyle/>
+          <a:p>
+            <a:pPr algn="ctr">
+              <a:defRPr sz="1100" b="1">
+                <a:solidFill>
+                  <a:srgbClr val="333333"/>
+                </a:solidFill>
+              </a:defRPr>
+            </a:pPr>
+            <a:r>
+              <a:t>Week 1</a:t>
             </a:r>
             <a:br/>
             <a:r>
-              <a:t>(GPT-4.1 / 4o)</a:t>
-            </a:r>
-          </a:p>
-        </p:txBody>
-      </p:sp>
-      <p:sp>
-        <p:nvSpPr>
-          <p:cNvPr id="31" name="TextBox 30"/>
+              <a:t>First analytics run: ~100 awards</a:t>
+            </a:r>
+            <a:br/>
+            <a:r>
+              <a:t>→ initial competitor/price data</a:t>
+            </a:r>
+          </a:p>
+        </p:txBody>
+      </p:sp>
+      <p:sp>
+        <p:nvSpPr>
+          <p:cNvPr id="16" name="Right Arrow 15"/>
+          <p:cNvSpPr/>
+          <p:nvPr/>
+        </p:nvSpPr>
+        <p:spPr>
+          <a:xfrm>
+            <a:off x="4023360" y="5303520"/>
+            <a:ext cx="274320" cy="274320"/>
+          </a:xfrm>
+          <a:prstGeom prst="rightArrow">
+            <a:avLst/>
+          </a:prstGeom>
+          <a:solidFill>
+            <a:srgbClr val="0079C1"/>
+          </a:solidFill>
+          <a:ln>
+            <a:noFill/>
+          </a:ln>
+        </p:spPr>
+        <p:style>
+          <a:lnRef idx="1">
+            <a:schemeClr val="accent1"/>
+          </a:lnRef>
+          <a:fillRef idx="3">
+            <a:schemeClr val="accent1"/>
+          </a:fillRef>
+          <a:effectRef idx="2">
+            <a:schemeClr val="accent1"/>
+          </a:effectRef>
+          <a:fontRef idx="minor">
+            <a:schemeClr val="lt1"/>
+          </a:fontRef>
+        </p:style>
+        <p:txBody>
+          <a:bodyPr rtlCol="0" anchor="ctr"/>
+          <a:lstStyle/>
+          <a:p>
+            <a:pPr algn="ctr"/>
+          </a:p>
+        </p:txBody>
+      </p:sp>
+      <p:sp>
+        <p:nvSpPr>
+          <p:cNvPr id="17" name="Rounded Rectangle 16"/>
+          <p:cNvSpPr/>
+          <p:nvPr/>
+        </p:nvSpPr>
+        <p:spPr>
+          <a:xfrm>
+            <a:off x="4389120" y="5120640"/>
+            <a:ext cx="3657600" cy="731520"/>
+          </a:xfrm>
+          <a:prstGeom prst="roundRect">
+            <a:avLst/>
+          </a:prstGeom>
+          <a:solidFill>
+            <a:srgbClr val="FCF3CF"/>
+          </a:solidFill>
+          <a:ln>
+            <a:noFill/>
+          </a:ln>
+        </p:spPr>
+        <p:style>
+          <a:lnRef idx="1">
+            <a:schemeClr val="accent1"/>
+          </a:lnRef>
+          <a:fillRef idx="3">
+            <a:schemeClr val="accent1"/>
+          </a:fillRef>
+          <a:effectRef idx="2">
+            <a:schemeClr val="accent1"/>
+          </a:effectRef>
+          <a:fontRef idx="minor">
+            <a:schemeClr val="lt1"/>
+          </a:fontRef>
+        </p:style>
+        <p:txBody>
+          <a:bodyPr rtlCol="0" anchor="ctr" wrap="square"/>
+          <a:lstStyle/>
+          <a:p>
+            <a:pPr algn="ctr">
+              <a:defRPr sz="1100" b="1">
+                <a:solidFill>
+                  <a:srgbClr val="333333"/>
+                </a:solidFill>
+              </a:defRPr>
+            </a:pPr>
+            <a:r>
+              <a:t>Month 1</a:t>
+            </a:r>
+            <a:br/>
+            <a:r>
+              <a:t>Nightly runs accumulate ~500+</a:t>
+            </a:r>
+            <a:br/>
+            <a:r>
+              <a:t>→ patterns emerge per sector</a:t>
+            </a:r>
+          </a:p>
+        </p:txBody>
+      </p:sp>
+      <p:sp>
+        <p:nvSpPr>
+          <p:cNvPr id="18" name="Right Arrow 17"/>
+          <p:cNvSpPr/>
+          <p:nvPr/>
+        </p:nvSpPr>
+        <p:spPr>
+          <a:xfrm>
+            <a:off x="8138160" y="5303520"/>
+            <a:ext cx="274320" cy="274320"/>
+          </a:xfrm>
+          <a:prstGeom prst="rightArrow">
+            <a:avLst/>
+          </a:prstGeom>
+          <a:solidFill>
+            <a:srgbClr val="0079C1"/>
+          </a:solidFill>
+          <a:ln>
+            <a:noFill/>
+          </a:ln>
+        </p:spPr>
+        <p:style>
+          <a:lnRef idx="1">
+            <a:schemeClr val="accent1"/>
+          </a:lnRef>
+          <a:fillRef idx="3">
+            <a:schemeClr val="accent1"/>
+          </a:fillRef>
+          <a:effectRef idx="2">
+            <a:schemeClr val="accent1"/>
+          </a:effectRef>
+          <a:fontRef idx="minor">
+            <a:schemeClr val="lt1"/>
+          </a:fontRef>
+        </p:style>
+        <p:txBody>
+          <a:bodyPr rtlCol="0" anchor="ctr"/>
+          <a:lstStyle/>
+          <a:p>
+            <a:pPr algn="ctr"/>
+          </a:p>
+        </p:txBody>
+      </p:sp>
+      <p:sp>
+        <p:nvSpPr>
+          <p:cNvPr id="19" name="Rounded Rectangle 18"/>
+          <p:cNvSpPr/>
+          <p:nvPr/>
+        </p:nvSpPr>
+        <p:spPr>
+          <a:xfrm>
+            <a:off x="8503920" y="5120640"/>
+            <a:ext cx="3474720" cy="731520"/>
+          </a:xfrm>
+          <a:prstGeom prst="roundRect">
+            <a:avLst/>
+          </a:prstGeom>
+          <a:solidFill>
+            <a:srgbClr val="FCF3CF"/>
+          </a:solidFill>
+          <a:ln>
+            <a:noFill/>
+          </a:ln>
+        </p:spPr>
+        <p:style>
+          <a:lnRef idx="1">
+            <a:schemeClr val="accent1"/>
+          </a:lnRef>
+          <a:fillRef idx="3">
+            <a:schemeClr val="accent1"/>
+          </a:fillRef>
+          <a:effectRef idx="2">
+            <a:schemeClr val="accent1"/>
+          </a:effectRef>
+          <a:fontRef idx="minor">
+            <a:schemeClr val="lt1"/>
+          </a:fontRef>
+        </p:style>
+        <p:txBody>
+          <a:bodyPr rtlCol="0" anchor="ctr" wrap="square"/>
+          <a:lstStyle/>
+          <a:p>
+            <a:pPr algn="ctr">
+              <a:defRPr sz="1100" b="1">
+                <a:solidFill>
+                  <a:srgbClr val="333333"/>
+                </a:solidFill>
+              </a:defRPr>
+            </a:pPr>
+            <a:r>
+              <a:t>Ongoing</a:t>
+            </a:r>
+            <a:br/>
+            <a:r>
+              <a:t>Historical database grows</a:t>
+            </a:r>
+            <a:br/>
+            <a:r>
+              <a:t>→ benchmark bids, spot trends</a:t>
+            </a:r>
+          </a:p>
+        </p:txBody>
+      </p:sp>
+      <p:sp>
+        <p:nvSpPr>
+          <p:cNvPr id="20" name="TextBox 19"/>
           <p:cNvSpPr txBox="1"/>
           <p:nvPr/>
         </p:nvSpPr>
         <p:spPr>
           <a:xfrm>
-            <a:off x="5760720" y="5029200"/>
-            <a:ext cx="2286000" cy="457200"/>
+            <a:off x="274320" y="6035040"/>
+            <a:ext cx="11430000" cy="274320"/>
           </a:xfrm>
           <a:prstGeom prst="rect">
             <a:avLst/>
@@ -54966,7 +56682,7 @@
           </a:bodyPr>
           <a:lstStyle/>
           <a:p>
-            <a:pPr algn="l">
+            <a:pPr algn="ctr">
               <a:defRPr sz="1100" b="0">
                 <a:solidFill>
                   <a:srgbClr val="787878"/>
@@ -54974,120 +56690,7 @@
               </a:defRPr>
             </a:pPr>
             <a:r>
-              <a:t>All docs +</a:t>
-            </a:r>
-            <a:br/>
-            <a:r>
-              <a:t>history</a:t>
-            </a:r>
-          </a:p>
-        </p:txBody>
-      </p:sp>
-      <p:sp>
-        <p:nvSpPr>
-          <p:cNvPr id="32" name="TextBox 31"/>
-          <p:cNvSpPr txBox="1"/>
-          <p:nvPr/>
-        </p:nvSpPr>
-        <p:spPr>
-          <a:xfrm>
-            <a:off x="8046720" y="5074920"/>
-            <a:ext cx="1645920" cy="457200"/>
-          </a:xfrm>
-          <a:prstGeom prst="rect">
-            <a:avLst/>
-          </a:prstGeom>
-          <a:noFill/>
-        </p:spPr>
-        <p:txBody>
-          <a:bodyPr wrap="square">
-            <a:spAutoFit/>
-          </a:bodyPr>
-          <a:lstStyle/>
-          <a:p>
-            <a:pPr algn="l">
-              <a:defRPr sz="1400" b="0">
-                <a:solidFill>
-                  <a:srgbClr val="333333"/>
-                </a:solidFill>
-              </a:defRPr>
-            </a:pPr>
-            <a:r>
-              <a:t>$0.01</a:t>
-            </a:r>
-          </a:p>
-        </p:txBody>
-      </p:sp>
-      <p:sp>
-        <p:nvSpPr>
-          <p:cNvPr id="33" name="TextBox 32"/>
-          <p:cNvSpPr txBox="1"/>
-          <p:nvPr/>
-        </p:nvSpPr>
-        <p:spPr>
-          <a:xfrm>
-            <a:off x="9692640" y="5074920"/>
-            <a:ext cx="2286000" cy="457200"/>
-          </a:xfrm>
-          <a:prstGeom prst="rect">
-            <a:avLst/>
-          </a:prstGeom>
-          <a:noFill/>
-        </p:spPr>
-        <p:txBody>
-          <a:bodyPr wrap="square">
-            <a:spAutoFit/>
-          </a:bodyPr>
-          <a:lstStyle/>
-          <a:p>
-            <a:pPr algn="l">
-              <a:defRPr sz="1400" b="0">
-                <a:solidFill>
-                  <a:srgbClr val="333333"/>
-                </a:solidFill>
-              </a:defRPr>
-            </a:pPr>
-            <a:r>
-              <a:t>$30+</a:t>
-            </a:r>
-          </a:p>
-        </p:txBody>
-      </p:sp>
-      <p:sp>
-        <p:nvSpPr>
-          <p:cNvPr id="34" name="TextBox 33"/>
-          <p:cNvSpPr txBox="1"/>
-          <p:nvPr/>
-        </p:nvSpPr>
-        <p:spPr>
-          <a:xfrm>
-            <a:off x="274320" y="5669280"/>
-            <a:ext cx="11430000" cy="731520"/>
-          </a:xfrm>
-          <a:prstGeom prst="rect">
-            <a:avLst/>
-          </a:prstGeom>
-          <a:noFill/>
-        </p:spPr>
-        <p:txBody>
-          <a:bodyPr wrap="square">
-            <a:spAutoFit/>
-          </a:bodyPr>
-          <a:lstStyle/>
-          <a:p>
-            <a:pPr algn="l">
-              <a:defRPr sz="1300" b="0">
-                <a:solidFill>
-                  <a:srgbClr val="787878"/>
-                </a:solidFill>
-              </a:defRPr>
-            </a:pPr>
-            <a:r>
-              <a:t>Daily pipeline (summarize + classify + score): ~$40-70/month.  Runs as a nightly scheduled job.</a:t>
-            </a:r>
-            <a:br/>
-            <a:r>
-              <a:t>Bid recommendation (future) is the only premium task — runs only on tenders CGI decides to pursue.</a:t>
+              <a:t>Runs as a separate nightly job alongside tender alerts  |  Same infrastructure, different filter  |  ~$9/month AI cost</a:t>
             </a:r>
           </a:p>
         </p:txBody>
@@ -55120,51 +56723,32 @@
             <p:ph type="title"/>
           </p:nvPr>
         </p:nvSpPr>
-        <p:spPr/>
+        <p:spPr>
+          <a:xfrm>
+            <a:off x="320040" y="384048"/>
+            <a:ext cx="10607040" cy="502920"/>
+          </a:xfrm>
+        </p:spPr>
         <p:txBody>
           <a:bodyPr/>
           <a:lstStyle/>
           <a:p>
             <a:r>
-              <a:t>Automated Pipeline Run</a:t>
-            </a:r>
-          </a:p>
-        </p:txBody>
-      </p:sp>
-      <p:pic>
-        <p:nvPicPr>
-          <p:cNvPr id="3" name="Picture 2" descr="screenshot_console_output.png"/>
-          <p:cNvPicPr>
-            <a:picLocks noChangeAspect="1"/>
-          </p:cNvPicPr>
-          <p:nvPr/>
-        </p:nvPicPr>
-        <p:blipFill>
-          <a:blip r:embed="rId2"/>
-          <a:stretch>
-            <a:fillRect/>
-          </a:stretch>
-        </p:blipFill>
-        <p:spPr>
-          <a:xfrm>
-            <a:off x="274320" y="1005840"/>
-            <a:ext cx="7315200" cy="6608064"/>
-          </a:xfrm>
-          <a:prstGeom prst="rect">
-            <a:avLst/>
-          </a:prstGeom>
-        </p:spPr>
-      </p:pic>
-      <p:sp>
-        <p:nvSpPr>
-          <p:cNvPr id="4" name="TextBox 3"/>
+              <a:t>Detail Page Enrichment</a:t>
+            </a:r>
+          </a:p>
+        </p:txBody>
+      </p:sp>
+      <p:sp>
+        <p:nvSpPr>
+          <p:cNvPr id="3" name="TextBox 2"/>
           <p:cNvSpPr txBox="1"/>
           <p:nvPr/>
         </p:nvSpPr>
         <p:spPr>
           <a:xfrm>
-            <a:off x="7863840" y="1005840"/>
-            <a:ext cx="4114800" cy="365760"/>
+            <a:off x="274320" y="1005840"/>
+            <a:ext cx="10972800" cy="365760"/>
           </a:xfrm>
           <a:prstGeom prst="rect">
             <a:avLst/>
@@ -55178,28 +56762,28 @@
           <a:lstStyle/>
           <a:p>
             <a:pPr algn="l">
-              <a:defRPr sz="1600" b="1">
-                <a:solidFill>
-                  <a:srgbClr val="0079C1"/>
+              <a:defRPr sz="1500" b="0">
+                <a:solidFill>
+                  <a:srgbClr val="333333"/>
                 </a:solidFill>
               </a:defRPr>
             </a:pPr>
             <a:r>
-              <a:t>What happens in one run:</a:t>
-            </a:r>
-          </a:p>
-        </p:txBody>
-      </p:sp>
-      <p:sp>
-        <p:nvSpPr>
-          <p:cNvPr id="5" name="TextBox 4"/>
+              <a:t>Logged-in scraping unlocks structured tender data across 6 content tabs for richer AI analysis.</a:t>
+            </a:r>
+          </a:p>
+        </p:txBody>
+      </p:sp>
+      <p:sp>
+        <p:nvSpPr>
+          <p:cNvPr id="4" name="TextBox 3"/>
           <p:cNvSpPr txBox="1"/>
           <p:nvPr/>
         </p:nvSpPr>
         <p:spPr>
           <a:xfrm>
-            <a:off x="7863840" y="1463040"/>
-            <a:ext cx="4114800" cy="4572000"/>
+            <a:off x="274320" y="1554480"/>
+            <a:ext cx="5486400" cy="274320"/>
           </a:xfrm>
           <a:prstGeom prst="rect">
             <a:avLst/>
@@ -55213,68 +56797,949 @@
           <a:lstStyle/>
           <a:p>
             <a:pPr algn="l">
-              <a:defRPr sz="1300" b="0">
+              <a:defRPr sz="1400" b="1">
+                <a:solidFill>
+                  <a:srgbClr val="787878"/>
+                </a:solidFill>
+              </a:defRPr>
+            </a:pPr>
+            <a:r>
+              <a:t>Listing Page (public, fast)</a:t>
+            </a:r>
+          </a:p>
+        </p:txBody>
+      </p:sp>
+      <p:sp>
+        <p:nvSpPr>
+          <p:cNvPr id="5" name="Rounded Rectangle 4"/>
+          <p:cNvSpPr/>
+          <p:nvPr/>
+        </p:nvSpPr>
+        <p:spPr>
+          <a:xfrm>
+            <a:off x="274320" y="1920240"/>
+            <a:ext cx="5486400" cy="1097280"/>
+          </a:xfrm>
+          <a:prstGeom prst="roundRect">
+            <a:avLst/>
+          </a:prstGeom>
+          <a:solidFill>
+            <a:srgbClr val="F0F0F0"/>
+          </a:solidFill>
+          <a:ln>
+            <a:noFill/>
+          </a:ln>
+        </p:spPr>
+        <p:style>
+          <a:lnRef idx="1">
+            <a:schemeClr val="accent1"/>
+          </a:lnRef>
+          <a:fillRef idx="3">
+            <a:schemeClr val="accent1"/>
+          </a:fillRef>
+          <a:effectRef idx="2">
+            <a:schemeClr val="accent1"/>
+          </a:effectRef>
+          <a:fontRef idx="minor">
+            <a:schemeClr val="lt1"/>
+          </a:fontRef>
+        </p:style>
+        <p:txBody>
+          <a:bodyPr rtlCol="0" anchor="ctr" wrap="square"/>
+          <a:lstStyle/>
+          <a:p>
+            <a:pPr algn="ctr">
+              <a:defRPr sz="1200" b="0">
+                <a:solidFill>
+                  <a:srgbClr val="787878"/>
+                </a:solidFill>
+              </a:defRPr>
+            </a:pPr>
+            <a:r>
+              <a:t>• Tender name, ID, organisation</a:t>
+            </a:r>
+            <a:br/>
+            <a:r>
+              <a:t>• Type and category</a:t>
+            </a:r>
+            <a:br/>
+            <a:r>
+              <a:t>• Short description</a:t>
+            </a:r>
+            <a:br/>
+            <a:r>
+              <a:t>• Publication date and deadline</a:t>
+            </a:r>
+            <a:br/>
+            <a:r>
+              <a:t>→ Enough for routing and basic summaries</a:t>
+            </a:r>
+          </a:p>
+        </p:txBody>
+      </p:sp>
+      <p:sp>
+        <p:nvSpPr>
+          <p:cNvPr id="6" name="TextBox 5"/>
+          <p:cNvSpPr txBox="1"/>
+          <p:nvPr/>
+        </p:nvSpPr>
+        <p:spPr>
+          <a:xfrm>
+            <a:off x="6126480" y="1554480"/>
+            <a:ext cx="5486400" cy="274320"/>
+          </a:xfrm>
+          <a:prstGeom prst="rect">
+            <a:avLst/>
+          </a:prstGeom>
+          <a:noFill/>
+        </p:spPr>
+        <p:txBody>
+          <a:bodyPr wrap="square">
+            <a:spAutoFit/>
+          </a:bodyPr>
+          <a:lstStyle/>
+          <a:p>
+            <a:pPr algn="l">
+              <a:defRPr sz="1400" b="1">
+                <a:solidFill>
+                  <a:srgbClr val="2EA44F"/>
+                </a:solidFill>
+              </a:defRPr>
+            </a:pPr>
+            <a:r>
+              <a:t>Detail Page Tabs (login required)</a:t>
+            </a:r>
+          </a:p>
+        </p:txBody>
+      </p:sp>
+      <p:sp>
+        <p:nvSpPr>
+          <p:cNvPr id="7" name="Rounded Rectangle 6"/>
+          <p:cNvSpPr/>
+          <p:nvPr/>
+        </p:nvSpPr>
+        <p:spPr>
+          <a:xfrm>
+            <a:off x="6126480" y="1920240"/>
+            <a:ext cx="5852160" cy="1097280"/>
+          </a:xfrm>
+          <a:prstGeom prst="roundRect">
+            <a:avLst/>
+          </a:prstGeom>
+          <a:solidFill>
+            <a:srgbClr val="D4EFDF"/>
+          </a:solidFill>
+          <a:ln>
+            <a:noFill/>
+          </a:ln>
+        </p:spPr>
+        <p:style>
+          <a:lnRef idx="1">
+            <a:schemeClr val="accent1"/>
+          </a:lnRef>
+          <a:fillRef idx="3">
+            <a:schemeClr val="accent1"/>
+          </a:fillRef>
+          <a:effectRef idx="2">
+            <a:schemeClr val="accent1"/>
+          </a:effectRef>
+          <a:fontRef idx="minor">
+            <a:schemeClr val="lt1"/>
+          </a:fontRef>
+        </p:style>
+        <p:txBody>
+          <a:bodyPr rtlCol="0" anchor="ctr" wrap="square"/>
+          <a:lstStyle/>
+          <a:p>
+            <a:pPr algn="ctr">
+              <a:defRPr sz="1200" b="0">
                 <a:solidFill>
                   <a:srgbClr val="333333"/>
                 </a:solidFill>
               </a:defRPr>
             </a:pPr>
             <a:r>
-              <a:t>1. Browser launches and logs in</a:t>
+              <a:t>• Summary — full description, dates, org details</a:t>
             </a:r>
             <a:br/>
             <a:r>
-              <a:t>   automatically to tarjouspalvelu.fi</a:t>
+              <a:t>• Q&amp;A thread — buyer answers, competitor signals</a:t>
+            </a:r>
+            <a:br/>
+            <a:r>
+              <a:t>• Terms &amp; conditions — qualification requirements</a:t>
+            </a:r>
+            <a:br/>
+            <a:r>
+              <a:t>• Procurement object — scope, volumes, structure</a:t>
+            </a:r>
+            <a:br/>
+            <a:r>
+              <a:t>• Persons in charge — buyer contacts</a:t>
+            </a:r>
+            <a:br/>
+            <a:r>
+              <a:t>→ Richer summaries, competitor signals, initial bid assessment</a:t>
+            </a:r>
+          </a:p>
+        </p:txBody>
+      </p:sp>
+      <p:sp>
+        <p:nvSpPr>
+          <p:cNvPr id="8" name="TextBox 7"/>
+          <p:cNvSpPr txBox="1"/>
+          <p:nvPr/>
+        </p:nvSpPr>
+        <p:spPr>
+          <a:xfrm>
+            <a:off x="274320" y="3291840"/>
+            <a:ext cx="10972800" cy="274320"/>
+          </a:xfrm>
+          <a:prstGeom prst="rect">
+            <a:avLst/>
+          </a:prstGeom>
+          <a:noFill/>
+        </p:spPr>
+        <p:txBody>
+          <a:bodyPr wrap="square">
+            <a:spAutoFit/>
+          </a:bodyPr>
+          <a:lstStyle/>
+          <a:p>
+            <a:pPr algn="l">
+              <a:defRPr sz="1400" b="1">
+                <a:solidFill>
+                  <a:srgbClr val="0079C1"/>
+                </a:solidFill>
+              </a:defRPr>
+            </a:pPr>
+            <a:r>
+              <a:t>How detail scraping works (session-preserving navigation):</a:t>
+            </a:r>
+          </a:p>
+        </p:txBody>
+      </p:sp>
+      <p:sp>
+        <p:nvSpPr>
+          <p:cNvPr id="9" name="Rounded Rectangle 8"/>
+          <p:cNvSpPr/>
+          <p:nvPr/>
+        </p:nvSpPr>
+        <p:spPr>
+          <a:xfrm>
+            <a:off x="274320" y="3657600"/>
+            <a:ext cx="2194560" cy="640080"/>
+          </a:xfrm>
+          <a:prstGeom prst="roundRect">
+            <a:avLst/>
+          </a:prstGeom>
+          <a:solidFill>
+            <a:srgbClr val="DCEBFA"/>
+          </a:solidFill>
+          <a:ln>
+            <a:noFill/>
+          </a:ln>
+        </p:spPr>
+        <p:style>
+          <a:lnRef idx="1">
+            <a:schemeClr val="accent1"/>
+          </a:lnRef>
+          <a:fillRef idx="3">
+            <a:schemeClr val="accent1"/>
+          </a:fillRef>
+          <a:effectRef idx="2">
+            <a:schemeClr val="accent1"/>
+          </a:effectRef>
+          <a:fontRef idx="minor">
+            <a:schemeClr val="lt1"/>
+          </a:fontRef>
+        </p:style>
+        <p:txBody>
+          <a:bodyPr rtlCol="0" anchor="ctr" wrap="square"/>
+          <a:lstStyle/>
+          <a:p>
+            <a:pPr algn="ctr">
+              <a:defRPr sz="1100" b="1">
+                <a:solidFill>
+                  <a:srgbClr val="333333"/>
+                </a:solidFill>
+              </a:defRPr>
+            </a:pPr>
+            <a:r>
+              <a:t>On listings page</a:t>
+            </a:r>
+            <a:br/>
+            <a:r>
+              <a:t>find tender row</a:t>
+            </a:r>
+          </a:p>
+        </p:txBody>
+      </p:sp>
+      <p:sp>
+        <p:nvSpPr>
+          <p:cNvPr id="10" name="Right Arrow 9"/>
+          <p:cNvSpPr/>
+          <p:nvPr/>
+        </p:nvSpPr>
+        <p:spPr>
+          <a:xfrm>
+            <a:off x="2560320" y="3794760"/>
+            <a:ext cx="274320" cy="274320"/>
+          </a:xfrm>
+          <a:prstGeom prst="rightArrow">
+            <a:avLst/>
+          </a:prstGeom>
+          <a:solidFill>
+            <a:srgbClr val="0079C1"/>
+          </a:solidFill>
+          <a:ln>
+            <a:noFill/>
+          </a:ln>
+        </p:spPr>
+        <p:style>
+          <a:lnRef idx="1">
+            <a:schemeClr val="accent1"/>
+          </a:lnRef>
+          <a:fillRef idx="3">
+            <a:schemeClr val="accent1"/>
+          </a:fillRef>
+          <a:effectRef idx="2">
+            <a:schemeClr val="accent1"/>
+          </a:effectRef>
+          <a:fontRef idx="minor">
+            <a:schemeClr val="lt1"/>
+          </a:fontRef>
+        </p:style>
+        <p:txBody>
+          <a:bodyPr rtlCol="0" anchor="ctr"/>
+          <a:lstStyle/>
+          <a:p>
+            <a:pPr algn="ctr"/>
+          </a:p>
+        </p:txBody>
+      </p:sp>
+      <p:sp>
+        <p:nvSpPr>
+          <p:cNvPr id="11" name="Rounded Rectangle 10"/>
+          <p:cNvSpPr/>
+          <p:nvPr/>
+        </p:nvSpPr>
+        <p:spPr>
+          <a:xfrm>
+            <a:off x="2926080" y="3657600"/>
+            <a:ext cx="2194560" cy="640080"/>
+          </a:xfrm>
+          <a:prstGeom prst="roundRect">
+            <a:avLst/>
+          </a:prstGeom>
+          <a:solidFill>
+            <a:srgbClr val="DCEBFA"/>
+          </a:solidFill>
+          <a:ln>
+            <a:noFill/>
+          </a:ln>
+        </p:spPr>
+        <p:style>
+          <a:lnRef idx="1">
+            <a:schemeClr val="accent1"/>
+          </a:lnRef>
+          <a:fillRef idx="3">
+            <a:schemeClr val="accent1"/>
+          </a:fillRef>
+          <a:effectRef idx="2">
+            <a:schemeClr val="accent1"/>
+          </a:effectRef>
+          <a:fontRef idx="minor">
+            <a:schemeClr val="lt1"/>
+          </a:fontRef>
+        </p:style>
+        <p:txBody>
+          <a:bodyPr rtlCol="0" anchor="ctr" wrap="square"/>
+          <a:lstStyle/>
+          <a:p>
+            <a:pPr algn="ctr">
+              <a:defRPr sz="1000" b="1">
+                <a:solidFill>
+                  <a:srgbClr val="333333"/>
+                </a:solidFill>
+              </a:defRPr>
+            </a:pPr>
+            <a:r>
+              <a:t>Click link</a:t>
+            </a:r>
+            <a:br/>
+            <a:r>
+              <a:t>(ActionChains —</a:t>
+            </a:r>
+            <a:br/>
+            <a:r>
+              <a:t>preserves session)</a:t>
+            </a:r>
+          </a:p>
+        </p:txBody>
+      </p:sp>
+      <p:sp>
+        <p:nvSpPr>
+          <p:cNvPr id="12" name="Right Arrow 11"/>
+          <p:cNvSpPr/>
+          <p:nvPr/>
+        </p:nvSpPr>
+        <p:spPr>
+          <a:xfrm>
+            <a:off x="5212080" y="3794760"/>
+            <a:ext cx="274320" cy="274320"/>
+          </a:xfrm>
+          <a:prstGeom prst="rightArrow">
+            <a:avLst/>
+          </a:prstGeom>
+          <a:solidFill>
+            <a:srgbClr val="0079C1"/>
+          </a:solidFill>
+          <a:ln>
+            <a:noFill/>
+          </a:ln>
+        </p:spPr>
+        <p:style>
+          <a:lnRef idx="1">
+            <a:schemeClr val="accent1"/>
+          </a:lnRef>
+          <a:fillRef idx="3">
+            <a:schemeClr val="accent1"/>
+          </a:fillRef>
+          <a:effectRef idx="2">
+            <a:schemeClr val="accent1"/>
+          </a:effectRef>
+          <a:fontRef idx="minor">
+            <a:schemeClr val="lt1"/>
+          </a:fontRef>
+        </p:style>
+        <p:txBody>
+          <a:bodyPr rtlCol="0" anchor="ctr"/>
+          <a:lstStyle/>
+          <a:p>
+            <a:pPr algn="ctr"/>
+          </a:p>
+        </p:txBody>
+      </p:sp>
+      <p:sp>
+        <p:nvSpPr>
+          <p:cNvPr id="13" name="Rounded Rectangle 12"/>
+          <p:cNvSpPr/>
+          <p:nvPr/>
+        </p:nvSpPr>
+        <p:spPr>
+          <a:xfrm>
+            <a:off x="5577840" y="3657600"/>
+            <a:ext cx="2194560" cy="640080"/>
+          </a:xfrm>
+          <a:prstGeom prst="roundRect">
+            <a:avLst/>
+          </a:prstGeom>
+          <a:solidFill>
+            <a:srgbClr val="D4EFDF"/>
+          </a:solidFill>
+          <a:ln>
+            <a:noFill/>
+          </a:ln>
+        </p:spPr>
+        <p:style>
+          <a:lnRef idx="1">
+            <a:schemeClr val="accent1"/>
+          </a:lnRef>
+          <a:fillRef idx="3">
+            <a:schemeClr val="accent1"/>
+          </a:fillRef>
+          <a:effectRef idx="2">
+            <a:schemeClr val="accent1"/>
+          </a:effectRef>
+          <a:fontRef idx="minor">
+            <a:schemeClr val="lt1"/>
+          </a:fontRef>
+        </p:style>
+        <p:txBody>
+          <a:bodyPr rtlCol="0" anchor="ctr" wrap="square"/>
+          <a:lstStyle/>
+          <a:p>
+            <a:pPr algn="ctr">
+              <a:defRPr sz="1000" b="1">
+                <a:solidFill>
+                  <a:srgbClr val="333333"/>
+                </a:solidFill>
+              </a:defRPr>
+            </a:pPr>
+            <a:r>
+              <a:t>Full detail page</a:t>
+            </a:r>
+            <a:br/>
+            <a:r>
+              <a:t>all tabs accessible</a:t>
+            </a:r>
+            <a:br/>
+            <a:r>
+              <a:t>(logged-in view)</a:t>
+            </a:r>
+          </a:p>
+        </p:txBody>
+      </p:sp>
+      <p:sp>
+        <p:nvSpPr>
+          <p:cNvPr id="14" name="Right Arrow 13"/>
+          <p:cNvSpPr/>
+          <p:nvPr/>
+        </p:nvSpPr>
+        <p:spPr>
+          <a:xfrm>
+            <a:off x="7863840" y="3794760"/>
+            <a:ext cx="274320" cy="274320"/>
+          </a:xfrm>
+          <a:prstGeom prst="rightArrow">
+            <a:avLst/>
+          </a:prstGeom>
+          <a:solidFill>
+            <a:srgbClr val="0079C1"/>
+          </a:solidFill>
+          <a:ln>
+            <a:noFill/>
+          </a:ln>
+        </p:spPr>
+        <p:style>
+          <a:lnRef idx="1">
+            <a:schemeClr val="accent1"/>
+          </a:lnRef>
+          <a:fillRef idx="3">
+            <a:schemeClr val="accent1"/>
+          </a:fillRef>
+          <a:effectRef idx="2">
+            <a:schemeClr val="accent1"/>
+          </a:effectRef>
+          <a:fontRef idx="minor">
+            <a:schemeClr val="lt1"/>
+          </a:fontRef>
+        </p:style>
+        <p:txBody>
+          <a:bodyPr rtlCol="0" anchor="ctr"/>
+          <a:lstStyle/>
+          <a:p>
+            <a:pPr algn="ctr"/>
+          </a:p>
+        </p:txBody>
+      </p:sp>
+      <p:sp>
+        <p:nvSpPr>
+          <p:cNvPr id="15" name="Rounded Rectangle 14"/>
+          <p:cNvSpPr/>
+          <p:nvPr/>
+        </p:nvSpPr>
+        <p:spPr>
+          <a:xfrm>
+            <a:off x="8229600" y="3657600"/>
+            <a:ext cx="1828800" cy="640080"/>
+          </a:xfrm>
+          <a:prstGeom prst="roundRect">
+            <a:avLst/>
+          </a:prstGeom>
+          <a:solidFill>
+            <a:srgbClr val="DCEBFA"/>
+          </a:solidFill>
+          <a:ln>
+            <a:noFill/>
+          </a:ln>
+        </p:spPr>
+        <p:style>
+          <a:lnRef idx="1">
+            <a:schemeClr val="accent1"/>
+          </a:lnRef>
+          <a:fillRef idx="3">
+            <a:schemeClr val="accent1"/>
+          </a:fillRef>
+          <a:effectRef idx="2">
+            <a:schemeClr val="accent1"/>
+          </a:effectRef>
+          <a:fontRef idx="minor">
+            <a:schemeClr val="lt1"/>
+          </a:fontRef>
+        </p:style>
+        <p:txBody>
+          <a:bodyPr rtlCol="0" anchor="ctr" wrap="square"/>
+          <a:lstStyle/>
+          <a:p>
+            <a:pPr algn="ctr">
+              <a:defRPr sz="1100" b="1">
+                <a:solidFill>
+                  <a:srgbClr val="333333"/>
+                </a:solidFill>
+              </a:defRPr>
+            </a:pPr>
+            <a:r>
+              <a:t>Extract text</a:t>
+            </a:r>
+            <a:br/>
+            <a:r>
+              <a:t>+ tab data</a:t>
+            </a:r>
+          </a:p>
+        </p:txBody>
+      </p:sp>
+      <p:sp>
+        <p:nvSpPr>
+          <p:cNvPr id="16" name="Right Arrow 15"/>
+          <p:cNvSpPr/>
+          <p:nvPr/>
+        </p:nvSpPr>
+        <p:spPr>
+          <a:xfrm>
+            <a:off x="10149840" y="3794760"/>
+            <a:ext cx="274320" cy="274320"/>
+          </a:xfrm>
+          <a:prstGeom prst="rightArrow">
+            <a:avLst/>
+          </a:prstGeom>
+          <a:solidFill>
+            <a:srgbClr val="0079C1"/>
+          </a:solidFill>
+          <a:ln>
+            <a:noFill/>
+          </a:ln>
+        </p:spPr>
+        <p:style>
+          <a:lnRef idx="1">
+            <a:schemeClr val="accent1"/>
+          </a:lnRef>
+          <a:fillRef idx="3">
+            <a:schemeClr val="accent1"/>
+          </a:fillRef>
+          <a:effectRef idx="2">
+            <a:schemeClr val="accent1"/>
+          </a:effectRef>
+          <a:fontRef idx="minor">
+            <a:schemeClr val="lt1"/>
+          </a:fontRef>
+        </p:style>
+        <p:txBody>
+          <a:bodyPr rtlCol="0" anchor="ctr"/>
+          <a:lstStyle/>
+          <a:p>
+            <a:pPr algn="ctr"/>
+          </a:p>
+        </p:txBody>
+      </p:sp>
+      <p:sp>
+        <p:nvSpPr>
+          <p:cNvPr id="17" name="Rounded Rectangle 16"/>
+          <p:cNvSpPr/>
+          <p:nvPr/>
+        </p:nvSpPr>
+        <p:spPr>
+          <a:xfrm>
+            <a:off x="10515600" y="3657600"/>
+            <a:ext cx="1463040" cy="640080"/>
+          </a:xfrm>
+          <a:prstGeom prst="roundRect">
+            <a:avLst/>
+          </a:prstGeom>
+          <a:solidFill>
+            <a:srgbClr val="DCEBFA"/>
+          </a:solidFill>
+          <a:ln>
+            <a:noFill/>
+          </a:ln>
+        </p:spPr>
+        <p:style>
+          <a:lnRef idx="1">
+            <a:schemeClr val="accent1"/>
+          </a:lnRef>
+          <a:fillRef idx="3">
+            <a:schemeClr val="accent1"/>
+          </a:fillRef>
+          <a:effectRef idx="2">
+            <a:schemeClr val="accent1"/>
+          </a:effectRef>
+          <a:fontRef idx="minor">
+            <a:schemeClr val="lt1"/>
+          </a:fontRef>
+        </p:style>
+        <p:txBody>
+          <a:bodyPr rtlCol="0" anchor="ctr" wrap="square"/>
+          <a:lstStyle/>
+          <a:p>
+            <a:pPr algn="ctr">
+              <a:defRPr sz="1100" b="1">
+                <a:solidFill>
+                  <a:srgbClr val="333333"/>
+                </a:solidFill>
+              </a:defRPr>
+            </a:pPr>
+            <a:r>
+              <a:t>Back to</a:t>
+            </a:r>
+            <a:br/>
+            <a:r>
+              <a:t>listings</a:t>
+            </a:r>
+          </a:p>
+        </p:txBody>
+      </p:sp>
+      <p:sp>
+        <p:nvSpPr>
+          <p:cNvPr id="18" name="TextBox 17"/>
+          <p:cNvSpPr txBox="1"/>
+          <p:nvPr/>
+        </p:nvSpPr>
+        <p:spPr>
+          <a:xfrm>
+            <a:off x="274320" y="4572000"/>
+            <a:ext cx="10972800" cy="274320"/>
+          </a:xfrm>
+          <a:prstGeom prst="rect">
+            <a:avLst/>
+          </a:prstGeom>
+          <a:noFill/>
+        </p:spPr>
+        <p:txBody>
+          <a:bodyPr wrap="square">
+            <a:spAutoFit/>
+          </a:bodyPr>
+          <a:lstStyle/>
+          <a:p>
+            <a:pPr algn="l">
+              <a:defRPr sz="1400" b="1">
+                <a:solidFill>
+                  <a:srgbClr val="333333"/>
+                </a:solidFill>
+              </a:defRPr>
+            </a:pPr>
+            <a:r>
+              <a:t>What richer data enables:</a:t>
+            </a:r>
+          </a:p>
+        </p:txBody>
+      </p:sp>
+      <p:sp>
+        <p:nvSpPr>
+          <p:cNvPr id="19" name="Rounded Rectangle 18"/>
+          <p:cNvSpPr/>
+          <p:nvPr/>
+        </p:nvSpPr>
+        <p:spPr>
+          <a:xfrm>
+            <a:off x="274320" y="4937760"/>
+            <a:ext cx="3657600" cy="914400"/>
+          </a:xfrm>
+          <a:prstGeom prst="roundRect">
+            <a:avLst/>
+          </a:prstGeom>
+          <a:solidFill>
+            <a:srgbClr val="FCF3CF"/>
+          </a:solidFill>
+          <a:ln>
+            <a:noFill/>
+          </a:ln>
+        </p:spPr>
+        <p:style>
+          <a:lnRef idx="1">
+            <a:schemeClr val="accent1"/>
+          </a:lnRef>
+          <a:fillRef idx="3">
+            <a:schemeClr val="accent1"/>
+          </a:fillRef>
+          <a:effectRef idx="2">
+            <a:schemeClr val="accent1"/>
+          </a:effectRef>
+          <a:fontRef idx="minor">
+            <a:schemeClr val="lt1"/>
+          </a:fontRef>
+        </p:style>
+        <p:txBody>
+          <a:bodyPr rtlCol="0" anchor="ctr" wrap="square"/>
+          <a:lstStyle/>
+          <a:p>
+            <a:pPr algn="ctr">
+              <a:defRPr sz="1100" b="1">
+                <a:solidFill>
+                  <a:srgbClr val="333333"/>
+                </a:solidFill>
+              </a:defRPr>
+            </a:pPr>
+            <a:r>
+              <a:t>Better AI Summaries</a:t>
             </a:r>
             <a:br/>
             <a:br/>
             <a:r>
-              <a:t>2. Scrapes all open tenders</a:t>
+              <a:t>Full tab content instead of</a:t>
             </a:r>
             <a:br/>
             <a:r>
-              <a:t>   across Finland (100+ per run)</a:t>
+              <a:t>short descriptions → more</a:t>
+            </a:r>
+            <a:br/>
+            <a:r>
+              <a:t>accurate relevance scoring</a:t>
+            </a:r>
+          </a:p>
+        </p:txBody>
+      </p:sp>
+      <p:sp>
+        <p:nvSpPr>
+          <p:cNvPr id="20" name="Rounded Rectangle 19"/>
+          <p:cNvSpPr/>
+          <p:nvPr/>
+        </p:nvSpPr>
+        <p:spPr>
+          <a:xfrm>
+            <a:off x="4114800" y="4937760"/>
+            <a:ext cx="3657600" cy="914400"/>
+          </a:xfrm>
+          <a:prstGeom prst="roundRect">
+            <a:avLst/>
+          </a:prstGeom>
+          <a:solidFill>
+            <a:srgbClr val="FCF3CF"/>
+          </a:solidFill>
+          <a:ln>
+            <a:noFill/>
+          </a:ln>
+        </p:spPr>
+        <p:style>
+          <a:lnRef idx="1">
+            <a:schemeClr val="accent1"/>
+          </a:lnRef>
+          <a:fillRef idx="3">
+            <a:schemeClr val="accent1"/>
+          </a:fillRef>
+          <a:effectRef idx="2">
+            <a:schemeClr val="accent1"/>
+          </a:effectRef>
+          <a:fontRef idx="minor">
+            <a:schemeClr val="lt1"/>
+          </a:fontRef>
+        </p:style>
+        <p:txBody>
+          <a:bodyPr rtlCol="0" anchor="ctr" wrap="square"/>
+          <a:lstStyle/>
+          <a:p>
+            <a:pPr algn="ctr">
+              <a:defRPr sz="1100" b="1">
+                <a:solidFill>
+                  <a:srgbClr val="333333"/>
+                </a:solidFill>
+              </a:defRPr>
+            </a:pPr>
+            <a:r>
+              <a:t>Initial Bid Assessment</a:t>
             </a:r>
             <a:br/>
             <a:br/>
             <a:r>
-              <a:t>3. Classifies each tender:</a:t>
+              <a:t>Terms &amp; procurement object</a:t>
             </a:r>
             <a:br/>
             <a:r>
-              <a:t>   open / signal / closed</a:t>
+              <a:t>reveal qualification reqs →</a:t>
+            </a:r>
+            <a:br/>
+            <a:r>
+              <a:t>AI flags fit or misfit</a:t>
+            </a:r>
+          </a:p>
+        </p:txBody>
+      </p:sp>
+      <p:sp>
+        <p:nvSpPr>
+          <p:cNvPr id="21" name="Rounded Rectangle 20"/>
+          <p:cNvSpPr/>
+          <p:nvPr/>
+        </p:nvSpPr>
+        <p:spPr>
+          <a:xfrm>
+            <a:off x="7955279" y="4937760"/>
+            <a:ext cx="4023360" cy="914400"/>
+          </a:xfrm>
+          <a:prstGeom prst="roundRect">
+            <a:avLst/>
+          </a:prstGeom>
+          <a:solidFill>
+            <a:srgbClr val="FCF3CF"/>
+          </a:solidFill>
+          <a:ln>
+            <a:noFill/>
+          </a:ln>
+        </p:spPr>
+        <p:style>
+          <a:lnRef idx="1">
+            <a:schemeClr val="accent1"/>
+          </a:lnRef>
+          <a:fillRef idx="3">
+            <a:schemeClr val="accent1"/>
+          </a:fillRef>
+          <a:effectRef idx="2">
+            <a:schemeClr val="accent1"/>
+          </a:effectRef>
+          <a:fontRef idx="minor">
+            <a:schemeClr val="lt1"/>
+          </a:fontRef>
+        </p:style>
+        <p:txBody>
+          <a:bodyPr rtlCol="0" anchor="ctr" wrap="square"/>
+          <a:lstStyle/>
+          <a:p>
+            <a:pPr algn="ctr">
+              <a:defRPr sz="1100" b="1">
+                <a:solidFill>
+                  <a:srgbClr val="333333"/>
+                </a:solidFill>
+              </a:defRPr>
+            </a:pPr>
+            <a:r>
+              <a:t>Competitive Intelligence</a:t>
             </a:r>
             <a:br/>
             <a:br/>
             <a:r>
-              <a:t>4. AI summarizes in English</a:t>
+              <a:t>Q&amp;A threads reveal what</a:t>
             </a:r>
             <a:br/>
+            <a:r>
+              <a:t>competitors are asking about</a:t>
+            </a:r>
             <a:br/>
             <a:r>
-              <a:t>5. Three-tier routing:</a:t>
-            </a:r>
-            <a:br/>
-            <a:r>
-              <a:t>   product alerts, department</a:t>
-            </a:r>
-            <a:br/>
-            <a:r>
-              <a:t>   match, or dashboard only</a:t>
-            </a:r>
-            <a:br/>
-            <a:br/>
-            <a:r>
-              <a:t>6. Sends emails per department</a:t>
-            </a:r>
-            <a:br/>
-            <a:br/>
-            <a:r>
-              <a:t>Runs nightly as scheduled job.</a:t>
-            </a:r>
-            <a:br/>
-            <a:r>
-              <a:t>Total time: ~2 minutes.</a:t>
+              <a:t>→ signals about who's bidding</a:t>
+            </a:r>
+          </a:p>
+        </p:txBody>
+      </p:sp>
+      <p:sp>
+        <p:nvSpPr>
+          <p:cNvPr id="22" name="TextBox 21"/>
+          <p:cNvSpPr txBox="1"/>
+          <p:nvPr/>
+        </p:nvSpPr>
+        <p:spPr>
+          <a:xfrm>
+            <a:off x="274320" y="6035040"/>
+            <a:ext cx="11430000" cy="274320"/>
+          </a:xfrm>
+          <a:prstGeom prst="rect">
+            <a:avLst/>
+          </a:prstGeom>
+          <a:noFill/>
+        </p:spPr>
+        <p:txBody>
+          <a:bodyPr wrap="square">
+            <a:spAutoFit/>
+          </a:bodyPr>
+          <a:lstStyle/>
+          <a:p>
+            <a:pPr algn="ctr">
+              <a:defRPr sz="1100" b="0">
+                <a:solidFill>
+                  <a:srgbClr val="787878"/>
+                </a:solidFill>
+              </a:defRPr>
+            </a:pPr>
+            <a:r>
+              <a:t>Note: attached files (PDFs, Excel) are not downloaded — full bid intelligence requires file processing (Level 3)</a:t>
             </a:r>
           </a:p>
         </p:txBody>
@@ -55307,408 +57772,751 @@
             <p:ph type="title"/>
           </p:nvPr>
         </p:nvSpPr>
-        <p:spPr/>
+        <p:spPr>
+          <a:xfrm>
+            <a:off x="320040" y="384048"/>
+            <a:ext cx="10607040" cy="502920"/>
+          </a:xfrm>
+        </p:spPr>
         <p:txBody>
           <a:bodyPr/>
           <a:lstStyle/>
           <a:p>
             <a:r>
-              <a:t>To Get Started</a:t>
-            </a:r>
-          </a:p>
-        </p:txBody>
-      </p:sp>
-      <p:sp>
-        <p:nvSpPr>
-          <p:cNvPr id="3" name="Content Placeholder 2"/>
-          <p:cNvSpPr>
-            <a:spLocks noGrp="1"/>
-          </p:cNvSpPr>
-          <p:nvPr>
-            <p:ph idx="17" sz="quarter"/>
-          </p:nvPr>
-        </p:nvSpPr>
-        <p:spPr/>
-        <p:txBody>
-          <a:bodyPr/>
+              <a:t>Narrowing Down Results</a:t>
+            </a:r>
+          </a:p>
+        </p:txBody>
+      </p:sp>
+      <p:sp>
+        <p:nvSpPr>
+          <p:cNvPr id="3" name="TextBox 2"/>
+          <p:cNvSpPr txBox="1"/>
+          <p:nvPr/>
+        </p:nvSpPr>
+        <p:spPr>
+          <a:xfrm>
+            <a:off x="384048" y="1005840"/>
+            <a:ext cx="10972800" cy="457200"/>
+          </a:xfrm>
+          <a:prstGeom prst="rect">
+            <a:avLst/>
+          </a:prstGeom>
+          <a:noFill/>
+        </p:spPr>
+        <p:txBody>
+          <a:bodyPr wrap="square">
+            <a:spAutoFit/>
+          </a:bodyPr>
           <a:lstStyle/>
           <a:p>
-            <a:pPr>
-              <a:spcAft>
-                <a:spcPts val="500"/>
-              </a:spcAft>
-              <a:defRPr b="1" sz="1500">
+            <a:pPr algn="l">
+              <a:defRPr sz="1600" b="0">
                 <a:solidFill>
                   <a:srgbClr val="333333"/>
                 </a:solidFill>
               </a:defRPr>
             </a:pPr>
-          </a:p>
-          <a:p>
-            <a:pPr>
-              <a:spcAft>
-                <a:spcPts val="500"/>
-              </a:spcAft>
-              <a:defRPr sz="1500">
+            <a:r>
+              <a:t>We filter in layers — cheapest and fastest first, AI only on what survives. Each layer is configurable.</a:t>
+            </a:r>
+          </a:p>
+        </p:txBody>
+      </p:sp>
+      <p:sp>
+        <p:nvSpPr>
+          <p:cNvPr id="4" name="Rounded Rectangle 3"/>
+          <p:cNvSpPr/>
+          <p:nvPr/>
+        </p:nvSpPr>
+        <p:spPr>
+          <a:xfrm>
+            <a:off x="457200" y="1645920"/>
+            <a:ext cx="6400800" cy="685800"/>
+          </a:xfrm>
+          <a:prstGeom prst="roundRect">
+            <a:avLst/>
+          </a:prstGeom>
+          <a:solidFill>
+            <a:srgbClr val="DCEBFA"/>
+          </a:solidFill>
+          <a:ln>
+            <a:noFill/>
+          </a:ln>
+        </p:spPr>
+        <p:style>
+          <a:lnRef idx="1">
+            <a:schemeClr val="accent1"/>
+          </a:lnRef>
+          <a:fillRef idx="3">
+            <a:schemeClr val="accent1"/>
+          </a:fillRef>
+          <a:effectRef idx="2">
+            <a:schemeClr val="accent1"/>
+          </a:effectRef>
+          <a:fontRef idx="minor">
+            <a:schemeClr val="lt1"/>
+          </a:fontRef>
+        </p:style>
+        <p:txBody>
+          <a:bodyPr rtlCol="0" anchor="ctr" wrap="square"/>
+          <a:lstStyle/>
+          <a:p>
+            <a:pPr algn="ctr">
+              <a:defRPr sz="1200" b="0">
                 <a:solidFill>
                   <a:srgbClr val="333333"/>
                 </a:solidFill>
               </a:defRPr>
             </a:pPr>
             <a:r>
-              <a:t>1. Which procurement categories?</a:t>
-            </a:r>
-          </a:p>
-          <a:p>
-            <a:pPr>
-              <a:spcAft>
-                <a:spcPts val="500"/>
-              </a:spcAft>
-              <a:defRPr sz="1500">
+              <a:t>Layer 1: Notice Type (built-in search filter)</a:t>
+            </a:r>
+            <a:br/>
+            <a:r>
+              <a:t>Keep only open competitions, planning notices, DPS. Remove awards, cancellations, direct awards.</a:t>
+            </a:r>
+          </a:p>
+        </p:txBody>
+      </p:sp>
+      <p:sp>
+        <p:nvSpPr>
+          <p:cNvPr id="5" name="TextBox 4"/>
+          <p:cNvSpPr txBox="1"/>
+          <p:nvPr/>
+        </p:nvSpPr>
+        <p:spPr>
+          <a:xfrm>
+            <a:off x="7040880" y="1737360"/>
+            <a:ext cx="2286000" cy="457200"/>
+          </a:xfrm>
+          <a:prstGeom prst="rect">
+            <a:avLst/>
+          </a:prstGeom>
+          <a:noFill/>
+        </p:spPr>
+        <p:txBody>
+          <a:bodyPr wrap="square">
+            <a:spAutoFit/>
+          </a:bodyPr>
+          <a:lstStyle/>
+          <a:p>
+            <a:pPr algn="l">
+              <a:defRPr sz="1600" b="1">
+                <a:solidFill>
+                  <a:srgbClr val="2EA44F"/>
+                </a:solidFill>
+              </a:defRPr>
+            </a:pPr>
+            <a:r>
+              <a:t>5,000 → ~2,000</a:t>
+            </a:r>
+          </a:p>
+        </p:txBody>
+      </p:sp>
+      <p:sp>
+        <p:nvSpPr>
+          <p:cNvPr id="6" name="Rounded Rectangle 5"/>
+          <p:cNvSpPr/>
+          <p:nvPr/>
+        </p:nvSpPr>
+        <p:spPr>
+          <a:xfrm>
+            <a:off x="9418320" y="1783080"/>
+            <a:ext cx="2560320" cy="411480"/>
+          </a:xfrm>
+          <a:prstGeom prst="roundRect">
+            <a:avLst/>
+          </a:prstGeom>
+          <a:solidFill>
+            <a:srgbClr val="D4EFDF"/>
+          </a:solidFill>
+          <a:ln>
+            <a:noFill/>
+          </a:ln>
+        </p:spPr>
+        <p:style>
+          <a:lnRef idx="1">
+            <a:schemeClr val="accent1"/>
+          </a:lnRef>
+          <a:fillRef idx="3">
+            <a:schemeClr val="accent1"/>
+          </a:fillRef>
+          <a:effectRef idx="2">
+            <a:schemeClr val="accent1"/>
+          </a:effectRef>
+          <a:fontRef idx="minor">
+            <a:schemeClr val="lt1"/>
+          </a:fontRef>
+        </p:style>
+        <p:txBody>
+          <a:bodyPr rtlCol="0" anchor="ctr" wrap="square"/>
+          <a:lstStyle/>
+          <a:p>
+            <a:pPr algn="ctr">
+              <a:defRPr sz="1200" b="1">
                 <a:solidFill>
                   <a:srgbClr val="333333"/>
                 </a:solidFill>
               </a:defRPr>
             </a:pPr>
             <a:r>
-              <a:t>   Service, Health, Works, all?</a:t>
-            </a:r>
-          </a:p>
-          <a:p>
-            <a:pPr>
-              <a:spcAft>
-                <a:spcPts val="500"/>
-              </a:spcAft>
-              <a:defRPr sz="1500">
+              <a:t>Automatic</a:t>
+            </a:r>
+          </a:p>
+        </p:txBody>
+      </p:sp>
+      <p:sp>
+        <p:nvSpPr>
+          <p:cNvPr id="7" name="Rounded Rectangle 6"/>
+          <p:cNvSpPr/>
+          <p:nvPr/>
+        </p:nvSpPr>
+        <p:spPr>
+          <a:xfrm>
+            <a:off x="457200" y="2514600"/>
+            <a:ext cx="6400800" cy="685800"/>
+          </a:xfrm>
+          <a:prstGeom prst="roundRect">
+            <a:avLst/>
+          </a:prstGeom>
+          <a:solidFill>
+            <a:srgbClr val="DCEBFA"/>
+          </a:solidFill>
+          <a:ln>
+            <a:noFill/>
+          </a:ln>
+        </p:spPr>
+        <p:style>
+          <a:lnRef idx="1">
+            <a:schemeClr val="accent1"/>
+          </a:lnRef>
+          <a:fillRef idx="3">
+            <a:schemeClr val="accent1"/>
+          </a:fillRef>
+          <a:effectRef idx="2">
+            <a:schemeClr val="accent1"/>
+          </a:effectRef>
+          <a:fontRef idx="minor">
+            <a:schemeClr val="lt1"/>
+          </a:fontRef>
+        </p:style>
+        <p:txBody>
+          <a:bodyPr rtlCol="0" anchor="ctr" wrap="square"/>
+          <a:lstStyle/>
+          <a:p>
+            <a:pPr algn="ctr">
+              <a:defRPr sz="1200" b="0">
                 <a:solidFill>
                   <a:srgbClr val="333333"/>
                 </a:solidFill>
               </a:defRPr>
             </a:pPr>
-          </a:p>
-          <a:p>
-            <a:pPr>
-              <a:spcAft>
-                <a:spcPts val="500"/>
-              </a:spcAft>
-              <a:defRPr sz="1500">
+            <a:r>
+              <a:t>Layer 2: Procurement Category (built-in search filter)</a:t>
+            </a:r>
+            <a:br/>
+            <a:r>
+              <a:t>Keep only categories CGI operates in: Service, Health &amp; Social, IT, etc.</a:t>
+            </a:r>
+          </a:p>
+        </p:txBody>
+      </p:sp>
+      <p:sp>
+        <p:nvSpPr>
+          <p:cNvPr id="8" name="TextBox 7"/>
+          <p:cNvSpPr txBox="1"/>
+          <p:nvPr/>
+        </p:nvSpPr>
+        <p:spPr>
+          <a:xfrm>
+            <a:off x="7040880" y="2606040"/>
+            <a:ext cx="2286000" cy="457200"/>
+          </a:xfrm>
+          <a:prstGeom prst="rect">
+            <a:avLst/>
+          </a:prstGeom>
+          <a:noFill/>
+        </p:spPr>
+        <p:txBody>
+          <a:bodyPr wrap="square">
+            <a:spAutoFit/>
+          </a:bodyPr>
+          <a:lstStyle/>
+          <a:p>
+            <a:pPr algn="l">
+              <a:defRPr sz="1600" b="1">
+                <a:solidFill>
+                  <a:srgbClr val="2EA44F"/>
+                </a:solidFill>
+              </a:defRPr>
+            </a:pPr>
+            <a:r>
+              <a:t>2,000 → ~800</a:t>
+            </a:r>
+          </a:p>
+        </p:txBody>
+      </p:sp>
+      <p:sp>
+        <p:nvSpPr>
+          <p:cNvPr id="9" name="Rounded Rectangle 8"/>
+          <p:cNvSpPr/>
+          <p:nvPr/>
+        </p:nvSpPr>
+        <p:spPr>
+          <a:xfrm>
+            <a:off x="9418320" y="2651760"/>
+            <a:ext cx="2560320" cy="411480"/>
+          </a:xfrm>
+          <a:prstGeom prst="roundRect">
+            <a:avLst/>
+          </a:prstGeom>
+          <a:solidFill>
+            <a:srgbClr val="FFF3E0"/>
+          </a:solidFill>
+          <a:ln>
+            <a:noFill/>
+          </a:ln>
+        </p:spPr>
+        <p:style>
+          <a:lnRef idx="1">
+            <a:schemeClr val="accent1"/>
+          </a:lnRef>
+          <a:fillRef idx="3">
+            <a:schemeClr val="accent1"/>
+          </a:fillRef>
+          <a:effectRef idx="2">
+            <a:schemeClr val="accent1"/>
+          </a:effectRef>
+          <a:fontRef idx="minor">
+            <a:schemeClr val="lt1"/>
+          </a:fontRef>
+        </p:style>
+        <p:txBody>
+          <a:bodyPr rtlCol="0" anchor="ctr" wrap="square"/>
+          <a:lstStyle/>
+          <a:p>
+            <a:pPr algn="ctr">
+              <a:defRPr sz="1200" b="1">
+                <a:solidFill>
+                  <a:srgbClr val="C0392B"/>
+                </a:solidFill>
+              </a:defRPr>
+            </a:pPr>
+            <a:r>
+              <a:t>Need your input</a:t>
+            </a:r>
+          </a:p>
+        </p:txBody>
+      </p:sp>
+      <p:sp>
+        <p:nvSpPr>
+          <p:cNvPr id="10" name="Rounded Rectangle 9"/>
+          <p:cNvSpPr/>
+          <p:nvPr/>
+        </p:nvSpPr>
+        <p:spPr>
+          <a:xfrm>
+            <a:off x="457200" y="3383280"/>
+            <a:ext cx="6400800" cy="685800"/>
+          </a:xfrm>
+          <a:prstGeom prst="roundRect">
+            <a:avLst/>
+          </a:prstGeom>
+          <a:solidFill>
+            <a:srgbClr val="DCEBFA"/>
+          </a:solidFill>
+          <a:ln>
+            <a:noFill/>
+          </a:ln>
+        </p:spPr>
+        <p:style>
+          <a:lnRef idx="1">
+            <a:schemeClr val="accent1"/>
+          </a:lnRef>
+          <a:fillRef idx="3">
+            <a:schemeClr val="accent1"/>
+          </a:fillRef>
+          <a:effectRef idx="2">
+            <a:schemeClr val="accent1"/>
+          </a:effectRef>
+          <a:fontRef idx="minor">
+            <a:schemeClr val="lt1"/>
+          </a:fontRef>
+        </p:style>
+        <p:txBody>
+          <a:bodyPr rtlCol="0" anchor="ctr" wrap="square"/>
+          <a:lstStyle/>
+          <a:p>
+            <a:pPr algn="ctr">
+              <a:defRPr sz="1200" b="0">
                 <a:solidFill>
                   <a:srgbClr val="333333"/>
                 </a:solidFill>
               </a:defRPr>
             </a:pPr>
             <a:r>
-              <a:t>2. CGI's public sector products?</a:t>
-            </a:r>
-          </a:p>
-          <a:p>
-            <a:pPr>
-              <a:spcAft>
-                <a:spcPts val="500"/>
-              </a:spcAft>
-              <a:defRPr sz="1500">
+              <a:t>Layer 3: CPV Codes — standardized EU procurement categories</a:t>
+            </a:r>
+            <a:br/>
+            <a:r>
+              <a:t>Filter to IT (72xxx), consulting (79xxx), and other relevant codes.</a:t>
+            </a:r>
+          </a:p>
+        </p:txBody>
+      </p:sp>
+      <p:sp>
+        <p:nvSpPr>
+          <p:cNvPr id="11" name="TextBox 10"/>
+          <p:cNvSpPr txBox="1"/>
+          <p:nvPr/>
+        </p:nvSpPr>
+        <p:spPr>
+          <a:xfrm>
+            <a:off x="7040880" y="3474720"/>
+            <a:ext cx="2286000" cy="457200"/>
+          </a:xfrm>
+          <a:prstGeom prst="rect">
+            <a:avLst/>
+          </a:prstGeom>
+          <a:noFill/>
+        </p:spPr>
+        <p:txBody>
+          <a:bodyPr wrap="square">
+            <a:spAutoFit/>
+          </a:bodyPr>
+          <a:lstStyle/>
+          <a:p>
+            <a:pPr algn="l">
+              <a:defRPr sz="1600" b="1">
+                <a:solidFill>
+                  <a:srgbClr val="2EA44F"/>
+                </a:solidFill>
+              </a:defRPr>
+            </a:pPr>
+            <a:r>
+              <a:t>800 → ~300</a:t>
+            </a:r>
+          </a:p>
+        </p:txBody>
+      </p:sp>
+      <p:sp>
+        <p:nvSpPr>
+          <p:cNvPr id="12" name="Rounded Rectangle 11"/>
+          <p:cNvSpPr/>
+          <p:nvPr/>
+        </p:nvSpPr>
+        <p:spPr>
+          <a:xfrm>
+            <a:off x="9418320" y="3520440"/>
+            <a:ext cx="2560320" cy="411480"/>
+          </a:xfrm>
+          <a:prstGeom prst="roundRect">
+            <a:avLst/>
+          </a:prstGeom>
+          <a:solidFill>
+            <a:srgbClr val="FFF3E0"/>
+          </a:solidFill>
+          <a:ln>
+            <a:noFill/>
+          </a:ln>
+        </p:spPr>
+        <p:style>
+          <a:lnRef idx="1">
+            <a:schemeClr val="accent1"/>
+          </a:lnRef>
+          <a:fillRef idx="3">
+            <a:schemeClr val="accent1"/>
+          </a:fillRef>
+          <a:effectRef idx="2">
+            <a:schemeClr val="accent1"/>
+          </a:effectRef>
+          <a:fontRef idx="minor">
+            <a:schemeClr val="lt1"/>
+          </a:fontRef>
+        </p:style>
+        <p:txBody>
+          <a:bodyPr rtlCol="0" anchor="ctr" wrap="square"/>
+          <a:lstStyle/>
+          <a:p>
+            <a:pPr algn="ctr">
+              <a:defRPr sz="1200" b="1">
+                <a:solidFill>
+                  <a:srgbClr val="C0392B"/>
+                </a:solidFill>
+              </a:defRPr>
+            </a:pPr>
+            <a:r>
+              <a:t>Need your input</a:t>
+            </a:r>
+          </a:p>
+        </p:txBody>
+      </p:sp>
+      <p:sp>
+        <p:nvSpPr>
+          <p:cNvPr id="13" name="Rounded Rectangle 12"/>
+          <p:cNvSpPr/>
+          <p:nvPr/>
+        </p:nvSpPr>
+        <p:spPr>
+          <a:xfrm>
+            <a:off x="457200" y="4251960"/>
+            <a:ext cx="6400800" cy="685800"/>
+          </a:xfrm>
+          <a:prstGeom prst="roundRect">
+            <a:avLst/>
+          </a:prstGeom>
+          <a:solidFill>
+            <a:srgbClr val="FCF3CF"/>
+          </a:solidFill>
+          <a:ln>
+            <a:noFill/>
+          </a:ln>
+        </p:spPr>
+        <p:style>
+          <a:lnRef idx="1">
+            <a:schemeClr val="accent1"/>
+          </a:lnRef>
+          <a:fillRef idx="3">
+            <a:schemeClr val="accent1"/>
+          </a:fillRef>
+          <a:effectRef idx="2">
+            <a:schemeClr val="accent1"/>
+          </a:effectRef>
+          <a:fontRef idx="minor">
+            <a:schemeClr val="lt1"/>
+          </a:fontRef>
+        </p:style>
+        <p:txBody>
+          <a:bodyPr rtlCol="0" anchor="ctr" wrap="square"/>
+          <a:lstStyle/>
+          <a:p>
+            <a:pPr algn="ctr">
+              <a:defRPr sz="1200" b="0">
                 <a:solidFill>
                   <a:srgbClr val="333333"/>
                 </a:solidFill>
               </a:defRPr>
             </a:pPr>
             <a:r>
-              <a:t>   Aromi, and what else?</a:t>
-            </a:r>
-          </a:p>
-          <a:p>
-            <a:pPr>
-              <a:spcAft>
-                <a:spcPts val="500"/>
-              </a:spcAft>
-              <a:defRPr sz="1500">
+              <a:t>Layer 4: Keyword + Product Name Matching</a:t>
+            </a:r>
+            <a:br/>
+            <a:r>
+              <a:t>Tier 1: CGI product names (Aromi, etc.)  |  Tier 2: department keywords  |  Tier 3: everything else</a:t>
+            </a:r>
+          </a:p>
+        </p:txBody>
+      </p:sp>
+      <p:sp>
+        <p:nvSpPr>
+          <p:cNvPr id="14" name="TextBox 13"/>
+          <p:cNvSpPr txBox="1"/>
+          <p:nvPr/>
+        </p:nvSpPr>
+        <p:spPr>
+          <a:xfrm>
+            <a:off x="7040880" y="4343400"/>
+            <a:ext cx="2286000" cy="457200"/>
+          </a:xfrm>
+          <a:prstGeom prst="rect">
+            <a:avLst/>
+          </a:prstGeom>
+          <a:noFill/>
+        </p:spPr>
+        <p:txBody>
+          <a:bodyPr wrap="square">
+            <a:spAutoFit/>
+          </a:bodyPr>
+          <a:lstStyle/>
+          <a:p>
+            <a:pPr algn="l">
+              <a:defRPr sz="1600" b="1">
+                <a:solidFill>
+                  <a:srgbClr val="2EA44F"/>
+                </a:solidFill>
+              </a:defRPr>
+            </a:pPr>
+            <a:r>
+              <a:t>300 → routed</a:t>
+            </a:r>
+          </a:p>
+        </p:txBody>
+      </p:sp>
+      <p:sp>
+        <p:nvSpPr>
+          <p:cNvPr id="15" name="Rounded Rectangle 14"/>
+          <p:cNvSpPr/>
+          <p:nvPr/>
+        </p:nvSpPr>
+        <p:spPr>
+          <a:xfrm>
+            <a:off x="9418320" y="4389120"/>
+            <a:ext cx="2560320" cy="411480"/>
+          </a:xfrm>
+          <a:prstGeom prst="roundRect">
+            <a:avLst/>
+          </a:prstGeom>
+          <a:solidFill>
+            <a:srgbClr val="FFF3E0"/>
+          </a:solidFill>
+          <a:ln>
+            <a:noFill/>
+          </a:ln>
+        </p:spPr>
+        <p:style>
+          <a:lnRef idx="1">
+            <a:schemeClr val="accent1"/>
+          </a:lnRef>
+          <a:fillRef idx="3">
+            <a:schemeClr val="accent1"/>
+          </a:fillRef>
+          <a:effectRef idx="2">
+            <a:schemeClr val="accent1"/>
+          </a:effectRef>
+          <a:fontRef idx="minor">
+            <a:schemeClr val="lt1"/>
+          </a:fontRef>
+        </p:style>
+        <p:txBody>
+          <a:bodyPr rtlCol="0" anchor="ctr" wrap="square"/>
+          <a:lstStyle/>
+          <a:p>
+            <a:pPr algn="ctr">
+              <a:defRPr sz="1200" b="1">
+                <a:solidFill>
+                  <a:srgbClr val="C0392B"/>
+                </a:solidFill>
+              </a:defRPr>
+            </a:pPr>
+            <a:r>
+              <a:t>Need your input</a:t>
+            </a:r>
+          </a:p>
+        </p:txBody>
+      </p:sp>
+      <p:sp>
+        <p:nvSpPr>
+          <p:cNvPr id="16" name="Rounded Rectangle 15"/>
+          <p:cNvSpPr/>
+          <p:nvPr/>
+        </p:nvSpPr>
+        <p:spPr>
+          <a:xfrm>
+            <a:off x="457200" y="5120640"/>
+            <a:ext cx="6400800" cy="594360"/>
+          </a:xfrm>
+          <a:prstGeom prst="roundRect">
+            <a:avLst/>
+          </a:prstGeom>
+          <a:solidFill>
+            <a:srgbClr val="FCF3CF"/>
+          </a:solidFill>
+          <a:ln>
+            <a:noFill/>
+          </a:ln>
+        </p:spPr>
+        <p:style>
+          <a:lnRef idx="1">
+            <a:schemeClr val="accent1"/>
+          </a:lnRef>
+          <a:fillRef idx="3">
+            <a:schemeClr val="accent1"/>
+          </a:fillRef>
+          <a:effectRef idx="2">
+            <a:schemeClr val="accent1"/>
+          </a:effectRef>
+          <a:fontRef idx="minor">
+            <a:schemeClr val="lt1"/>
+          </a:fontRef>
+        </p:style>
+        <p:txBody>
+          <a:bodyPr rtlCol="0" anchor="ctr" wrap="square"/>
+          <a:lstStyle/>
+          <a:p>
+            <a:pPr algn="ctr">
+              <a:defRPr sz="1200" b="0">
                 <a:solidFill>
                   <a:srgbClr val="333333"/>
                 </a:solidFill>
               </a:defRPr>
             </a:pPr>
             <a:r>
-              <a:t>   → These trigger critical alerts</a:t>
-            </a:r>
-          </a:p>
-          <a:p>
-            <a:pPr>
-              <a:spcAft>
-                <a:spcPts val="500"/>
-              </a:spcAft>
-              <a:defRPr sz="1500">
-                <a:solidFill>
-                  <a:srgbClr val="333333"/>
+              <a:t>Layer 5: AI Summary + Relevance Scoring</a:t>
+            </a:r>
+            <a:br/>
+            <a:r>
+              <a:t>Only for tenders that passed all filters. Costs ~$0.002 per tender.</a:t>
+            </a:r>
+          </a:p>
+        </p:txBody>
+      </p:sp>
+      <p:sp>
+        <p:nvSpPr>
+          <p:cNvPr id="17" name="TextBox 16"/>
+          <p:cNvSpPr txBox="1"/>
+          <p:nvPr/>
+        </p:nvSpPr>
+        <p:spPr>
+          <a:xfrm>
+            <a:off x="7040880" y="5166360"/>
+            <a:ext cx="4572000" cy="365760"/>
+          </a:xfrm>
+          <a:prstGeom prst="rect">
+            <a:avLst/>
+          </a:prstGeom>
+          <a:noFill/>
+        </p:spPr>
+        <p:txBody>
+          <a:bodyPr wrap="square">
+            <a:spAutoFit/>
+          </a:bodyPr>
+          <a:lstStyle/>
+          <a:p>
+            <a:pPr algn="l">
+              <a:defRPr sz="1400" b="0">
+                <a:solidFill>
+                  <a:srgbClr val="787878"/>
                 </a:solidFill>
               </a:defRPr>
             </a:pPr>
-          </a:p>
-          <a:p>
-            <a:pPr>
-              <a:spcAft>
-                <a:spcPts val="500"/>
-              </a:spcAft>
-              <a:defRPr sz="1500">
-                <a:solidFill>
-                  <a:srgbClr val="333333"/>
+            <a:r>
+              <a:t>~$40-70/month total AI cost</a:t>
+            </a:r>
+          </a:p>
+        </p:txBody>
+      </p:sp>
+      <p:sp>
+        <p:nvSpPr>
+          <p:cNvPr id="18" name="TextBox 17"/>
+          <p:cNvSpPr txBox="1"/>
+          <p:nvPr/>
+        </p:nvSpPr>
+        <p:spPr>
+          <a:xfrm>
+            <a:off x="457200" y="5943600"/>
+            <a:ext cx="11430000" cy="365760"/>
+          </a:xfrm>
+          <a:prstGeom prst="rect">
+            <a:avLst/>
+          </a:prstGeom>
+          <a:noFill/>
+        </p:spPr>
+        <p:txBody>
+          <a:bodyPr wrap="square">
+            <a:spAutoFit/>
+          </a:bodyPr>
+          <a:lstStyle/>
+          <a:p>
+            <a:pPr algn="l">
+              <a:defRPr sz="1200" b="0">
+                <a:solidFill>
+                  <a:srgbClr val="787878"/>
                 </a:solidFill>
               </a:defRPr>
             </a:pPr>
             <a:r>
-              <a:t>3. Department keywords + contacts</a:t>
-            </a:r>
-          </a:p>
-          <a:p>
-            <a:pPr>
-              <a:spcAft>
-                <a:spcPts val="500"/>
-              </a:spcAft>
-              <a:defRPr sz="1500">
-                <a:solidFill>
-                  <a:srgbClr val="333333"/>
-                </a:solidFill>
-              </a:defRPr>
-            </a:pPr>
-            <a:r>
-              <a:t>   Who gets what, at which email?</a:t>
-            </a:r>
-          </a:p>
-          <a:p>
-            <a:pPr>
-              <a:spcAft>
-                <a:spcPts val="500"/>
-              </a:spcAft>
-              <a:defRPr sz="1500">
-                <a:solidFill>
-                  <a:srgbClr val="333333"/>
-                </a:solidFill>
-              </a:defRPr>
-            </a:pPr>
-          </a:p>
-          <a:p>
-            <a:pPr>
-              <a:spcAft>
-                <a:spcPts val="500"/>
-              </a:spcAft>
-              <a:defRPr sz="1500">
-                <a:solidFill>
-                  <a:srgbClr val="333333"/>
-                </a:solidFill>
-              </a:defRPr>
-            </a:pPr>
-            <a:r>
-              <a:t>4. Service account for tarjouspalvelu.fi</a:t>
-            </a:r>
-          </a:p>
-          <a:p>
-            <a:pPr>
-              <a:spcAft>
-                <a:spcPts val="500"/>
-              </a:spcAft>
-              <a:defRPr sz="1500">
-                <a:solidFill>
-                  <a:srgbClr val="333333"/>
-                </a:solidFill>
-              </a:defRPr>
-            </a:pPr>
-            <a:r>
-              <a:t>   (currently using personal login)</a:t>
-            </a:r>
-          </a:p>
-        </p:txBody>
-      </p:sp>
-      <p:sp>
-        <p:nvSpPr>
-          <p:cNvPr id="4" name="Content Placeholder 3"/>
-          <p:cNvSpPr>
-            <a:spLocks noGrp="1"/>
-          </p:cNvSpPr>
-          <p:nvPr>
-            <p:ph idx="23" sz="quarter"/>
-          </p:nvPr>
-        </p:nvSpPr>
-        <p:spPr/>
-        <p:txBody>
-          <a:bodyPr/>
-          <a:lstStyle/>
-          <a:p>
-            <a:pPr>
-              <a:spcAft>
-                <a:spcPts val="500"/>
-              </a:spcAft>
-              <a:defRPr b="1" sz="1500">
-                <a:solidFill>
-                  <a:srgbClr val="333333"/>
-                </a:solidFill>
-              </a:defRPr>
-            </a:pPr>
-          </a:p>
-          <a:p>
-            <a:pPr>
-              <a:spcAft>
-                <a:spcPts val="500"/>
-              </a:spcAft>
-              <a:defRPr sz="1500">
-                <a:solidFill>
-                  <a:srgbClr val="333333"/>
-                </a:solidFill>
-              </a:defRPr>
-            </a:pPr>
-            <a:r>
-              <a:t>1. Configure filters and routing</a:t>
-            </a:r>
-          </a:p>
-          <a:p>
-            <a:pPr>
-              <a:spcAft>
-                <a:spcPts val="500"/>
-              </a:spcAft>
-              <a:defRPr sz="1500">
-                <a:solidFill>
-                  <a:srgbClr val="333333"/>
-                </a:solidFill>
-              </a:defRPr>
-            </a:pPr>
-            <a:r>
-              <a:t>   Based on your answers</a:t>
-            </a:r>
-          </a:p>
-          <a:p>
-            <a:pPr>
-              <a:spcAft>
-                <a:spcPts val="500"/>
-              </a:spcAft>
-              <a:defRPr sz="1500">
-                <a:solidFill>
-                  <a:srgbClr val="333333"/>
-                </a:solidFill>
-              </a:defRPr>
-            </a:pPr>
-          </a:p>
-          <a:p>
-            <a:pPr>
-              <a:spcAft>
-                <a:spcPts val="500"/>
-              </a:spcAft>
-              <a:defRPr sz="1500">
-                <a:solidFill>
-                  <a:srgbClr val="333333"/>
-                </a:solidFill>
-              </a:defRPr>
-            </a:pPr>
-            <a:r>
-              <a:t>2. First pilot run — all of Finland</a:t>
-            </a:r>
-          </a:p>
-          <a:p>
-            <a:pPr>
-              <a:spcAft>
-                <a:spcPts val="500"/>
-              </a:spcAft>
-              <a:defRPr sz="1500">
-                <a:solidFill>
-                  <a:srgbClr val="333333"/>
-                </a:solidFill>
-              </a:defRPr>
-            </a:pPr>
-            <a:r>
-              <a:t>   Review: are we catching the right ones?</a:t>
-            </a:r>
-          </a:p>
-          <a:p>
-            <a:pPr>
-              <a:spcAft>
-                <a:spcPts val="500"/>
-              </a:spcAft>
-              <a:defRPr sz="1500">
-                <a:solidFill>
-                  <a:srgbClr val="333333"/>
-                </a:solidFill>
-              </a:defRPr>
-            </a:pPr>
-          </a:p>
-          <a:p>
-            <a:pPr>
-              <a:spcAft>
-                <a:spcPts val="500"/>
-              </a:spcAft>
-              <a:defRPr sz="1500">
-                <a:solidFill>
-                  <a:srgbClr val="333333"/>
-                </a:solidFill>
-              </a:defRPr>
-            </a:pPr>
-            <a:r>
-              <a:t>3. Iterate on keywords and filters</a:t>
-            </a:r>
-          </a:p>
-          <a:p>
-            <a:pPr>
-              <a:spcAft>
-                <a:spcPts val="500"/>
-              </a:spcAft>
-              <a:defRPr sz="1500">
-                <a:solidFill>
-                  <a:srgbClr val="333333"/>
-                </a:solidFill>
-              </a:defRPr>
-            </a:pPr>
-            <a:r>
-              <a:t>   Fine-tune based on feedback</a:t>
-            </a:r>
-          </a:p>
-          <a:p>
-            <a:pPr>
-              <a:spcAft>
-                <a:spcPts val="500"/>
-              </a:spcAft>
-              <a:defRPr sz="1500">
-                <a:solidFill>
-                  <a:srgbClr val="333333"/>
-                </a:solidFill>
-              </a:defRPr>
-            </a:pPr>
-          </a:p>
-          <a:p>
-            <a:pPr>
-              <a:spcAft>
-                <a:spcPts val="500"/>
-              </a:spcAft>
-              <a:defRPr sz="1500">
-                <a:solidFill>
-                  <a:srgbClr val="333333"/>
-                </a:solidFill>
-              </a:defRPr>
-            </a:pPr>
-            <a:r>
-              <a:t>4. Schedule daily automated runs</a:t>
-            </a:r>
-          </a:p>
-          <a:p>
-            <a:pPr>
-              <a:spcAft>
-                <a:spcPts val="500"/>
-              </a:spcAft>
-              <a:defRPr sz="1500">
-                <a:solidFill>
-                  <a:srgbClr val="333333"/>
-                </a:solidFill>
-              </a:defRPr>
-            </a:pPr>
-          </a:p>
-          <a:p>
-            <a:pPr>
-              <a:spcAft>
-                <a:spcPts val="500"/>
-              </a:spcAft>
-              <a:defRPr sz="1500">
-                <a:solidFill>
-                  <a:srgbClr val="333333"/>
-                </a:solidFill>
-              </a:defRPr>
-            </a:pPr>
-            <a:r>
-              <a:t>5. Production deployment</a:t>
+              <a:t>Numbers are estimates — actual reduction depends on which categories and codes CGI selects.</a:t>
             </a:r>
           </a:p>
         </p:txBody>
